--- a/slides/pptx/week-07.pptx
+++ b/slides/pptx/week-07.pptx
@@ -12,9 +12,10 @@
     <p:sldId id="260" r:id="rId6"/>
     <p:sldId id="261" r:id="rId7"/>
     <p:sldId id="262" r:id="rId8"/>
+    <p:sldId id="263" r:id="rId9"/>
   </p:sldIdLst>
   <p:notesMasterIdLst>
-    <p:notesMasterId r:id="rId9"/>
+    <p:notesMasterId r:id="rId10"/>
   </p:notesMasterIdLst>
   <p:sldSz cx="12191695" cy="6858000"/>
   <p:notesSz cx="6858000" cy="12191695"/>
@@ -1078,6 +1079,94 @@
 </p:notes>
 </file>
 
+<file path=ppt/notesSlides/notesSlide8.xml><?xml version="1.0" encoding="utf-8"?>
+<p:notes xmlns:a="http://schemas.openxmlformats.org/drawingml/2006/main" xmlns:r="http://schemas.openxmlformats.org/officeDocument/2006/relationships" xmlns:p="http://schemas.openxmlformats.org/presentationml/2006/main">
+  <p:cSld>
+    <p:spTree>
+      <p:nvGrpSpPr>
+        <p:cNvPr id="1" name=""/>
+        <p:cNvGrpSpPr/>
+        <p:nvPr/>
+      </p:nvGrpSpPr>
+      <p:grpSpPr>
+        <a:xfrm>
+          <a:off x="0" y="0"/>
+          <a:ext cx="0" cy="0"/>
+          <a:chOff x="0" y="0"/>
+          <a:chExt cx="0" cy="0"/>
+        </a:xfrm>
+      </p:grpSpPr>
+      <p:sp>
+        <p:nvSpPr>
+          <p:cNvPr id="2" name="Slide Image Placeholder 1"/>
+          <p:cNvSpPr>
+            <a:spLocks noGrp="1" noRot="1" noChangeAspect="1"/>
+          </p:cNvSpPr>
+          <p:nvPr>
+            <p:ph type="sldImg"/>
+          </p:nvPr>
+        </p:nvSpPr>
+        <p:spPr/>
+      </p:sp>
+      <p:sp>
+        <p:nvSpPr>
+          <p:cNvPr id="3" name="Notes Placeholder 2"/>
+          <p:cNvSpPr>
+            <a:spLocks noGrp="1"/>
+          </p:cNvSpPr>
+          <p:nvPr>
+            <p:ph type="body" idx="1"/>
+          </p:nvPr>
+        </p:nvSpPr>
+        <p:spPr/>
+        <p:txBody>
+          <a:bodyPr/>
+          <a:lstStyle/>
+          <a:p>
+            <a:r>
+              <a:rPr lang="en-US" dirty="0"/>
+              <a:t/>
+            </a:r>
+            <a:endParaRPr lang="en-US" dirty="0"/>
+          </a:p>
+        </p:txBody>
+      </p:sp>
+      <p:sp>
+        <p:nvSpPr>
+          <p:cNvPr id="4" name="Slide Number Placeholder 3"/>
+          <p:cNvSpPr>
+            <a:spLocks noGrp="1"/>
+          </p:cNvSpPr>
+          <p:nvPr>
+            <p:ph type="sldNum" sz="quarter" idx="10"/>
+          </p:nvPr>
+        </p:nvSpPr>
+        <p:spPr/>
+        <p:txBody>
+          <a:bodyPr/>
+          <a:lstStyle/>
+          <a:p>
+            <a:fld id="{F7021451-1387-4CA6-816F-3879F97B5CBC}" type="slidenum">
+              <a:rPr lang="en-US"/>
+              <a:t>8</a:t>
+            </a:fld>
+            <a:endParaRPr lang="en-US"/>
+          </a:p>
+        </p:txBody>
+      </p:sp>
+    </p:spTree>
+    <p:extLst>
+      <p:ext uri="{BB962C8B-B14F-4D97-AF65-F5344CB8AC3E}">
+        <p14:creationId xmlns:p14="http://schemas.microsoft.com/office/powerpoint/2010/main" val="1024086991"/>
+      </p:ext>
+    </p:extLst>
+  </p:cSld>
+  <p:clrMapOvr>
+    <a:masterClrMapping/>
+  </p:clrMapOvr>
+</p:notes>
+</file>
+
 <file path=ppt/slideLayouts/slideLayout1.xml><?xml version="1.0" encoding="utf-8"?>
 <p:sldLayout xmlns:a="http://schemas.openxmlformats.org/drawingml/2006/main" xmlns:r="http://schemas.openxmlformats.org/officeDocument/2006/relationships" xmlns:p="http://schemas.openxmlformats.org/presentationml/2006/main" preserve="1">
   <p:cSld name="DEFAULT">
@@ -3988,6 +4077,548 @@
 <file path=ppt/slides/slide7.xml><?xml version="1.0" encoding="utf-8"?>
 <p:sld xmlns:a="http://schemas.openxmlformats.org/drawingml/2006/main" xmlns:r="http://schemas.openxmlformats.org/officeDocument/2006/relationships" xmlns:p="http://schemas.openxmlformats.org/presentationml/2006/main">
   <p:cSld name="Slide 7">
+    <p:bg>
+      <p:bgPr>
+        <a:solidFill>
+          <a:srgbClr val="FFFFFF"/>
+        </a:solidFill>
+      </p:bgPr>
+    </p:bg>
+    <p:spTree>
+      <p:nvGrpSpPr>
+        <p:cNvPr id="1" name=""/>
+        <p:cNvGrpSpPr/>
+        <p:nvPr/>
+      </p:nvGrpSpPr>
+      <p:grpSpPr>
+        <a:xfrm>
+          <a:off x="0" y="0"/>
+          <a:ext cx="0" cy="0"/>
+          <a:chOff x="0" y="0"/>
+          <a:chExt cx="0" cy="0"/>
+        </a:xfrm>
+      </p:grpSpPr>
+      <p:sp>
+        <p:nvSpPr>
+          <p:cNvPr id="2" name="Text 0"/>
+          <p:cNvSpPr/>
+          <p:nvPr/>
+        </p:nvSpPr>
+        <p:spPr>
+          <a:xfrm>
+            <a:off x="640080" y="640080"/>
+            <a:ext cx="10058400" cy="320040"/>
+          </a:xfrm>
+          <a:prstGeom prst="rect">
+            <a:avLst/>
+          </a:prstGeom>
+          <a:noFill/>
+          <a:ln/>
+        </p:spPr>
+        <p:txBody>
+          <a:bodyPr wrap="square" rtlCol="0" anchor="ctr"/>
+          <a:lstStyle/>
+          <a:p>
+            <a:pPr indent="0" marL="0">
+              <a:buNone/>
+            </a:pPr>
+            <a:r>
+              <a:rPr lang="en-US" sz="1300" b="1" spc="300" kern="0" dirty="0">
+                <a:solidFill>
+                  <a:srgbClr val="7A3B2E"/>
+                </a:solidFill>
+                <a:latin typeface="Calibri" pitchFamily="34" charset="0"/>
+                <a:ea typeface="Calibri" pitchFamily="34" charset="-122"/>
+                <a:cs typeface="Calibri" pitchFamily="34" charset="-120"/>
+              </a:rPr>
+              <a:t>HOW THIS WEEK CONNECTS</a:t>
+            </a:r>
+            <a:endParaRPr lang="en-US" sz="1300" dirty="0"/>
+          </a:p>
+        </p:txBody>
+      </p:sp>
+      <p:sp>
+        <p:nvSpPr>
+          <p:cNvPr id="3" name="Text 1"/>
+          <p:cNvSpPr/>
+          <p:nvPr/>
+        </p:nvSpPr>
+        <p:spPr>
+          <a:xfrm>
+            <a:off x="640080" y="987552"/>
+            <a:ext cx="10058400" cy="640080"/>
+          </a:xfrm>
+          <a:prstGeom prst="rect">
+            <a:avLst/>
+          </a:prstGeom>
+          <a:noFill/>
+          <a:ln/>
+        </p:spPr>
+        <p:txBody>
+          <a:bodyPr wrap="square" rtlCol="0" anchor="ctr"/>
+          <a:lstStyle/>
+          <a:p>
+            <a:pPr indent="0" marL="0">
+              <a:buNone/>
+            </a:pPr>
+            <a:r>
+              <a:rPr lang="en-US" sz="2800" b="1" dirty="0">
+                <a:solidFill>
+                  <a:srgbClr val="1A1A1A"/>
+                </a:solidFill>
+                <a:latin typeface="Cambria" pitchFamily="34" charset="0"/>
+                <a:ea typeface="Cambria" pitchFamily="34" charset="-122"/>
+                <a:cs typeface="Cambria" pitchFamily="34" charset="-120"/>
+              </a:rPr>
+              <a:t>The course's through-lines</a:t>
+            </a:r>
+            <a:endParaRPr lang="en-US" sz="2800" dirty="0"/>
+          </a:p>
+        </p:txBody>
+      </p:sp>
+      <p:sp>
+        <p:nvSpPr>
+          <p:cNvPr id="4" name="Shape 2"/>
+          <p:cNvSpPr/>
+          <p:nvPr/>
+        </p:nvSpPr>
+        <p:spPr>
+          <a:xfrm>
+            <a:off x="640080" y="2057400"/>
+            <a:ext cx="457200" cy="457200"/>
+          </a:xfrm>
+          <a:prstGeom prst="roundRect">
+            <a:avLst>
+              <a:gd name="adj" fmla="val 16000"/>
+            </a:avLst>
+          </a:prstGeom>
+          <a:solidFill>
+            <a:srgbClr val="7A3B2E"/>
+          </a:solidFill>
+          <a:ln/>
+        </p:spPr>
+      </p:sp>
+      <p:sp>
+        <p:nvSpPr>
+          <p:cNvPr id="5" name="Text 3"/>
+          <p:cNvSpPr/>
+          <p:nvPr/>
+        </p:nvSpPr>
+        <p:spPr>
+          <a:xfrm>
+            <a:off x="640080" y="2057400"/>
+            <a:ext cx="457200" cy="457200"/>
+          </a:xfrm>
+          <a:prstGeom prst="rect">
+            <a:avLst/>
+          </a:prstGeom>
+          <a:noFill/>
+          <a:ln/>
+        </p:spPr>
+        <p:txBody>
+          <a:bodyPr wrap="square" rtlCol="0" anchor="ctr"/>
+          <a:lstStyle/>
+          <a:p>
+            <a:pPr algn="ctr" indent="0" marL="0">
+              <a:buNone/>
+            </a:pPr>
+            <a:r>
+              <a:rPr lang="en-US" sz="2000" b="1" dirty="0">
+                <a:solidFill>
+                  <a:srgbClr val="FFFFFF"/>
+                </a:solidFill>
+                <a:latin typeface="Cambria" pitchFamily="34" charset="0"/>
+                <a:ea typeface="Cambria" pitchFamily="34" charset="-122"/>
+                <a:cs typeface="Cambria" pitchFamily="34" charset="-120"/>
+              </a:rPr>
+              <a:t>1</a:t>
+            </a:r>
+            <a:endParaRPr lang="en-US" sz="2000" dirty="0"/>
+          </a:p>
+        </p:txBody>
+      </p:sp>
+      <p:sp>
+        <p:nvSpPr>
+          <p:cNvPr id="6" name="Text 4"/>
+          <p:cNvSpPr/>
+          <p:nvPr/>
+        </p:nvSpPr>
+        <p:spPr>
+          <a:xfrm>
+            <a:off x="1371600" y="2020824"/>
+            <a:ext cx="10332720" cy="411480"/>
+          </a:xfrm>
+          <a:prstGeom prst="rect">
+            <a:avLst/>
+          </a:prstGeom>
+          <a:noFill/>
+          <a:ln/>
+        </p:spPr>
+        <p:txBody>
+          <a:bodyPr wrap="square" rtlCol="0" anchor="ctr"/>
+          <a:lstStyle/>
+          <a:p>
+            <a:pPr indent="0" marL="0">
+              <a:buNone/>
+            </a:pPr>
+            <a:r>
+              <a:rPr lang="en-US" sz="1900" b="1" dirty="0">
+                <a:solidFill>
+                  <a:srgbClr val="7A3B2E"/>
+                </a:solidFill>
+                <a:latin typeface="Cambria" pitchFamily="34" charset="0"/>
+                <a:ea typeface="Cambria" pitchFamily="34" charset="-122"/>
+                <a:cs typeface="Cambria" pitchFamily="34" charset="-120"/>
+              </a:rPr>
+              <a:t>The reader you can't see</a:t>
+            </a:r>
+            <a:endParaRPr lang="en-US" sz="1900" dirty="0"/>
+          </a:p>
+        </p:txBody>
+      </p:sp>
+      <p:sp>
+        <p:nvSpPr>
+          <p:cNvPr id="7" name="Text 5"/>
+          <p:cNvSpPr/>
+          <p:nvPr/>
+        </p:nvSpPr>
+        <p:spPr>
+          <a:xfrm>
+            <a:off x="1371600" y="2441448"/>
+            <a:ext cx="10332720" cy="914400"/>
+          </a:xfrm>
+          <a:prstGeom prst="rect">
+            <a:avLst/>
+          </a:prstGeom>
+          <a:noFill/>
+          <a:ln/>
+        </p:spPr>
+        <p:txBody>
+          <a:bodyPr wrap="square" rtlCol="0" anchor="t">
+            <a:spAutoFit/>
+          </a:bodyPr>
+          <a:lstStyle/>
+          <a:p>
+            <a:pPr indent="0" marL="0">
+              <a:lnSpc>
+                <a:spcPct val="112000"/>
+              </a:lnSpc>
+              <a:buNone/>
+            </a:pPr>
+            <a:r>
+              <a:rPr lang="en-US" sz="1450" dirty="0">
+                <a:solidFill>
+                  <a:srgbClr val="1A1A1A"/>
+                </a:solidFill>
+                <a:latin typeface="Calibri" pitchFamily="34" charset="0"/>
+                <a:ea typeface="Calibri" pitchFamily="34" charset="-122"/>
+                <a:cs typeface="Calibri" pitchFamily="34" charset="-120"/>
+              </a:rPr>
+              <a:t>The powerful, opaque annotator: trust the labels it is sure of, check the rest.</a:t>
+            </a:r>
+            <a:endParaRPr lang="en-US" sz="1450" dirty="0"/>
+          </a:p>
+        </p:txBody>
+      </p:sp>
+      <p:sp>
+        <p:nvSpPr>
+          <p:cNvPr id="8" name="Shape 6"/>
+          <p:cNvSpPr/>
+          <p:nvPr/>
+        </p:nvSpPr>
+        <p:spPr>
+          <a:xfrm>
+            <a:off x="640080" y="3520440"/>
+            <a:ext cx="457200" cy="457200"/>
+          </a:xfrm>
+          <a:prstGeom prst="roundRect">
+            <a:avLst>
+              <a:gd name="adj" fmla="val 16000"/>
+            </a:avLst>
+          </a:prstGeom>
+          <a:solidFill>
+            <a:srgbClr val="3F6F5F"/>
+          </a:solidFill>
+          <a:ln/>
+        </p:spPr>
+      </p:sp>
+      <p:sp>
+        <p:nvSpPr>
+          <p:cNvPr id="9" name="Text 7"/>
+          <p:cNvSpPr/>
+          <p:nvPr/>
+        </p:nvSpPr>
+        <p:spPr>
+          <a:xfrm>
+            <a:off x="640080" y="3520440"/>
+            <a:ext cx="457200" cy="457200"/>
+          </a:xfrm>
+          <a:prstGeom prst="rect">
+            <a:avLst/>
+          </a:prstGeom>
+          <a:noFill/>
+          <a:ln/>
+        </p:spPr>
+        <p:txBody>
+          <a:bodyPr wrap="square" rtlCol="0" anchor="ctr"/>
+          <a:lstStyle/>
+          <a:p>
+            <a:pPr algn="ctr" indent="0" marL="0">
+              <a:buNone/>
+            </a:pPr>
+            <a:r>
+              <a:rPr lang="en-US" sz="2000" b="1" dirty="0">
+                <a:solidFill>
+                  <a:srgbClr val="FFFFFF"/>
+                </a:solidFill>
+                <a:latin typeface="Cambria" pitchFamily="34" charset="0"/>
+                <a:ea typeface="Cambria" pitchFamily="34" charset="-122"/>
+                <a:cs typeface="Cambria" pitchFamily="34" charset="-120"/>
+              </a:rPr>
+              <a:t>2</a:t>
+            </a:r>
+            <a:endParaRPr lang="en-US" sz="2000" dirty="0"/>
+          </a:p>
+        </p:txBody>
+      </p:sp>
+      <p:sp>
+        <p:nvSpPr>
+          <p:cNvPr id="10" name="Text 8"/>
+          <p:cNvSpPr/>
+          <p:nvPr/>
+        </p:nvSpPr>
+        <p:spPr>
+          <a:xfrm>
+            <a:off x="1371600" y="3483864"/>
+            <a:ext cx="10332720" cy="411480"/>
+          </a:xfrm>
+          <a:prstGeom prst="rect">
+            <a:avLst/>
+          </a:prstGeom>
+          <a:noFill/>
+          <a:ln/>
+        </p:spPr>
+        <p:txBody>
+          <a:bodyPr wrap="square" rtlCol="0" anchor="ctr"/>
+          <a:lstStyle/>
+          <a:p>
+            <a:pPr indent="0" marL="0">
+              <a:buNone/>
+            </a:pPr>
+            <a:r>
+              <a:rPr lang="en-US" sz="1900" b="1" dirty="0">
+                <a:solidFill>
+                  <a:srgbClr val="3F6F5F"/>
+                </a:solidFill>
+                <a:latin typeface="Cambria" pitchFamily="34" charset="0"/>
+                <a:ea typeface="Cambria" pitchFamily="34" charset="-122"/>
+                <a:cs typeface="Cambria" pitchFamily="34" charset="-120"/>
+              </a:rPr>
+              <a:t>Whose judgment are you renting</a:t>
+            </a:r>
+            <a:endParaRPr lang="en-US" sz="1900" dirty="0"/>
+          </a:p>
+        </p:txBody>
+      </p:sp>
+      <p:sp>
+        <p:nvSpPr>
+          <p:cNvPr id="11" name="Text 9"/>
+          <p:cNvSpPr/>
+          <p:nvPr/>
+        </p:nvSpPr>
+        <p:spPr>
+          <a:xfrm>
+            <a:off x="1371600" y="3904488"/>
+            <a:ext cx="10332720" cy="914400"/>
+          </a:xfrm>
+          <a:prstGeom prst="rect">
+            <a:avLst/>
+          </a:prstGeom>
+          <a:noFill/>
+          <a:ln/>
+        </p:spPr>
+        <p:txBody>
+          <a:bodyPr wrap="square" rtlCol="0" anchor="t">
+            <a:spAutoFit/>
+          </a:bodyPr>
+          <a:lstStyle/>
+          <a:p>
+            <a:pPr indent="0" marL="0">
+              <a:lnSpc>
+                <a:spcPct val="112000"/>
+              </a:lnSpc>
+              <a:buNone/>
+            </a:pPr>
+            <a:r>
+              <a:rPr lang="en-US" sz="1450" dirty="0">
+                <a:solidFill>
+                  <a:srgbClr val="1A1A1A"/>
+                </a:solidFill>
+                <a:latin typeface="Calibri" pitchFamily="34" charset="0"/>
+                <a:ea typeface="Calibri" pitchFamily="34" charset="-122"/>
+                <a:cs typeface="Calibri" pitchFamily="34" charset="-120"/>
+              </a:rPr>
+              <a:t>Its reading was learned from creative work scraped largely without permission.</a:t>
+            </a:r>
+            <a:endParaRPr lang="en-US" sz="1450" dirty="0"/>
+          </a:p>
+        </p:txBody>
+      </p:sp>
+      <p:sp>
+        <p:nvSpPr>
+          <p:cNvPr id="12" name="Shape 10"/>
+          <p:cNvSpPr/>
+          <p:nvPr/>
+        </p:nvSpPr>
+        <p:spPr>
+          <a:xfrm>
+            <a:off x="640080" y="4983480"/>
+            <a:ext cx="457200" cy="457200"/>
+          </a:xfrm>
+          <a:prstGeom prst="roundRect">
+            <a:avLst>
+              <a:gd name="adj" fmla="val 16000"/>
+            </a:avLst>
+          </a:prstGeom>
+          <a:solidFill>
+            <a:srgbClr val="B9852F"/>
+          </a:solidFill>
+          <a:ln/>
+        </p:spPr>
+      </p:sp>
+      <p:sp>
+        <p:nvSpPr>
+          <p:cNvPr id="13" name="Text 11"/>
+          <p:cNvSpPr/>
+          <p:nvPr/>
+        </p:nvSpPr>
+        <p:spPr>
+          <a:xfrm>
+            <a:off x="640080" y="4983480"/>
+            <a:ext cx="457200" cy="457200"/>
+          </a:xfrm>
+          <a:prstGeom prst="rect">
+            <a:avLst/>
+          </a:prstGeom>
+          <a:noFill/>
+          <a:ln/>
+        </p:spPr>
+        <p:txBody>
+          <a:bodyPr wrap="square" rtlCol="0" anchor="ctr"/>
+          <a:lstStyle/>
+          <a:p>
+            <a:pPr algn="ctr" indent="0" marL="0">
+              <a:buNone/>
+            </a:pPr>
+            <a:r>
+              <a:rPr lang="en-US" sz="2000" b="1" dirty="0">
+                <a:solidFill>
+                  <a:srgbClr val="FFFFFF"/>
+                </a:solidFill>
+                <a:latin typeface="Cambria" pitchFamily="34" charset="0"/>
+                <a:ea typeface="Cambria" pitchFamily="34" charset="-122"/>
+                <a:cs typeface="Cambria" pitchFamily="34" charset="-120"/>
+              </a:rPr>
+              <a:t>3</a:t>
+            </a:r>
+            <a:endParaRPr lang="en-US" sz="2000" dirty="0"/>
+          </a:p>
+        </p:txBody>
+      </p:sp>
+      <p:sp>
+        <p:nvSpPr>
+          <p:cNvPr id="14" name="Text 12"/>
+          <p:cNvSpPr/>
+          <p:nvPr/>
+        </p:nvSpPr>
+        <p:spPr>
+          <a:xfrm>
+            <a:off x="1371600" y="4946904"/>
+            <a:ext cx="10332720" cy="411480"/>
+          </a:xfrm>
+          <a:prstGeom prst="rect">
+            <a:avLst/>
+          </a:prstGeom>
+          <a:noFill/>
+          <a:ln/>
+        </p:spPr>
+        <p:txBody>
+          <a:bodyPr wrap="square" rtlCol="0" anchor="ctr"/>
+          <a:lstStyle/>
+          <a:p>
+            <a:pPr indent="0" marL="0">
+              <a:buNone/>
+            </a:pPr>
+            <a:r>
+              <a:rPr lang="en-US" sz="1900" b="1" dirty="0">
+                <a:solidFill>
+                  <a:srgbClr val="B9852F"/>
+                </a:solidFill>
+                <a:latin typeface="Cambria" pitchFamily="34" charset="0"/>
+                <a:ea typeface="Cambria" pitchFamily="34" charset="-122"/>
+                <a:cs typeface="Cambria" pitchFamily="34" charset="-120"/>
+              </a:rPr>
+              <a:t>The third reader (go further)</a:t>
+            </a:r>
+            <a:endParaRPr lang="en-US" sz="1900" dirty="0"/>
+          </a:p>
+        </p:txBody>
+      </p:sp>
+      <p:sp>
+        <p:nvSpPr>
+          <p:cNvPr id="15" name="Text 13"/>
+          <p:cNvSpPr/>
+          <p:nvPr/>
+        </p:nvSpPr>
+        <p:spPr>
+          <a:xfrm>
+            <a:off x="1371600" y="5367528"/>
+            <a:ext cx="10332720" cy="914400"/>
+          </a:xfrm>
+          <a:prstGeom prst="rect">
+            <a:avLst/>
+          </a:prstGeom>
+          <a:noFill/>
+          <a:ln/>
+        </p:spPr>
+        <p:txBody>
+          <a:bodyPr wrap="square" rtlCol="0" anchor="t">
+            <a:spAutoFit/>
+          </a:bodyPr>
+          <a:lstStyle/>
+          <a:p>
+            <a:pPr indent="0" marL="0">
+              <a:lnSpc>
+                <a:spcPct val="112000"/>
+              </a:lnSpc>
+              <a:buNone/>
+            </a:pPr>
+            <a:r>
+              <a:rPr lang="en-US" sz="1450" dirty="0">
+                <a:solidFill>
+                  <a:srgbClr val="1A1A1A"/>
+                </a:solidFill>
+                <a:latin typeface="Calibri" pitchFamily="34" charset="0"/>
+                <a:ea typeface="Calibri" pitchFamily="34" charset="-122"/>
+                <a:cs typeface="Calibri" pitchFamily="34" charset="-120"/>
+              </a:rPr>
+              <a:t>Fine-tune a model you own, transparent, powerful, now yours.</a:t>
+            </a:r>
+            <a:endParaRPr lang="en-US" sz="1450" dirty="0"/>
+          </a:p>
+        </p:txBody>
+      </p:sp>
+    </p:spTree>
+  </p:cSld>
+  <p:clrMapOvr>
+    <a:masterClrMapping/>
+  </p:clrMapOvr>
+</p:sld>
+</file>
+
+<file path=ppt/slides/slide8.xml><?xml version="1.0" encoding="utf-8"?>
+<p:sld xmlns:a="http://schemas.openxmlformats.org/drawingml/2006/main" xmlns:r="http://schemas.openxmlformats.org/officeDocument/2006/relationships" xmlns:p="http://schemas.openxmlformats.org/presentationml/2006/main">
+  <p:cSld name="Slide 8">
     <p:bg>
       <p:bgPr>
         <a:solidFill>

--- a/slides/pptx/week-07.pptx
+++ b/slides/pptx/week-07.pptx
@@ -13,9 +13,12 @@
     <p:sldId id="261" r:id="rId7"/>
     <p:sldId id="262" r:id="rId8"/>
     <p:sldId id="263" r:id="rId9"/>
+    <p:sldId id="264" r:id="rId10"/>
+    <p:sldId id="265" r:id="rId11"/>
+    <p:sldId id="266" r:id="rId12"/>
   </p:sldIdLst>
   <p:notesMasterIdLst>
-    <p:notesMasterId r:id="rId10"/>
+    <p:notesMasterId r:id="rId13"/>
   </p:notesMasterIdLst>
   <p:sldSz cx="12191695" cy="6858000"/>
   <p:notesSz cx="6858000" cy="12191695"/>
@@ -551,6 +554,182 @@
 </p:notes>
 </file>
 
+<file path=ppt/notesSlides/notesSlide10.xml><?xml version="1.0" encoding="utf-8"?>
+<p:notes xmlns:a="http://schemas.openxmlformats.org/drawingml/2006/main" xmlns:r="http://schemas.openxmlformats.org/officeDocument/2006/relationships" xmlns:p="http://schemas.openxmlformats.org/presentationml/2006/main">
+  <p:cSld>
+    <p:spTree>
+      <p:nvGrpSpPr>
+        <p:cNvPr id="1" name=""/>
+        <p:cNvGrpSpPr/>
+        <p:nvPr/>
+      </p:nvGrpSpPr>
+      <p:grpSpPr>
+        <a:xfrm>
+          <a:off x="0" y="0"/>
+          <a:ext cx="0" cy="0"/>
+          <a:chOff x="0" y="0"/>
+          <a:chExt cx="0" cy="0"/>
+        </a:xfrm>
+      </p:grpSpPr>
+      <p:sp>
+        <p:nvSpPr>
+          <p:cNvPr id="2" name="Slide Image Placeholder 1"/>
+          <p:cNvSpPr>
+            <a:spLocks noGrp="1" noRot="1" noChangeAspect="1"/>
+          </p:cNvSpPr>
+          <p:nvPr>
+            <p:ph type="sldImg"/>
+          </p:nvPr>
+        </p:nvSpPr>
+        <p:spPr/>
+      </p:sp>
+      <p:sp>
+        <p:nvSpPr>
+          <p:cNvPr id="3" name="Notes Placeholder 2"/>
+          <p:cNvSpPr>
+            <a:spLocks noGrp="1"/>
+          </p:cNvSpPr>
+          <p:nvPr>
+            <p:ph type="body" idx="1"/>
+          </p:nvPr>
+        </p:nvSpPr>
+        <p:spPr/>
+        <p:txBody>
+          <a:bodyPr/>
+          <a:lstStyle/>
+          <a:p>
+            <a:r>
+              <a:rPr lang="en-US" dirty="0"/>
+              <a:t/>
+            </a:r>
+            <a:endParaRPr lang="en-US" dirty="0"/>
+          </a:p>
+        </p:txBody>
+      </p:sp>
+      <p:sp>
+        <p:nvSpPr>
+          <p:cNvPr id="4" name="Slide Number Placeholder 3"/>
+          <p:cNvSpPr>
+            <a:spLocks noGrp="1"/>
+          </p:cNvSpPr>
+          <p:nvPr>
+            <p:ph type="sldNum" sz="quarter" idx="10"/>
+          </p:nvPr>
+        </p:nvSpPr>
+        <p:spPr/>
+        <p:txBody>
+          <a:bodyPr/>
+          <a:lstStyle/>
+          <a:p>
+            <a:fld id="{F7021451-1387-4CA6-816F-3879F97B5CBC}" type="slidenum">
+              <a:rPr lang="en-US"/>
+              <a:t>10</a:t>
+            </a:fld>
+            <a:endParaRPr lang="en-US"/>
+          </a:p>
+        </p:txBody>
+      </p:sp>
+    </p:spTree>
+    <p:extLst>
+      <p:ext uri="{BB962C8B-B14F-4D97-AF65-F5344CB8AC3E}">
+        <p14:creationId xmlns:p14="http://schemas.microsoft.com/office/powerpoint/2010/main" val="1024086991"/>
+      </p:ext>
+    </p:extLst>
+  </p:cSld>
+  <p:clrMapOvr>
+    <a:masterClrMapping/>
+  </p:clrMapOvr>
+</p:notes>
+</file>
+
+<file path=ppt/notesSlides/notesSlide11.xml><?xml version="1.0" encoding="utf-8"?>
+<p:notes xmlns:a="http://schemas.openxmlformats.org/drawingml/2006/main" xmlns:r="http://schemas.openxmlformats.org/officeDocument/2006/relationships" xmlns:p="http://schemas.openxmlformats.org/presentationml/2006/main">
+  <p:cSld>
+    <p:spTree>
+      <p:nvGrpSpPr>
+        <p:cNvPr id="1" name=""/>
+        <p:cNvGrpSpPr/>
+        <p:nvPr/>
+      </p:nvGrpSpPr>
+      <p:grpSpPr>
+        <a:xfrm>
+          <a:off x="0" y="0"/>
+          <a:ext cx="0" cy="0"/>
+          <a:chOff x="0" y="0"/>
+          <a:chExt cx="0" cy="0"/>
+        </a:xfrm>
+      </p:grpSpPr>
+      <p:sp>
+        <p:nvSpPr>
+          <p:cNvPr id="2" name="Slide Image Placeholder 1"/>
+          <p:cNvSpPr>
+            <a:spLocks noGrp="1" noRot="1" noChangeAspect="1"/>
+          </p:cNvSpPr>
+          <p:nvPr>
+            <p:ph type="sldImg"/>
+          </p:nvPr>
+        </p:nvSpPr>
+        <p:spPr/>
+      </p:sp>
+      <p:sp>
+        <p:nvSpPr>
+          <p:cNvPr id="3" name="Notes Placeholder 2"/>
+          <p:cNvSpPr>
+            <a:spLocks noGrp="1"/>
+          </p:cNvSpPr>
+          <p:nvPr>
+            <p:ph type="body" idx="1"/>
+          </p:nvPr>
+        </p:nvSpPr>
+        <p:spPr/>
+        <p:txBody>
+          <a:bodyPr/>
+          <a:lstStyle/>
+          <a:p>
+            <a:r>
+              <a:rPr lang="en-US" dirty="0"/>
+              <a:t/>
+            </a:r>
+            <a:endParaRPr lang="en-US" dirty="0"/>
+          </a:p>
+        </p:txBody>
+      </p:sp>
+      <p:sp>
+        <p:nvSpPr>
+          <p:cNvPr id="4" name="Slide Number Placeholder 3"/>
+          <p:cNvSpPr>
+            <a:spLocks noGrp="1"/>
+          </p:cNvSpPr>
+          <p:nvPr>
+            <p:ph type="sldNum" sz="quarter" idx="10"/>
+          </p:nvPr>
+        </p:nvSpPr>
+        <p:spPr/>
+        <p:txBody>
+          <a:bodyPr/>
+          <a:lstStyle/>
+          <a:p>
+            <a:fld id="{F7021451-1387-4CA6-816F-3879F97B5CBC}" type="slidenum">
+              <a:rPr lang="en-US"/>
+              <a:t>11</a:t>
+            </a:fld>
+            <a:endParaRPr lang="en-US"/>
+          </a:p>
+        </p:txBody>
+      </p:sp>
+    </p:spTree>
+    <p:extLst>
+      <p:ext uri="{BB962C8B-B14F-4D97-AF65-F5344CB8AC3E}">
+        <p14:creationId xmlns:p14="http://schemas.microsoft.com/office/powerpoint/2010/main" val="1024086991"/>
+      </p:ext>
+    </p:extLst>
+  </p:cSld>
+  <p:clrMapOvr>
+    <a:masterClrMapping/>
+  </p:clrMapOvr>
+</p:notes>
+</file>
+
 <file path=ppt/notesSlides/notesSlide2.xml><?xml version="1.0" encoding="utf-8"?>
 <p:notes xmlns:a="http://schemas.openxmlformats.org/drawingml/2006/main" xmlns:r="http://schemas.openxmlformats.org/officeDocument/2006/relationships" xmlns:p="http://schemas.openxmlformats.org/presentationml/2006/main">
   <p:cSld>
@@ -1149,6 +1328,94 @@
             <a:fld id="{F7021451-1387-4CA6-816F-3879F97B5CBC}" type="slidenum">
               <a:rPr lang="en-US"/>
               <a:t>8</a:t>
+            </a:fld>
+            <a:endParaRPr lang="en-US"/>
+          </a:p>
+        </p:txBody>
+      </p:sp>
+    </p:spTree>
+    <p:extLst>
+      <p:ext uri="{BB962C8B-B14F-4D97-AF65-F5344CB8AC3E}">
+        <p14:creationId xmlns:p14="http://schemas.microsoft.com/office/powerpoint/2010/main" val="1024086991"/>
+      </p:ext>
+    </p:extLst>
+  </p:cSld>
+  <p:clrMapOvr>
+    <a:masterClrMapping/>
+  </p:clrMapOvr>
+</p:notes>
+</file>
+
+<file path=ppt/notesSlides/notesSlide9.xml><?xml version="1.0" encoding="utf-8"?>
+<p:notes xmlns:a="http://schemas.openxmlformats.org/drawingml/2006/main" xmlns:r="http://schemas.openxmlformats.org/officeDocument/2006/relationships" xmlns:p="http://schemas.openxmlformats.org/presentationml/2006/main">
+  <p:cSld>
+    <p:spTree>
+      <p:nvGrpSpPr>
+        <p:cNvPr id="1" name=""/>
+        <p:cNvGrpSpPr/>
+        <p:nvPr/>
+      </p:nvGrpSpPr>
+      <p:grpSpPr>
+        <a:xfrm>
+          <a:off x="0" y="0"/>
+          <a:ext cx="0" cy="0"/>
+          <a:chOff x="0" y="0"/>
+          <a:chExt cx="0" cy="0"/>
+        </a:xfrm>
+      </p:grpSpPr>
+      <p:sp>
+        <p:nvSpPr>
+          <p:cNvPr id="2" name="Slide Image Placeholder 1"/>
+          <p:cNvSpPr>
+            <a:spLocks noGrp="1" noRot="1" noChangeAspect="1"/>
+          </p:cNvSpPr>
+          <p:nvPr>
+            <p:ph type="sldImg"/>
+          </p:nvPr>
+        </p:nvSpPr>
+        <p:spPr/>
+      </p:sp>
+      <p:sp>
+        <p:nvSpPr>
+          <p:cNvPr id="3" name="Notes Placeholder 2"/>
+          <p:cNvSpPr>
+            <a:spLocks noGrp="1"/>
+          </p:cNvSpPr>
+          <p:nvPr>
+            <p:ph type="body" idx="1"/>
+          </p:nvPr>
+        </p:nvSpPr>
+        <p:spPr/>
+        <p:txBody>
+          <a:bodyPr/>
+          <a:lstStyle/>
+          <a:p>
+            <a:r>
+              <a:rPr lang="en-US" dirty="0"/>
+              <a:t/>
+            </a:r>
+            <a:endParaRPr lang="en-US" dirty="0"/>
+          </a:p>
+        </p:txBody>
+      </p:sp>
+      <p:sp>
+        <p:nvSpPr>
+          <p:cNvPr id="4" name="Slide Number Placeholder 3"/>
+          <p:cNvSpPr>
+            <a:spLocks noGrp="1"/>
+          </p:cNvSpPr>
+          <p:nvPr>
+            <p:ph type="sldNum" sz="quarter" idx="10"/>
+          </p:nvPr>
+        </p:nvSpPr>
+        <p:spPr/>
+        <p:txBody>
+          <a:bodyPr/>
+          <a:lstStyle/>
+          <a:p>
+            <a:fld id="{F7021451-1387-4CA6-816F-3879F97B5CBC}" type="slidenum">
+              <a:rPr lang="en-US"/>
+              <a:t>9</a:t>
             </a:fld>
             <a:endParaRPr lang="en-US"/>
           </a:p>
@@ -2025,6 +2292,982 @@
 </p:sld>
 </file>
 
+<file path=ppt/slides/slide10.xml><?xml version="1.0" encoding="utf-8"?>
+<p:sld xmlns:a="http://schemas.openxmlformats.org/drawingml/2006/main" xmlns:r="http://schemas.openxmlformats.org/officeDocument/2006/relationships" xmlns:p="http://schemas.openxmlformats.org/presentationml/2006/main">
+  <p:cSld name="Slide 10">
+    <p:bg>
+      <p:bgPr>
+        <a:solidFill>
+          <a:srgbClr val="FFFFFF"/>
+        </a:solidFill>
+      </p:bgPr>
+    </p:bg>
+    <p:spTree>
+      <p:nvGrpSpPr>
+        <p:cNvPr id="1" name=""/>
+        <p:cNvGrpSpPr/>
+        <p:nvPr/>
+      </p:nvGrpSpPr>
+      <p:grpSpPr>
+        <a:xfrm>
+          <a:off x="0" y="0"/>
+          <a:ext cx="0" cy="0"/>
+          <a:chOff x="0" y="0"/>
+          <a:chExt cx="0" cy="0"/>
+        </a:xfrm>
+      </p:grpSpPr>
+      <p:sp>
+        <p:nvSpPr>
+          <p:cNvPr id="2" name="Text 0"/>
+          <p:cNvSpPr/>
+          <p:nvPr/>
+        </p:nvSpPr>
+        <p:spPr>
+          <a:xfrm>
+            <a:off x="640080" y="640080"/>
+            <a:ext cx="10058400" cy="320040"/>
+          </a:xfrm>
+          <a:prstGeom prst="rect">
+            <a:avLst/>
+          </a:prstGeom>
+          <a:noFill/>
+          <a:ln/>
+        </p:spPr>
+        <p:txBody>
+          <a:bodyPr wrap="square" rtlCol="0" anchor="ctr"/>
+          <a:lstStyle/>
+          <a:p>
+            <a:pPr indent="0" marL="0">
+              <a:buNone/>
+            </a:pPr>
+            <a:r>
+              <a:rPr lang="en-US" sz="1300" b="1" spc="300" kern="0" dirty="0">
+                <a:solidFill>
+                  <a:srgbClr val="7A3B2E"/>
+                </a:solidFill>
+                <a:latin typeface="Calibri" pitchFamily="34" charset="0"/>
+                <a:ea typeface="Calibri" pitchFamily="34" charset="-122"/>
+                <a:cs typeface="Calibri" pitchFamily="34" charset="-120"/>
+              </a:rPr>
+              <a:t>HOW THIS WEEK CONNECTS</a:t>
+            </a:r>
+            <a:endParaRPr lang="en-US" sz="1300" dirty="0"/>
+          </a:p>
+        </p:txBody>
+      </p:sp>
+      <p:sp>
+        <p:nvSpPr>
+          <p:cNvPr id="3" name="Text 1"/>
+          <p:cNvSpPr/>
+          <p:nvPr/>
+        </p:nvSpPr>
+        <p:spPr>
+          <a:xfrm>
+            <a:off x="640080" y="987552"/>
+            <a:ext cx="10058400" cy="640080"/>
+          </a:xfrm>
+          <a:prstGeom prst="rect">
+            <a:avLst/>
+          </a:prstGeom>
+          <a:noFill/>
+          <a:ln/>
+        </p:spPr>
+        <p:txBody>
+          <a:bodyPr wrap="square" rtlCol="0" anchor="ctr"/>
+          <a:lstStyle/>
+          <a:p>
+            <a:pPr indent="0" marL="0">
+              <a:buNone/>
+            </a:pPr>
+            <a:r>
+              <a:rPr lang="en-US" sz="2800" b="1" dirty="0">
+                <a:solidFill>
+                  <a:srgbClr val="1A1A1A"/>
+                </a:solidFill>
+                <a:latin typeface="Cambria" pitchFamily="34" charset="0"/>
+                <a:ea typeface="Cambria" pitchFamily="34" charset="-122"/>
+                <a:cs typeface="Cambria" pitchFamily="34" charset="-120"/>
+              </a:rPr>
+              <a:t>The course's through-lines</a:t>
+            </a:r>
+            <a:endParaRPr lang="en-US" sz="2800" dirty="0"/>
+          </a:p>
+        </p:txBody>
+      </p:sp>
+      <p:sp>
+        <p:nvSpPr>
+          <p:cNvPr id="4" name="Shape 2"/>
+          <p:cNvSpPr/>
+          <p:nvPr/>
+        </p:nvSpPr>
+        <p:spPr>
+          <a:xfrm>
+            <a:off x="640080" y="2057400"/>
+            <a:ext cx="457200" cy="457200"/>
+          </a:xfrm>
+          <a:prstGeom prst="roundRect">
+            <a:avLst>
+              <a:gd name="adj" fmla="val 16000"/>
+            </a:avLst>
+          </a:prstGeom>
+          <a:solidFill>
+            <a:srgbClr val="7A3B2E"/>
+          </a:solidFill>
+          <a:ln/>
+        </p:spPr>
+      </p:sp>
+      <p:sp>
+        <p:nvSpPr>
+          <p:cNvPr id="5" name="Text 3"/>
+          <p:cNvSpPr/>
+          <p:nvPr/>
+        </p:nvSpPr>
+        <p:spPr>
+          <a:xfrm>
+            <a:off x="640080" y="2057400"/>
+            <a:ext cx="457200" cy="457200"/>
+          </a:xfrm>
+          <a:prstGeom prst="rect">
+            <a:avLst/>
+          </a:prstGeom>
+          <a:noFill/>
+          <a:ln/>
+        </p:spPr>
+        <p:txBody>
+          <a:bodyPr wrap="square" rtlCol="0" anchor="ctr"/>
+          <a:lstStyle/>
+          <a:p>
+            <a:pPr algn="ctr" indent="0" marL="0">
+              <a:buNone/>
+            </a:pPr>
+            <a:r>
+              <a:rPr lang="en-US" sz="2000" b="1" dirty="0">
+                <a:solidFill>
+                  <a:srgbClr val="FFFFFF"/>
+                </a:solidFill>
+                <a:latin typeface="Cambria" pitchFamily="34" charset="0"/>
+                <a:ea typeface="Cambria" pitchFamily="34" charset="-122"/>
+                <a:cs typeface="Cambria" pitchFamily="34" charset="-120"/>
+              </a:rPr>
+              <a:t>1</a:t>
+            </a:r>
+            <a:endParaRPr lang="en-US" sz="2000" dirty="0"/>
+          </a:p>
+        </p:txBody>
+      </p:sp>
+      <p:sp>
+        <p:nvSpPr>
+          <p:cNvPr id="6" name="Text 4"/>
+          <p:cNvSpPr/>
+          <p:nvPr/>
+        </p:nvSpPr>
+        <p:spPr>
+          <a:xfrm>
+            <a:off x="1371600" y="2020824"/>
+            <a:ext cx="10332720" cy="411480"/>
+          </a:xfrm>
+          <a:prstGeom prst="rect">
+            <a:avLst/>
+          </a:prstGeom>
+          <a:noFill/>
+          <a:ln/>
+        </p:spPr>
+        <p:txBody>
+          <a:bodyPr wrap="square" rtlCol="0" anchor="ctr"/>
+          <a:lstStyle/>
+          <a:p>
+            <a:pPr indent="0" marL="0">
+              <a:buNone/>
+            </a:pPr>
+            <a:r>
+              <a:rPr lang="en-US" sz="1900" b="1" dirty="0">
+                <a:solidFill>
+                  <a:srgbClr val="7A3B2E"/>
+                </a:solidFill>
+                <a:latin typeface="Cambria" pitchFamily="34" charset="0"/>
+                <a:ea typeface="Cambria" pitchFamily="34" charset="-122"/>
+                <a:cs typeface="Cambria" pitchFamily="34" charset="-120"/>
+              </a:rPr>
+              <a:t>The reader you can't see</a:t>
+            </a:r>
+            <a:endParaRPr lang="en-US" sz="1900" dirty="0"/>
+          </a:p>
+        </p:txBody>
+      </p:sp>
+      <p:sp>
+        <p:nvSpPr>
+          <p:cNvPr id="7" name="Text 5"/>
+          <p:cNvSpPr/>
+          <p:nvPr/>
+        </p:nvSpPr>
+        <p:spPr>
+          <a:xfrm>
+            <a:off x="1371600" y="2441448"/>
+            <a:ext cx="10332720" cy="914400"/>
+          </a:xfrm>
+          <a:prstGeom prst="rect">
+            <a:avLst/>
+          </a:prstGeom>
+          <a:noFill/>
+          <a:ln/>
+        </p:spPr>
+        <p:txBody>
+          <a:bodyPr wrap="square" rtlCol="0" anchor="t">
+            <a:spAutoFit/>
+          </a:bodyPr>
+          <a:lstStyle/>
+          <a:p>
+            <a:pPr indent="0" marL="0">
+              <a:lnSpc>
+                <a:spcPct val="112000"/>
+              </a:lnSpc>
+              <a:buNone/>
+            </a:pPr>
+            <a:r>
+              <a:rPr lang="en-US" sz="1450" dirty="0">
+                <a:solidFill>
+                  <a:srgbClr val="1A1A1A"/>
+                </a:solidFill>
+                <a:latin typeface="Calibri" pitchFamily="34" charset="0"/>
+                <a:ea typeface="Calibri" pitchFamily="34" charset="-122"/>
+                <a:cs typeface="Calibri" pitchFamily="34" charset="-120"/>
+              </a:rPr>
+              <a:t>The powerful, opaque annotator: trust the labels it is sure of, check the rest.</a:t>
+            </a:r>
+            <a:endParaRPr lang="en-US" sz="1450" dirty="0"/>
+          </a:p>
+        </p:txBody>
+      </p:sp>
+      <p:sp>
+        <p:nvSpPr>
+          <p:cNvPr id="8" name="Shape 6"/>
+          <p:cNvSpPr/>
+          <p:nvPr/>
+        </p:nvSpPr>
+        <p:spPr>
+          <a:xfrm>
+            <a:off x="640080" y="3520440"/>
+            <a:ext cx="457200" cy="457200"/>
+          </a:xfrm>
+          <a:prstGeom prst="roundRect">
+            <a:avLst>
+              <a:gd name="adj" fmla="val 16000"/>
+            </a:avLst>
+          </a:prstGeom>
+          <a:solidFill>
+            <a:srgbClr val="3F6F5F"/>
+          </a:solidFill>
+          <a:ln/>
+        </p:spPr>
+      </p:sp>
+      <p:sp>
+        <p:nvSpPr>
+          <p:cNvPr id="9" name="Text 7"/>
+          <p:cNvSpPr/>
+          <p:nvPr/>
+        </p:nvSpPr>
+        <p:spPr>
+          <a:xfrm>
+            <a:off x="640080" y="3520440"/>
+            <a:ext cx="457200" cy="457200"/>
+          </a:xfrm>
+          <a:prstGeom prst="rect">
+            <a:avLst/>
+          </a:prstGeom>
+          <a:noFill/>
+          <a:ln/>
+        </p:spPr>
+        <p:txBody>
+          <a:bodyPr wrap="square" rtlCol="0" anchor="ctr"/>
+          <a:lstStyle/>
+          <a:p>
+            <a:pPr algn="ctr" indent="0" marL="0">
+              <a:buNone/>
+            </a:pPr>
+            <a:r>
+              <a:rPr lang="en-US" sz="2000" b="1" dirty="0">
+                <a:solidFill>
+                  <a:srgbClr val="FFFFFF"/>
+                </a:solidFill>
+                <a:latin typeface="Cambria" pitchFamily="34" charset="0"/>
+                <a:ea typeface="Cambria" pitchFamily="34" charset="-122"/>
+                <a:cs typeface="Cambria" pitchFamily="34" charset="-120"/>
+              </a:rPr>
+              <a:t>2</a:t>
+            </a:r>
+            <a:endParaRPr lang="en-US" sz="2000" dirty="0"/>
+          </a:p>
+        </p:txBody>
+      </p:sp>
+      <p:sp>
+        <p:nvSpPr>
+          <p:cNvPr id="10" name="Text 8"/>
+          <p:cNvSpPr/>
+          <p:nvPr/>
+        </p:nvSpPr>
+        <p:spPr>
+          <a:xfrm>
+            <a:off x="1371600" y="3483864"/>
+            <a:ext cx="10332720" cy="411480"/>
+          </a:xfrm>
+          <a:prstGeom prst="rect">
+            <a:avLst/>
+          </a:prstGeom>
+          <a:noFill/>
+          <a:ln/>
+        </p:spPr>
+        <p:txBody>
+          <a:bodyPr wrap="square" rtlCol="0" anchor="ctr"/>
+          <a:lstStyle/>
+          <a:p>
+            <a:pPr indent="0" marL="0">
+              <a:buNone/>
+            </a:pPr>
+            <a:r>
+              <a:rPr lang="en-US" sz="1900" b="1" dirty="0">
+                <a:solidFill>
+                  <a:srgbClr val="3F6F5F"/>
+                </a:solidFill>
+                <a:latin typeface="Cambria" pitchFamily="34" charset="0"/>
+                <a:ea typeface="Cambria" pitchFamily="34" charset="-122"/>
+                <a:cs typeface="Cambria" pitchFamily="34" charset="-120"/>
+              </a:rPr>
+              <a:t>Whose judgment are you renting</a:t>
+            </a:r>
+            <a:endParaRPr lang="en-US" sz="1900" dirty="0"/>
+          </a:p>
+        </p:txBody>
+      </p:sp>
+      <p:sp>
+        <p:nvSpPr>
+          <p:cNvPr id="11" name="Text 9"/>
+          <p:cNvSpPr/>
+          <p:nvPr/>
+        </p:nvSpPr>
+        <p:spPr>
+          <a:xfrm>
+            <a:off x="1371600" y="3904488"/>
+            <a:ext cx="10332720" cy="914400"/>
+          </a:xfrm>
+          <a:prstGeom prst="rect">
+            <a:avLst/>
+          </a:prstGeom>
+          <a:noFill/>
+          <a:ln/>
+        </p:spPr>
+        <p:txBody>
+          <a:bodyPr wrap="square" rtlCol="0" anchor="t">
+            <a:spAutoFit/>
+          </a:bodyPr>
+          <a:lstStyle/>
+          <a:p>
+            <a:pPr indent="0" marL="0">
+              <a:lnSpc>
+                <a:spcPct val="112000"/>
+              </a:lnSpc>
+              <a:buNone/>
+            </a:pPr>
+            <a:r>
+              <a:rPr lang="en-US" sz="1450" dirty="0">
+                <a:solidFill>
+                  <a:srgbClr val="1A1A1A"/>
+                </a:solidFill>
+                <a:latin typeface="Calibri" pitchFamily="34" charset="0"/>
+                <a:ea typeface="Calibri" pitchFamily="34" charset="-122"/>
+                <a:cs typeface="Calibri" pitchFamily="34" charset="-120"/>
+              </a:rPr>
+              <a:t>Its reading was learned from creative work scraped largely without permission.</a:t>
+            </a:r>
+            <a:endParaRPr lang="en-US" sz="1450" dirty="0"/>
+          </a:p>
+        </p:txBody>
+      </p:sp>
+      <p:sp>
+        <p:nvSpPr>
+          <p:cNvPr id="12" name="Shape 10"/>
+          <p:cNvSpPr/>
+          <p:nvPr/>
+        </p:nvSpPr>
+        <p:spPr>
+          <a:xfrm>
+            <a:off x="640080" y="4983480"/>
+            <a:ext cx="457200" cy="457200"/>
+          </a:xfrm>
+          <a:prstGeom prst="roundRect">
+            <a:avLst>
+              <a:gd name="adj" fmla="val 16000"/>
+            </a:avLst>
+          </a:prstGeom>
+          <a:solidFill>
+            <a:srgbClr val="B9852F"/>
+          </a:solidFill>
+          <a:ln/>
+        </p:spPr>
+      </p:sp>
+      <p:sp>
+        <p:nvSpPr>
+          <p:cNvPr id="13" name="Text 11"/>
+          <p:cNvSpPr/>
+          <p:nvPr/>
+        </p:nvSpPr>
+        <p:spPr>
+          <a:xfrm>
+            <a:off x="640080" y="4983480"/>
+            <a:ext cx="457200" cy="457200"/>
+          </a:xfrm>
+          <a:prstGeom prst="rect">
+            <a:avLst/>
+          </a:prstGeom>
+          <a:noFill/>
+          <a:ln/>
+        </p:spPr>
+        <p:txBody>
+          <a:bodyPr wrap="square" rtlCol="0" anchor="ctr"/>
+          <a:lstStyle/>
+          <a:p>
+            <a:pPr algn="ctr" indent="0" marL="0">
+              <a:buNone/>
+            </a:pPr>
+            <a:r>
+              <a:rPr lang="en-US" sz="2000" b="1" dirty="0">
+                <a:solidFill>
+                  <a:srgbClr val="FFFFFF"/>
+                </a:solidFill>
+                <a:latin typeface="Cambria" pitchFamily="34" charset="0"/>
+                <a:ea typeface="Cambria" pitchFamily="34" charset="-122"/>
+                <a:cs typeface="Cambria" pitchFamily="34" charset="-120"/>
+              </a:rPr>
+              <a:t>3</a:t>
+            </a:r>
+            <a:endParaRPr lang="en-US" sz="2000" dirty="0"/>
+          </a:p>
+        </p:txBody>
+      </p:sp>
+      <p:sp>
+        <p:nvSpPr>
+          <p:cNvPr id="14" name="Text 12"/>
+          <p:cNvSpPr/>
+          <p:nvPr/>
+        </p:nvSpPr>
+        <p:spPr>
+          <a:xfrm>
+            <a:off x="1371600" y="4946904"/>
+            <a:ext cx="10332720" cy="411480"/>
+          </a:xfrm>
+          <a:prstGeom prst="rect">
+            <a:avLst/>
+          </a:prstGeom>
+          <a:noFill/>
+          <a:ln/>
+        </p:spPr>
+        <p:txBody>
+          <a:bodyPr wrap="square" rtlCol="0" anchor="ctr"/>
+          <a:lstStyle/>
+          <a:p>
+            <a:pPr indent="0" marL="0">
+              <a:buNone/>
+            </a:pPr>
+            <a:r>
+              <a:rPr lang="en-US" sz="1900" b="1" dirty="0">
+                <a:solidFill>
+                  <a:srgbClr val="B9852F"/>
+                </a:solidFill>
+                <a:latin typeface="Cambria" pitchFamily="34" charset="0"/>
+                <a:ea typeface="Cambria" pitchFamily="34" charset="-122"/>
+                <a:cs typeface="Cambria" pitchFamily="34" charset="-120"/>
+              </a:rPr>
+              <a:t>The third reader (go further)</a:t>
+            </a:r>
+            <a:endParaRPr lang="en-US" sz="1900" dirty="0"/>
+          </a:p>
+        </p:txBody>
+      </p:sp>
+      <p:sp>
+        <p:nvSpPr>
+          <p:cNvPr id="15" name="Text 13"/>
+          <p:cNvSpPr/>
+          <p:nvPr/>
+        </p:nvSpPr>
+        <p:spPr>
+          <a:xfrm>
+            <a:off x="1371600" y="5367528"/>
+            <a:ext cx="10332720" cy="914400"/>
+          </a:xfrm>
+          <a:prstGeom prst="rect">
+            <a:avLst/>
+          </a:prstGeom>
+          <a:noFill/>
+          <a:ln/>
+        </p:spPr>
+        <p:txBody>
+          <a:bodyPr wrap="square" rtlCol="0" anchor="t">
+            <a:spAutoFit/>
+          </a:bodyPr>
+          <a:lstStyle/>
+          <a:p>
+            <a:pPr indent="0" marL="0">
+              <a:lnSpc>
+                <a:spcPct val="112000"/>
+              </a:lnSpc>
+              <a:buNone/>
+            </a:pPr>
+            <a:r>
+              <a:rPr lang="en-US" sz="1450" dirty="0">
+                <a:solidFill>
+                  <a:srgbClr val="1A1A1A"/>
+                </a:solidFill>
+                <a:latin typeface="Calibri" pitchFamily="34" charset="0"/>
+                <a:ea typeface="Calibri" pitchFamily="34" charset="-122"/>
+                <a:cs typeface="Calibri" pitchFamily="34" charset="-120"/>
+              </a:rPr>
+              <a:t>Fine-tune a model you own, transparent, powerful, now yours.</a:t>
+            </a:r>
+            <a:endParaRPr lang="en-US" sz="1450" dirty="0"/>
+          </a:p>
+        </p:txBody>
+      </p:sp>
+    </p:spTree>
+  </p:cSld>
+  <p:clrMapOvr>
+    <a:masterClrMapping/>
+  </p:clrMapOvr>
+</p:sld>
+</file>
+
+<file path=ppt/slides/slide11.xml><?xml version="1.0" encoding="utf-8"?>
+<p:sld xmlns:a="http://schemas.openxmlformats.org/drawingml/2006/main" xmlns:r="http://schemas.openxmlformats.org/officeDocument/2006/relationships" xmlns:p="http://schemas.openxmlformats.org/presentationml/2006/main">
+  <p:cSld name="Slide 11">
+    <p:bg>
+      <p:bgPr>
+        <a:solidFill>
+          <a:srgbClr val="4E261D"/>
+        </a:solidFill>
+      </p:bgPr>
+    </p:bg>
+    <p:spTree>
+      <p:nvGrpSpPr>
+        <p:cNvPr id="1" name=""/>
+        <p:cNvGrpSpPr/>
+        <p:nvPr/>
+      </p:nvGrpSpPr>
+      <p:grpSpPr>
+        <a:xfrm>
+          <a:off x="0" y="0"/>
+          <a:ext cx="0" cy="0"/>
+          <a:chOff x="0" y="0"/>
+          <a:chExt cx="0" cy="0"/>
+        </a:xfrm>
+      </p:grpSpPr>
+      <p:sp>
+        <p:nvSpPr>
+          <p:cNvPr id="2" name="Text 0"/>
+          <p:cNvSpPr/>
+          <p:nvPr/>
+        </p:nvSpPr>
+        <p:spPr>
+          <a:xfrm>
+            <a:off x="640080" y="1005840"/>
+            <a:ext cx="8229600" cy="320040"/>
+          </a:xfrm>
+          <a:prstGeom prst="rect">
+            <a:avLst/>
+          </a:prstGeom>
+          <a:noFill/>
+          <a:ln/>
+        </p:spPr>
+        <p:txBody>
+          <a:bodyPr wrap="square" rtlCol="0" anchor="ctr"/>
+          <a:lstStyle/>
+          <a:p>
+            <a:pPr indent="0" marL="0">
+              <a:buNone/>
+            </a:pPr>
+            <a:r>
+              <a:rPr lang="en-US" sz="1300" b="1" spc="300" kern="0" dirty="0">
+                <a:solidFill>
+                  <a:srgbClr val="B9852F"/>
+                </a:solidFill>
+                <a:latin typeface="Calibri" pitchFamily="34" charset="0"/>
+                <a:ea typeface="Calibri" pitchFamily="34" charset="-122"/>
+                <a:cs typeface="Calibri" pitchFamily="34" charset="-120"/>
+              </a:rPr>
+              <a:t>THE CHECK, AI CLOSED</a:t>
+            </a:r>
+            <a:endParaRPr lang="en-US" sz="1300" dirty="0"/>
+          </a:p>
+        </p:txBody>
+      </p:sp>
+      <p:sp>
+        <p:nvSpPr>
+          <p:cNvPr id="3" name="Text 1"/>
+          <p:cNvSpPr/>
+          <p:nvPr/>
+        </p:nvSpPr>
+        <p:spPr>
+          <a:xfrm>
+            <a:off x="640080" y="1645920"/>
+            <a:ext cx="8686800" cy="3108960"/>
+          </a:xfrm>
+          <a:prstGeom prst="rect">
+            <a:avLst/>
+          </a:prstGeom>
+          <a:noFill/>
+          <a:ln/>
+        </p:spPr>
+        <p:txBody>
+          <a:bodyPr wrap="square" rtlCol="0" anchor="t">
+            <a:spAutoFit/>
+          </a:bodyPr>
+          <a:lstStyle/>
+          <a:p>
+            <a:pPr indent="0" marL="0">
+              <a:lnSpc>
+                <a:spcPct val="115000"/>
+              </a:lnSpc>
+              <a:buNone/>
+            </a:pPr>
+            <a:r>
+              <a:rPr lang="en-US" sz="2600" dirty="0">
+                <a:solidFill>
+                  <a:srgbClr val="FFFFFF"/>
+                </a:solidFill>
+                <a:latin typeface="Cambria" pitchFamily="34" charset="0"/>
+                <a:ea typeface="Cambria" pitchFamily="34" charset="-122"/>
+                <a:cs typeface="Cambria" pitchFamily="34" charset="-120"/>
+              </a:rPr>
+              <a:t>Explain it: what is your labeling prompt deciding on your behalf, and how would you check whether to trust a given label? (Competencies 2, 5.)</a:t>
+            </a:r>
+            <a:endParaRPr lang="en-US" sz="2600" dirty="0"/>
+          </a:p>
+        </p:txBody>
+      </p:sp>
+      <p:sp>
+        <p:nvSpPr>
+          <p:cNvPr id="4" name="Text 2"/>
+          <p:cNvSpPr/>
+          <p:nvPr/>
+        </p:nvSpPr>
+        <p:spPr>
+          <a:xfrm>
+            <a:off x="640080" y="6126480"/>
+            <a:ext cx="7315200" cy="365760"/>
+          </a:xfrm>
+          <a:prstGeom prst="rect">
+            <a:avLst/>
+          </a:prstGeom>
+          <a:noFill/>
+          <a:ln/>
+        </p:spPr>
+        <p:txBody>
+          <a:bodyPr wrap="square" rtlCol="0" anchor="ctr"/>
+          <a:lstStyle/>
+          <a:p>
+            <a:pPr indent="0" marL="0">
+              <a:buNone/>
+            </a:pPr>
+            <a:r>
+              <a:rPr lang="en-US" sz="1200" dirty="0">
+                <a:solidFill>
+                  <a:srgbClr val="E8DCD6"/>
+                </a:solidFill>
+                <a:latin typeface="Calibri" pitchFamily="34" charset="0"/>
+                <a:ea typeface="Calibri" pitchFamily="34" charset="-122"/>
+                <a:cs typeface="Calibri" pitchFamily="34" charset="-120"/>
+              </a:rPr>
+              <a:t>Culture as Data  ·  Week 7</a:t>
+            </a:r>
+            <a:endParaRPr lang="en-US" sz="1200" dirty="0"/>
+          </a:p>
+        </p:txBody>
+      </p:sp>
+      <p:sp>
+        <p:nvSpPr>
+          <p:cNvPr id="5" name="Shape 3"/>
+          <p:cNvSpPr/>
+          <p:nvPr/>
+        </p:nvSpPr>
+        <p:spPr>
+          <a:xfrm>
+            <a:off x="10183884" y="4527301"/>
+            <a:ext cx="69797" cy="69797"/>
+          </a:xfrm>
+          <a:prstGeom prst="ellipse">
+            <a:avLst/>
+          </a:prstGeom>
+          <a:solidFill>
+            <a:srgbClr val="7A3B2E"/>
+          </a:solidFill>
+          <a:ln/>
+        </p:spPr>
+      </p:sp>
+      <p:sp>
+        <p:nvSpPr>
+          <p:cNvPr id="6" name="Shape 4"/>
+          <p:cNvSpPr/>
+          <p:nvPr/>
+        </p:nvSpPr>
+        <p:spPr>
+          <a:xfrm>
+            <a:off x="11301291" y="4978554"/>
+            <a:ext cx="58604" cy="58604"/>
+          </a:xfrm>
+          <a:prstGeom prst="ellipse">
+            <a:avLst/>
+          </a:prstGeom>
+          <a:solidFill>
+            <a:srgbClr val="3F6F5F"/>
+          </a:solidFill>
+          <a:ln/>
+        </p:spPr>
+      </p:sp>
+      <p:sp>
+        <p:nvSpPr>
+          <p:cNvPr id="7" name="Shape 5"/>
+          <p:cNvSpPr/>
+          <p:nvPr/>
+        </p:nvSpPr>
+        <p:spPr>
+          <a:xfrm>
+            <a:off x="10279171" y="4798406"/>
+            <a:ext cx="89957" cy="89957"/>
+          </a:xfrm>
+          <a:prstGeom prst="ellipse">
+            <a:avLst/>
+          </a:prstGeom>
+          <a:solidFill>
+            <a:srgbClr val="B9852F"/>
+          </a:solidFill>
+          <a:ln/>
+        </p:spPr>
+      </p:sp>
+      <p:sp>
+        <p:nvSpPr>
+          <p:cNvPr id="8" name="Shape 6"/>
+          <p:cNvSpPr/>
+          <p:nvPr/>
+        </p:nvSpPr>
+        <p:spPr>
+          <a:xfrm>
+            <a:off x="10744645" y="4710756"/>
+            <a:ext cx="76987" cy="76987"/>
+          </a:xfrm>
+          <a:prstGeom prst="ellipse">
+            <a:avLst/>
+          </a:prstGeom>
+          <a:solidFill>
+            <a:srgbClr val="7A3B2E"/>
+          </a:solidFill>
+          <a:ln/>
+        </p:spPr>
+      </p:sp>
+      <p:sp>
+        <p:nvSpPr>
+          <p:cNvPr id="9" name="Shape 7"/>
+          <p:cNvSpPr/>
+          <p:nvPr/>
+        </p:nvSpPr>
+        <p:spPr>
+          <a:xfrm>
+            <a:off x="11204192" y="5439504"/>
+            <a:ext cx="97418" cy="97418"/>
+          </a:xfrm>
+          <a:prstGeom prst="ellipse">
+            <a:avLst/>
+          </a:prstGeom>
+          <a:solidFill>
+            <a:srgbClr val="3F6F5F"/>
+          </a:solidFill>
+          <a:ln/>
+        </p:spPr>
+      </p:sp>
+      <p:sp>
+        <p:nvSpPr>
+          <p:cNvPr id="10" name="Shape 8"/>
+          <p:cNvSpPr/>
+          <p:nvPr/>
+        </p:nvSpPr>
+        <p:spPr>
+          <a:xfrm>
+            <a:off x="10164293" y="5971191"/>
+            <a:ext cx="64381" cy="64381"/>
+          </a:xfrm>
+          <a:prstGeom prst="ellipse">
+            <a:avLst/>
+          </a:prstGeom>
+          <a:solidFill>
+            <a:srgbClr val="B9852F"/>
+          </a:solidFill>
+          <a:ln/>
+        </p:spPr>
+      </p:sp>
+      <p:sp>
+        <p:nvSpPr>
+          <p:cNvPr id="11" name="Shape 9"/>
+          <p:cNvSpPr/>
+          <p:nvPr/>
+        </p:nvSpPr>
+        <p:spPr>
+          <a:xfrm>
+            <a:off x="11252067" y="5292356"/>
+            <a:ext cx="55602" cy="55602"/>
+          </a:xfrm>
+          <a:prstGeom prst="ellipse">
+            <a:avLst/>
+          </a:prstGeom>
+          <a:solidFill>
+            <a:srgbClr val="7A3B2E"/>
+          </a:solidFill>
+          <a:ln/>
+        </p:spPr>
+      </p:sp>
+      <p:sp>
+        <p:nvSpPr>
+          <p:cNvPr id="12" name="Shape 10"/>
+          <p:cNvSpPr/>
+          <p:nvPr/>
+        </p:nvSpPr>
+        <p:spPr>
+          <a:xfrm>
+            <a:off x="10413674" y="5864259"/>
+            <a:ext cx="93940" cy="93940"/>
+          </a:xfrm>
+          <a:prstGeom prst="ellipse">
+            <a:avLst/>
+          </a:prstGeom>
+          <a:solidFill>
+            <a:srgbClr val="3F6F5F"/>
+          </a:solidFill>
+          <a:ln/>
+        </p:spPr>
+      </p:sp>
+      <p:sp>
+        <p:nvSpPr>
+          <p:cNvPr id="13" name="Shape 11"/>
+          <p:cNvSpPr/>
+          <p:nvPr/>
+        </p:nvSpPr>
+        <p:spPr>
+          <a:xfrm>
+            <a:off x="11276234" y="4936081"/>
+            <a:ext cx="92527" cy="92527"/>
+          </a:xfrm>
+          <a:prstGeom prst="ellipse">
+            <a:avLst/>
+          </a:prstGeom>
+          <a:solidFill>
+            <a:srgbClr val="B9852F"/>
+          </a:solidFill>
+          <a:ln/>
+        </p:spPr>
+      </p:sp>
+      <p:sp>
+        <p:nvSpPr>
+          <p:cNvPr id="14" name="Shape 12"/>
+          <p:cNvSpPr/>
+          <p:nvPr/>
+        </p:nvSpPr>
+        <p:spPr>
+          <a:xfrm>
+            <a:off x="9785908" y="4969081"/>
+            <a:ext cx="74223" cy="74223"/>
+          </a:xfrm>
+          <a:prstGeom prst="ellipse">
+            <a:avLst/>
+          </a:prstGeom>
+          <a:solidFill>
+            <a:srgbClr val="7A3B2E"/>
+          </a:solidFill>
+          <a:ln/>
+        </p:spPr>
+      </p:sp>
+      <p:sp>
+        <p:nvSpPr>
+          <p:cNvPr id="15" name="Shape 13"/>
+          <p:cNvSpPr/>
+          <p:nvPr/>
+        </p:nvSpPr>
+        <p:spPr>
+          <a:xfrm>
+            <a:off x="9569815" y="4949799"/>
+            <a:ext cx="61887" cy="61887"/>
+          </a:xfrm>
+          <a:prstGeom prst="ellipse">
+            <a:avLst/>
+          </a:prstGeom>
+          <a:solidFill>
+            <a:srgbClr val="3F6F5F"/>
+          </a:solidFill>
+          <a:ln/>
+        </p:spPr>
+      </p:sp>
+      <p:sp>
+        <p:nvSpPr>
+          <p:cNvPr id="16" name="Shape 14"/>
+          <p:cNvSpPr/>
+          <p:nvPr/>
+        </p:nvSpPr>
+        <p:spPr>
+          <a:xfrm>
+            <a:off x="9134436" y="5602136"/>
+            <a:ext cx="78381" cy="78381"/>
+          </a:xfrm>
+          <a:prstGeom prst="ellipse">
+            <a:avLst/>
+          </a:prstGeom>
+          <a:solidFill>
+            <a:srgbClr val="B9852F"/>
+          </a:solidFill>
+          <a:ln/>
+        </p:spPr>
+      </p:sp>
+      <p:sp>
+        <p:nvSpPr>
+          <p:cNvPr id="17" name="Shape 15"/>
+          <p:cNvSpPr/>
+          <p:nvPr/>
+        </p:nvSpPr>
+        <p:spPr>
+          <a:xfrm>
+            <a:off x="9546570" y="5912631"/>
+            <a:ext cx="91700" cy="91700"/>
+          </a:xfrm>
+          <a:prstGeom prst="ellipse">
+            <a:avLst/>
+          </a:prstGeom>
+          <a:solidFill>
+            <a:srgbClr val="7A3B2E"/>
+          </a:solidFill>
+          <a:ln/>
+        </p:spPr>
+      </p:sp>
+      <p:sp>
+        <p:nvSpPr>
+          <p:cNvPr id="18" name="Shape 16"/>
+          <p:cNvSpPr/>
+          <p:nvPr/>
+        </p:nvSpPr>
+        <p:spPr>
+          <a:xfrm>
+            <a:off x="9312697" y="4867824"/>
+            <a:ext cx="69840" cy="69840"/>
+          </a:xfrm>
+          <a:prstGeom prst="ellipse">
+            <a:avLst/>
+          </a:prstGeom>
+          <a:solidFill>
+            <a:srgbClr val="3F6F5F"/>
+          </a:solidFill>
+          <a:ln/>
+        </p:spPr>
+      </p:sp>
+    </p:spTree>
+  </p:cSld>
+  <p:clrMapOvr>
+    <a:masterClrMapping/>
+  </p:clrMapOvr>
+</p:sld>
+</file>
+
 <file path=ppt/slides/slide2.xml><?xml version="1.0" encoding="utf-8"?>
 <p:sld xmlns:a="http://schemas.openxmlformats.org/drawingml/2006/main" xmlns:r="http://schemas.openxmlformats.org/officeDocument/2006/relationships" xmlns:p="http://schemas.openxmlformats.org/presentationml/2006/main">
   <p:cSld name="Slide 2">
@@ -2461,14 +3704,34 @@
       </p:grpSpPr>
       <p:sp>
         <p:nvSpPr>
-          <p:cNvPr id="2" name="Text 0"/>
-          <p:cNvSpPr/>
-          <p:nvPr/>
-        </p:nvSpPr>
-        <p:spPr>
-          <a:xfrm>
-            <a:off x="640080" y="731520"/>
-            <a:ext cx="10058400" cy="731520"/>
+          <p:cNvPr id="2" name="Shape 0"/>
+          <p:cNvSpPr/>
+          <p:nvPr/>
+        </p:nvSpPr>
+        <p:spPr>
+          <a:xfrm>
+            <a:off x="0" y="0"/>
+            <a:ext cx="164592" cy="6858000"/>
+          </a:xfrm>
+          <a:prstGeom prst="rect">
+            <a:avLst/>
+          </a:prstGeom>
+          <a:solidFill>
+            <a:srgbClr val="7A3B2E"/>
+          </a:solidFill>
+          <a:ln/>
+        </p:spPr>
+      </p:sp>
+      <p:sp>
+        <p:nvSpPr>
+          <p:cNvPr id="3" name="Text 1"/>
+          <p:cNvSpPr/>
+          <p:nvPr/>
+        </p:nvSpPr>
+        <p:spPr>
+          <a:xfrm>
+            <a:off x="640080" y="640080"/>
+            <a:ext cx="10058400" cy="320040"/>
           </a:xfrm>
           <a:prstGeom prst="rect">
             <a:avLst/>
@@ -2478,6 +3741,47 @@
         </p:spPr>
         <p:txBody>
           <a:bodyPr wrap="square" rtlCol="0" anchor="ctr"/>
+          <a:lstStyle/>
+          <a:p>
+            <a:pPr indent="0" marL="0">
+              <a:buNone/>
+            </a:pPr>
+            <a:r>
+              <a:rPr lang="en-US" sz="1200" b="1" spc="300" kern="0" dirty="0">
+                <a:solidFill>
+                  <a:srgbClr val="7A3B2E"/>
+                </a:solidFill>
+                <a:latin typeface="Calibri" pitchFamily="34" charset="0"/>
+                <a:ea typeface="Calibri" pitchFamily="34" charset="-122"/>
+                <a:cs typeface="Calibri" pitchFamily="34" charset="-120"/>
+              </a:rPr>
+              <a:t>WEEK 7 · THE MATERIAL</a:t>
+            </a:r>
+            <a:endParaRPr lang="en-US" sz="1200" dirty="0"/>
+          </a:p>
+        </p:txBody>
+      </p:sp>
+      <p:sp>
+        <p:nvSpPr>
+          <p:cNvPr id="4" name="Text 2"/>
+          <p:cNvSpPr/>
+          <p:nvPr/>
+        </p:nvSpPr>
+        <p:spPr>
+          <a:xfrm>
+            <a:off x="640080" y="1005840"/>
+            <a:ext cx="10881360" cy="914400"/>
+          </a:xfrm>
+          <a:prstGeom prst="rect">
+            <a:avLst/>
+          </a:prstGeom>
+          <a:noFill/>
+          <a:ln/>
+        </p:spPr>
+        <p:txBody>
+          <a:bodyPr wrap="square" rtlCol="0" anchor="t">
+            <a:spAutoFit/>
+          </a:bodyPr>
           <a:lstStyle/>
           <a:p>
             <a:pPr indent="0" marL="0">
@@ -2492,7 +3796,7 @@
                 <a:ea typeface="Cambria" pitchFamily="34" charset="-122"/>
                 <a:cs typeface="Cambria" pitchFamily="34" charset="-120"/>
               </a:rPr>
-              <a:t>Three modes today</a:t>
+              <a:t>The powerful, opaque reader</a:t>
             </a:r>
             <a:endParaRPr lang="en-US" sz="3000" dirty="0"/>
           </a:p>
@@ -2500,134 +3804,98 @@
       </p:sp>
       <p:sp>
         <p:nvSpPr>
-          <p:cNvPr id="3" name="Text 1"/>
-          <p:cNvSpPr/>
-          <p:nvPr/>
-        </p:nvSpPr>
-        <p:spPr>
-          <a:xfrm>
-            <a:off x="640080" y="1417320"/>
-            <a:ext cx="10058400" cy="365760"/>
-          </a:xfrm>
-          <a:prstGeom prst="rect">
-            <a:avLst/>
-          </a:prstGeom>
-          <a:noFill/>
-          <a:ln/>
-        </p:spPr>
-        <p:txBody>
-          <a:bodyPr wrap="square" rtlCol="0" anchor="ctr"/>
+          <p:cNvPr id="5" name="Shape 3"/>
+          <p:cNvSpPr/>
+          <p:nvPr/>
+        </p:nvSpPr>
+        <p:spPr>
+          <a:xfrm>
+            <a:off x="640080" y="2331720"/>
+            <a:ext cx="201168" cy="201168"/>
+          </a:xfrm>
+          <a:prstGeom prst="ellipse">
+            <a:avLst/>
+          </a:prstGeom>
+          <a:solidFill>
+            <a:srgbClr val="7A3B2E"/>
+          </a:solidFill>
+          <a:ln/>
+        </p:spPr>
+      </p:sp>
+      <p:sp>
+        <p:nvSpPr>
+          <p:cNvPr id="6" name="Text 4"/>
+          <p:cNvSpPr/>
+          <p:nvPr/>
+        </p:nvSpPr>
+        <p:spPr>
+          <a:xfrm>
+            <a:off x="1097280" y="2240280"/>
+            <a:ext cx="10607040" cy="1017270"/>
+          </a:xfrm>
+          <a:prstGeom prst="rect">
+            <a:avLst/>
+          </a:prstGeom>
+          <a:noFill/>
+          <a:ln/>
+        </p:spPr>
+        <p:txBody>
+          <a:bodyPr wrap="square" rtlCol="0" anchor="t">
+            <a:spAutoFit/>
+          </a:bodyPr>
           <a:lstStyle/>
           <a:p>
             <a:pPr indent="0" marL="0">
-              <a:buNone/>
-            </a:pPr>
-            <a:r>
-              <a:rPr lang="en-US" sz="1400" i="1" dirty="0">
-                <a:solidFill>
-                  <a:srgbClr val="6B6B63"/>
+              <a:lnSpc>
+                <a:spcPct val="112000"/>
+              </a:lnSpc>
+              <a:buNone/>
+            </a:pPr>
+            <a:r>
+              <a:rPr lang="en-US" sz="1650" dirty="0">
+                <a:solidFill>
+                  <a:srgbClr val="1A1A1A"/>
                 </a:solidFill>
                 <a:latin typeface="Calibri" pitchFamily="34" charset="0"/>
                 <a:ea typeface="Calibri" pitchFamily="34" charset="-122"/>
                 <a:cs typeface="Calibri" pitchFamily="34" charset="-120"/>
               </a:rPr>
-              <a:t>about a third of the session each</a:t>
-            </a:r>
-            <a:endParaRPr lang="en-US" sz="1400" dirty="0"/>
-          </a:p>
-        </p:txBody>
-      </p:sp>
-      <p:sp>
-        <p:nvSpPr>
-          <p:cNvPr id="4" name="Shape 2"/>
-          <p:cNvSpPr/>
-          <p:nvPr/>
-        </p:nvSpPr>
-        <p:spPr>
-          <a:xfrm>
-            <a:off x="640080" y="2194560"/>
-            <a:ext cx="3383280" cy="3291840"/>
-          </a:xfrm>
-          <a:prstGeom prst="roundRect">
-            <a:avLst>
-              <a:gd name="adj" fmla="val 3333"/>
-            </a:avLst>
-          </a:prstGeom>
-          <a:solidFill>
-            <a:srgbClr val="F4EEE8"/>
-          </a:solidFill>
-          <a:ln/>
-        </p:spPr>
-      </p:sp>
-      <p:sp>
-        <p:nvSpPr>
-          <p:cNvPr id="5" name="Shape 3"/>
-          <p:cNvSpPr/>
-          <p:nvPr/>
-        </p:nvSpPr>
-        <p:spPr>
-          <a:xfrm>
-            <a:off x="1051560" y="2606040"/>
-            <a:ext cx="548640" cy="548640"/>
+              <a:t>Gilardi et al. (2023): ChatGPT out-labeled paid crowd workers on political-text tasks at roughly a twentieth of the cost.</a:t>
+            </a:r>
+            <a:endParaRPr lang="en-US" sz="1650" dirty="0"/>
+          </a:p>
+        </p:txBody>
+      </p:sp>
+      <p:sp>
+        <p:nvSpPr>
+          <p:cNvPr id="7" name="Shape 5"/>
+          <p:cNvSpPr/>
+          <p:nvPr/>
+        </p:nvSpPr>
+        <p:spPr>
+          <a:xfrm>
+            <a:off x="640080" y="3348990"/>
+            <a:ext cx="201168" cy="201168"/>
           </a:xfrm>
           <a:prstGeom prst="ellipse">
             <a:avLst/>
           </a:prstGeom>
           <a:solidFill>
-            <a:srgbClr val="7A3B2E"/>
-          </a:solidFill>
-          <a:ln/>
-        </p:spPr>
-      </p:sp>
-      <p:sp>
-        <p:nvSpPr>
-          <p:cNvPr id="6" name="Text 4"/>
-          <p:cNvSpPr/>
-          <p:nvPr/>
-        </p:nvSpPr>
-        <p:spPr>
-          <a:xfrm>
-            <a:off x="1005840" y="3383280"/>
-            <a:ext cx="2651760" cy="548640"/>
-          </a:xfrm>
-          <a:prstGeom prst="rect">
-            <a:avLst/>
-          </a:prstGeom>
-          <a:noFill/>
-          <a:ln/>
-        </p:spPr>
-        <p:txBody>
-          <a:bodyPr wrap="square" rtlCol="0" anchor="ctr"/>
-          <a:lstStyle/>
-          <a:p>
-            <a:pPr indent="0" marL="0">
-              <a:buNone/>
-            </a:pPr>
-            <a:r>
-              <a:rPr lang="en-US" sz="2100" b="1" dirty="0">
-                <a:solidFill>
-                  <a:srgbClr val="1A1A1A"/>
-                </a:solidFill>
-                <a:latin typeface="Cambria" pitchFamily="34" charset="0"/>
-                <a:ea typeface="Cambria" pitchFamily="34" charset="-122"/>
-                <a:cs typeface="Cambria" pitchFamily="34" charset="-120"/>
-              </a:rPr>
-              <a:t>Lecture / demo</a:t>
-            </a:r>
-            <a:endParaRPr lang="en-US" sz="2100" dirty="0"/>
-          </a:p>
-        </p:txBody>
-      </p:sp>
-      <p:sp>
-        <p:nvSpPr>
-          <p:cNvPr id="7" name="Text 5"/>
-          <p:cNvSpPr/>
-          <p:nvPr/>
-        </p:nvSpPr>
-        <p:spPr>
-          <a:xfrm>
-            <a:off x="1005840" y="3977640"/>
-            <a:ext cx="2651760" cy="1371600"/>
+            <a:srgbClr val="3F6F5F"/>
+          </a:solidFill>
+          <a:ln/>
+        </p:spPr>
+      </p:sp>
+      <p:sp>
+        <p:nvSpPr>
+          <p:cNvPr id="8" name="Text 6"/>
+          <p:cNvSpPr/>
+          <p:nvPr/>
+        </p:nvSpPr>
+        <p:spPr>
+          <a:xfrm>
+            <a:off x="1097280" y="3257550"/>
+            <a:ext cx="10607040" cy="1017270"/>
           </a:xfrm>
           <a:prstGeom prst="rect">
             <a:avLst/>
@@ -2643,12 +3911,12 @@
           <a:p>
             <a:pPr indent="0" marL="0">
               <a:lnSpc>
-                <a:spcPct val="115000"/>
+                <a:spcPct val="112000"/>
               </a:lnSpc>
               <a:buNone/>
             </a:pPr>
             <a:r>
-              <a:rPr lang="en-US" sz="1500" dirty="0">
+              <a:rPr lang="en-US" sz="1650" dirty="0">
                 <a:solidFill>
                   <a:srgbClr val="1A1A1A"/>
                 </a:solidFill>
@@ -2656,33 +3924,11 @@
                 <a:ea typeface="Calibri" pitchFamily="34" charset="-122"/>
                 <a:cs typeface="Calibri" pitchFamily="34" charset="-120"/>
               </a:rPr>
-              <a:t>LLM-as-annotator, the most common operation in the field</a:t>
-            </a:r>
-            <a:endParaRPr lang="en-US" sz="1500" dirty="0"/>
-          </a:p>
-        </p:txBody>
-      </p:sp>
-      <p:sp>
-        <p:nvSpPr>
-          <p:cNvPr id="8" name="Shape 6"/>
-          <p:cNvSpPr/>
-          <p:nvPr/>
-        </p:nvSpPr>
-        <p:spPr>
-          <a:xfrm>
-            <a:off x="4526280" y="2194560"/>
-            <a:ext cx="3383280" cy="3291840"/>
-          </a:xfrm>
-          <a:prstGeom prst="roundRect">
-            <a:avLst>
-              <a:gd name="adj" fmla="val 3333"/>
-            </a:avLst>
-          </a:prstGeom>
-          <a:solidFill>
-            <a:srgbClr val="F4EEE8"/>
-          </a:solidFill>
-          <a:ln/>
-        </p:spPr>
+              <a:t>Your prompt IS the codebook: categories, definitions, edge-case rules. Write it like one.</a:t>
+            </a:r>
+            <a:endParaRPr lang="en-US" sz="1650" dirty="0"/>
+          </a:p>
+        </p:txBody>
       </p:sp>
       <p:sp>
         <p:nvSpPr>
@@ -2692,14 +3938,14 @@
         </p:nvSpPr>
         <p:spPr>
           <a:xfrm>
-            <a:off x="4937760" y="2606040"/>
-            <a:ext cx="548640" cy="548640"/>
+            <a:off x="640080" y="4366260"/>
+            <a:ext cx="201168" cy="201168"/>
           </a:xfrm>
           <a:prstGeom prst="ellipse">
             <a:avLst/>
           </a:prstGeom>
           <a:solidFill>
-            <a:srgbClr val="3F6F5F"/>
+            <a:srgbClr val="B9852F"/>
           </a:solidFill>
           <a:ln/>
         </p:spPr>
@@ -2712,47 +3958,8 @@
         </p:nvSpPr>
         <p:spPr>
           <a:xfrm>
-            <a:off x="4892040" y="3383280"/>
-            <a:ext cx="2651760" cy="548640"/>
-          </a:xfrm>
-          <a:prstGeom prst="rect">
-            <a:avLst/>
-          </a:prstGeom>
-          <a:noFill/>
-          <a:ln/>
-        </p:spPr>
-        <p:txBody>
-          <a:bodyPr wrap="square" rtlCol="0" anchor="ctr"/>
-          <a:lstStyle/>
-          <a:p>
-            <a:pPr indent="0" marL="0">
-              <a:buNone/>
-            </a:pPr>
-            <a:r>
-              <a:rPr lang="en-US" sz="2100" b="1" dirty="0">
-                <a:solidFill>
-                  <a:srgbClr val="1A1A1A"/>
-                </a:solidFill>
-                <a:latin typeface="Cambria" pitchFamily="34" charset="0"/>
-                <a:ea typeface="Cambria" pitchFamily="34" charset="-122"/>
-                <a:cs typeface="Cambria" pitchFamily="34" charset="-120"/>
-              </a:rPr>
-              <a:t>Workshop</a:t>
-            </a:r>
-            <a:endParaRPr lang="en-US" sz="2100" dirty="0"/>
-          </a:p>
-        </p:txBody>
-      </p:sp>
-      <p:sp>
-        <p:nvSpPr>
-          <p:cNvPr id="11" name="Text 9"/>
-          <p:cNvSpPr/>
-          <p:nvPr/>
-        </p:nvSpPr>
-        <p:spPr>
-          <a:xfrm>
-            <a:off x="4892040" y="3977640"/>
-            <a:ext cx="2651760" cy="1371600"/>
+            <a:off x="1097280" y="4274820"/>
+            <a:ext cx="10607040" cy="1017270"/>
           </a:xfrm>
           <a:prstGeom prst="rect">
             <a:avLst/>
@@ -2768,12 +3975,12 @@
           <a:p>
             <a:pPr indent="0" marL="0">
               <a:lnSpc>
-                <a:spcPct val="115000"/>
+                <a:spcPct val="112000"/>
               </a:lnSpc>
               <a:buNone/>
             </a:pPr>
             <a:r>
-              <a:rPr lang="en-US" sz="1500" dirty="0">
+              <a:rPr lang="en-US" sz="1650" dirty="0">
                 <a:solidFill>
                   <a:srgbClr val="1A1A1A"/>
                 </a:solidFill>
@@ -2781,103 +3988,42 @@
                 <a:ea typeface="Calibri" pitchFamily="34" charset="-122"/>
                 <a:cs typeface="Calibri" pitchFamily="34" charset="-120"/>
               </a:rPr>
-              <a:t>Build hands-on on your own data.</a:t>
-            </a:r>
-            <a:endParaRPr lang="en-US" sz="1500" dirty="0"/>
-          </a:p>
-        </p:txBody>
-      </p:sp>
-      <p:sp>
-        <p:nvSpPr>
-          <p:cNvPr id="12" name="Shape 10"/>
-          <p:cNvSpPr/>
-          <p:nvPr/>
-        </p:nvSpPr>
-        <p:spPr>
-          <a:xfrm>
-            <a:off x="8412480" y="2194560"/>
-            <a:ext cx="3383280" cy="3291840"/>
-          </a:xfrm>
-          <a:prstGeom prst="roundRect">
-            <a:avLst>
-              <a:gd name="adj" fmla="val 3333"/>
-            </a:avLst>
-          </a:prstGeom>
-          <a:solidFill>
-            <a:srgbClr val="F4EEE8"/>
-          </a:solidFill>
-          <a:ln/>
-        </p:spPr>
-      </p:sp>
-      <p:sp>
-        <p:nvSpPr>
-          <p:cNvPr id="13" name="Shape 11"/>
-          <p:cNvSpPr/>
-          <p:nvPr/>
-        </p:nvSpPr>
-        <p:spPr>
-          <a:xfrm>
-            <a:off x="8823960" y="2606040"/>
-            <a:ext cx="548640" cy="548640"/>
+              <a:t>Change one line of the codebook and the same machine becomes a different reader.</a:t>
+            </a:r>
+            <a:endParaRPr lang="en-US" sz="1650" dirty="0"/>
+          </a:p>
+        </p:txBody>
+      </p:sp>
+      <p:sp>
+        <p:nvSpPr>
+          <p:cNvPr id="11" name="Shape 9"/>
+          <p:cNvSpPr/>
+          <p:nvPr/>
+        </p:nvSpPr>
+        <p:spPr>
+          <a:xfrm>
+            <a:off x="640080" y="5383530"/>
+            <a:ext cx="201168" cy="201168"/>
           </a:xfrm>
           <a:prstGeom prst="ellipse">
             <a:avLst/>
           </a:prstGeom>
           <a:solidFill>
-            <a:srgbClr val="B9852F"/>
-          </a:solidFill>
-          <a:ln/>
-        </p:spPr>
-      </p:sp>
-      <p:sp>
-        <p:nvSpPr>
-          <p:cNvPr id="14" name="Text 12"/>
-          <p:cNvSpPr/>
-          <p:nvPr/>
-        </p:nvSpPr>
-        <p:spPr>
-          <a:xfrm>
-            <a:off x="8778240" y="3383280"/>
-            <a:ext cx="2651760" cy="548640"/>
-          </a:xfrm>
-          <a:prstGeom prst="rect">
-            <a:avLst/>
-          </a:prstGeom>
-          <a:noFill/>
-          <a:ln/>
-        </p:spPr>
-        <p:txBody>
-          <a:bodyPr wrap="square" rtlCol="0" anchor="ctr"/>
-          <a:lstStyle/>
-          <a:p>
-            <a:pPr indent="0" marL="0">
-              <a:buNone/>
-            </a:pPr>
-            <a:r>
-              <a:rPr lang="en-US" sz="2100" b="1" dirty="0">
-                <a:solidFill>
-                  <a:srgbClr val="1A1A1A"/>
-                </a:solidFill>
-                <a:latin typeface="Cambria" pitchFamily="34" charset="0"/>
-                <a:ea typeface="Cambria" pitchFamily="34" charset="-122"/>
-                <a:cs typeface="Cambria" pitchFamily="34" charset="-120"/>
-              </a:rPr>
-              <a:t>Discussion</a:t>
-            </a:r>
-            <a:endParaRPr lang="en-US" sz="2100" dirty="0"/>
-          </a:p>
-        </p:txBody>
-      </p:sp>
-      <p:sp>
-        <p:nvSpPr>
-          <p:cNvPr id="15" name="Text 13"/>
-          <p:cNvSpPr/>
-          <p:nvPr/>
-        </p:nvSpPr>
-        <p:spPr>
-          <a:xfrm>
-            <a:off x="8778240" y="3977640"/>
-            <a:ext cx="2651760" cy="1371600"/>
+            <a:srgbClr val="7A3B2E"/>
+          </a:solidFill>
+          <a:ln/>
+        </p:spPr>
+      </p:sp>
+      <p:sp>
+        <p:nvSpPr>
+          <p:cNvPr id="12" name="Text 10"/>
+          <p:cNvSpPr/>
+          <p:nvPr/>
+        </p:nvSpPr>
+        <p:spPr>
+          <a:xfrm>
+            <a:off x="1097280" y="5292090"/>
+            <a:ext cx="10607040" cy="1017270"/>
           </a:xfrm>
           <a:prstGeom prst="rect">
             <a:avLst/>
@@ -2893,12 +4039,12 @@
           <a:p>
             <a:pPr indent="0" marL="0">
               <a:lnSpc>
-                <a:spcPct val="115000"/>
+                <a:spcPct val="112000"/>
               </a:lnSpc>
               <a:buNone/>
             </a:pPr>
             <a:r>
-              <a:rPr lang="en-US" sz="1500" dirty="0">
+              <a:rPr lang="en-US" sz="1650" dirty="0">
                 <a:solidFill>
                   <a:srgbClr val="1A1A1A"/>
                 </a:solidFill>
@@ -2906,9 +4052,9 @@
                 <a:ea typeface="Calibri" pitchFamily="34" charset="-122"/>
                 <a:cs typeface="Calibri" pitchFamily="34" charset="-120"/>
               </a:rPr>
-              <a:t>Interrogate the study, debate it, or critique each other's work.</a:t>
-            </a:r>
-            <a:endParaRPr lang="en-US" sz="1500" dirty="0"/>
+              <a:t>It fails silently. Confident-and-wrong looks identical to confident-and-right from the outside.</a:t>
+            </a:r>
+            <a:endParaRPr lang="en-US" sz="1650" dirty="0"/>
           </a:p>
         </p:txBody>
       </p:sp>
@@ -2946,14 +4092,34 @@
       </p:grpSpPr>
       <p:sp>
         <p:nvSpPr>
-          <p:cNvPr id="2" name="Text 0"/>
+          <p:cNvPr id="2" name="Shape 0"/>
+          <p:cNvSpPr/>
+          <p:nvPr/>
+        </p:nvSpPr>
+        <p:spPr>
+          <a:xfrm>
+            <a:off x="0" y="0"/>
+            <a:ext cx="164592" cy="6858000"/>
+          </a:xfrm>
+          <a:prstGeom prst="rect">
+            <a:avLst/>
+          </a:prstGeom>
+          <a:solidFill>
+            <a:srgbClr val="3F6F5F"/>
+          </a:solidFill>
+          <a:ln/>
+        </p:spPr>
+      </p:sp>
+      <p:sp>
+        <p:nvSpPr>
+          <p:cNvPr id="3" name="Text 1"/>
           <p:cNvSpPr/>
           <p:nvPr/>
         </p:nvSpPr>
         <p:spPr>
           <a:xfrm>
             <a:off x="640080" y="640080"/>
-            <a:ext cx="10058400" cy="731520"/>
+            <a:ext cx="10058400" cy="320040"/>
           </a:xfrm>
           <a:prstGeom prst="rect">
             <a:avLst/>
@@ -2963,6 +4129,47 @@
         </p:spPr>
         <p:txBody>
           <a:bodyPr wrap="square" rtlCol="0" anchor="ctr"/>
+          <a:lstStyle/>
+          <a:p>
+            <a:pPr indent="0" marL="0">
+              <a:buNone/>
+            </a:pPr>
+            <a:r>
+              <a:rPr lang="en-US" sz="1200" b="1" spc="300" kern="0" dirty="0">
+                <a:solidFill>
+                  <a:srgbClr val="3F6F5F"/>
+                </a:solidFill>
+                <a:latin typeface="Calibri" pitchFamily="34" charset="0"/>
+                <a:ea typeface="Calibri" pitchFamily="34" charset="-122"/>
+                <a:cs typeface="Calibri" pitchFamily="34" charset="-120"/>
+              </a:rPr>
+              <a:t>WEEK 7 · THE MATERIAL</a:t>
+            </a:r>
+            <a:endParaRPr lang="en-US" sz="1200" dirty="0"/>
+          </a:p>
+        </p:txBody>
+      </p:sp>
+      <p:sp>
+        <p:nvSpPr>
+          <p:cNvPr id="4" name="Text 2"/>
+          <p:cNvSpPr/>
+          <p:nvPr/>
+        </p:nvSpPr>
+        <p:spPr>
+          <a:xfrm>
+            <a:off x="640080" y="1005840"/>
+            <a:ext cx="10881360" cy="914400"/>
+          </a:xfrm>
+          <a:prstGeom prst="rect">
+            <a:avLst/>
+          </a:prstGeom>
+          <a:noFill/>
+          <a:ln/>
+        </p:spPr>
+        <p:txBody>
+          <a:bodyPr wrap="square" rtlCol="0" anchor="t">
+            <a:spAutoFit/>
+          </a:bodyPr>
           <a:lstStyle/>
           <a:p>
             <a:pPr indent="0" marL="0">
@@ -2977,7 +4184,7 @@
                 <a:ea typeface="Cambria" pitchFamily="34" charset="-122"/>
                 <a:cs typeface="Cambria" pitchFamily="34" charset="-120"/>
               </a:rPr>
-              <a:t>The session</a:t>
+              <a:t>Trust, by confidence</a:t>
             </a:r>
             <a:endParaRPr lang="en-US" sz="3000" dirty="0"/>
           </a:p>
@@ -2985,19 +4192,17 @@
       </p:sp>
       <p:sp>
         <p:nvSpPr>
-          <p:cNvPr id="3" name="Shape 1"/>
-          <p:cNvSpPr/>
-          <p:nvPr/>
-        </p:nvSpPr>
-        <p:spPr>
-          <a:xfrm>
-            <a:off x="640080" y="1572768"/>
-            <a:ext cx="868680" cy="457200"/>
-          </a:xfrm>
-          <a:prstGeom prst="roundRect">
-            <a:avLst>
-              <a:gd name="adj" fmla="val 12000"/>
-            </a:avLst>
+          <p:cNvPr id="5" name="Shape 3"/>
+          <p:cNvSpPr/>
+          <p:nvPr/>
+        </p:nvSpPr>
+        <p:spPr>
+          <a:xfrm>
+            <a:off x="640080" y="2331720"/>
+            <a:ext cx="201168" cy="201168"/>
+          </a:xfrm>
+          <a:prstGeom prst="ellipse">
+            <a:avLst/>
           </a:prstGeom>
           <a:solidFill>
             <a:srgbClr val="7A3B2E"/>
@@ -3007,71 +4212,99 @@
       </p:sp>
       <p:sp>
         <p:nvSpPr>
-          <p:cNvPr id="4" name="Text 2"/>
-          <p:cNvSpPr/>
-          <p:nvPr/>
-        </p:nvSpPr>
-        <p:spPr>
-          <a:xfrm>
-            <a:off x="640080" y="1572768"/>
-            <a:ext cx="868680" cy="457200"/>
-          </a:xfrm>
-          <a:prstGeom prst="rect">
-            <a:avLst/>
-          </a:prstGeom>
-          <a:noFill/>
-          <a:ln/>
-        </p:spPr>
-        <p:txBody>
-          <a:bodyPr wrap="square" rtlCol="0" anchor="ctr"/>
-          <a:lstStyle/>
-          <a:p>
-            <a:pPr algn="ctr" indent="0" marL="0">
-              <a:buNone/>
-            </a:pPr>
-            <a:r>
-              <a:rPr lang="en-US" sz="1100" b="1" dirty="0">
-                <a:solidFill>
-                  <a:srgbClr val="FFFFFF"/>
+          <p:cNvPr id="6" name="Text 4"/>
+          <p:cNvSpPr/>
+          <p:nvPr/>
+        </p:nvSpPr>
+        <p:spPr>
+          <a:xfrm>
+            <a:off x="1097280" y="2240280"/>
+            <a:ext cx="10607040" cy="1017270"/>
+          </a:xfrm>
+          <a:prstGeom prst="rect">
+            <a:avLst/>
+          </a:prstGeom>
+          <a:noFill/>
+          <a:ln/>
+        </p:spPr>
+        <p:txBody>
+          <a:bodyPr wrap="square" rtlCol="0" anchor="t">
+            <a:spAutoFit/>
+          </a:bodyPr>
+          <a:lstStyle/>
+          <a:p>
+            <a:pPr indent="0" marL="0">
+              <a:lnSpc>
+                <a:spcPct val="112000"/>
+              </a:lnSpc>
+              <a:buNone/>
+            </a:pPr>
+            <a:r>
+              <a:rPr lang="en-US" sz="1650" dirty="0">
+                <a:solidFill>
+                  <a:srgbClr val="1A1A1A"/>
                 </a:solidFill>
                 <a:latin typeface="Calibri" pitchFamily="34" charset="0"/>
                 <a:ea typeface="Calibri" pitchFamily="34" charset="-122"/>
                 <a:cs typeface="Calibri" pitchFamily="34" charset="-120"/>
               </a:rPr>
-              <a:t>0:00</a:t>
-            </a:r>
-            <a:endParaRPr lang="en-US" sz="1100" dirty="0"/>
-          </a:p>
-        </p:txBody>
-      </p:sp>
-      <p:sp>
-        <p:nvSpPr>
-          <p:cNvPr id="5" name="Text 3"/>
-          <p:cNvSpPr/>
-          <p:nvPr/>
-        </p:nvSpPr>
-        <p:spPr>
-          <a:xfrm>
-            <a:off x="1691640" y="1554480"/>
-            <a:ext cx="9646920" cy="566928"/>
-          </a:xfrm>
-          <a:prstGeom prst="rect">
-            <a:avLst/>
-          </a:prstGeom>
-          <a:noFill/>
-          <a:ln/>
-        </p:spPr>
-        <p:txBody>
-          <a:bodyPr wrap="square" rtlCol="0" anchor="ctr">
+              <a:t>Ask for a confidence number with every label. Sort ascending. Hand-check the bottom.</a:t>
+            </a:r>
+            <a:endParaRPr lang="en-US" sz="1650" dirty="0"/>
+          </a:p>
+        </p:txBody>
+      </p:sp>
+      <p:sp>
+        <p:nvSpPr>
+          <p:cNvPr id="7" name="Shape 5"/>
+          <p:cNvSpPr/>
+          <p:nvPr/>
+        </p:nvSpPr>
+        <p:spPr>
+          <a:xfrm>
+            <a:off x="640080" y="3348990"/>
+            <a:ext cx="201168" cy="201168"/>
+          </a:xfrm>
+          <a:prstGeom prst="ellipse">
+            <a:avLst/>
+          </a:prstGeom>
+          <a:solidFill>
+            <a:srgbClr val="3F6F5F"/>
+          </a:solidFill>
+          <a:ln/>
+        </p:spPr>
+      </p:sp>
+      <p:sp>
+        <p:nvSpPr>
+          <p:cNvPr id="8" name="Text 6"/>
+          <p:cNvSpPr/>
+          <p:nvPr/>
+        </p:nvSpPr>
+        <p:spPr>
+          <a:xfrm>
+            <a:off x="1097280" y="3257550"/>
+            <a:ext cx="10607040" cy="1017270"/>
+          </a:xfrm>
+          <a:prstGeom prst="rect">
+            <a:avLst/>
+          </a:prstGeom>
+          <a:noFill/>
+          <a:ln/>
+        </p:spPr>
+        <p:txBody>
+          <a:bodyPr wrap="square" rtlCol="0" anchor="t">
             <a:spAutoFit/>
           </a:bodyPr>
           <a:lstStyle/>
           <a:p>
             <a:pPr indent="0" marL="0">
-              <a:buNone/>
-            </a:pPr>
-            <a:r>
-              <a:rPr lang="en-US" sz="1250" dirty="0">
+              <a:lnSpc>
+                <a:spcPct val="112000"/>
+              </a:lnSpc>
+              <a:buNone/>
+            </a:pPr>
+            <a:r>
+              <a:rPr lang="en-US" sz="1650" dirty="0">
                 <a:solidFill>
                   <a:srgbClr val="1A1A1A"/>
                 </a:solidFill>
@@ -3079,101 +4312,127 @@
                 <a:ea typeface="Calibri" pitchFamily="34" charset="-122"/>
                 <a:cs typeface="Calibri" pitchFamily="34" charset="-120"/>
               </a:rPr>
-              <a:t>Warm-up + Look at This, room names the choice first: the AI as a cheaper coder, and where it fails silently.</a:t>
-            </a:r>
-            <a:endParaRPr lang="en-US" sz="1250" dirty="0"/>
-          </a:p>
-        </p:txBody>
-      </p:sp>
-      <p:sp>
-        <p:nvSpPr>
-          <p:cNvPr id="6" name="Shape 4"/>
-          <p:cNvSpPr/>
-          <p:nvPr/>
-        </p:nvSpPr>
-        <p:spPr>
-          <a:xfrm>
-            <a:off x="640080" y="2139696"/>
-            <a:ext cx="868680" cy="457200"/>
-          </a:xfrm>
-          <a:prstGeom prst="roundRect">
-            <a:avLst>
-              <a:gd name="adj" fmla="val 12000"/>
-            </a:avLst>
-          </a:prstGeom>
-          <a:solidFill>
-            <a:srgbClr val="7A3B2E"/>
-          </a:solidFill>
-          <a:ln/>
-        </p:spPr>
-      </p:sp>
-      <p:sp>
-        <p:nvSpPr>
-          <p:cNvPr id="7" name="Text 5"/>
-          <p:cNvSpPr/>
-          <p:nvPr/>
-        </p:nvSpPr>
-        <p:spPr>
-          <a:xfrm>
-            <a:off x="640080" y="2139696"/>
-            <a:ext cx="868680" cy="457200"/>
-          </a:xfrm>
-          <a:prstGeom prst="rect">
-            <a:avLst/>
-          </a:prstGeom>
-          <a:noFill/>
-          <a:ln/>
-        </p:spPr>
-        <p:txBody>
-          <a:bodyPr wrap="square" rtlCol="0" anchor="ctr"/>
-          <a:lstStyle/>
-          <a:p>
-            <a:pPr algn="ctr" indent="0" marL="0">
-              <a:buNone/>
-            </a:pPr>
-            <a:r>
-              <a:rPr lang="en-US" sz="1100" b="1" dirty="0">
-                <a:solidFill>
-                  <a:srgbClr val="FFFFFF"/>
+              <a:t>Gold set first: label ~30 items yourself before the machine sees them. Agreement against gold is your accuracy floor.</a:t>
+            </a:r>
+            <a:endParaRPr lang="en-US" sz="1650" dirty="0"/>
+          </a:p>
+        </p:txBody>
+      </p:sp>
+      <p:sp>
+        <p:nvSpPr>
+          <p:cNvPr id="9" name="Shape 7"/>
+          <p:cNvSpPr/>
+          <p:nvPr/>
+        </p:nvSpPr>
+        <p:spPr>
+          <a:xfrm>
+            <a:off x="640080" y="4366260"/>
+            <a:ext cx="201168" cy="201168"/>
+          </a:xfrm>
+          <a:prstGeom prst="ellipse">
+            <a:avLst/>
+          </a:prstGeom>
+          <a:solidFill>
+            <a:srgbClr val="B9852F"/>
+          </a:solidFill>
+          <a:ln/>
+        </p:spPr>
+      </p:sp>
+      <p:sp>
+        <p:nvSpPr>
+          <p:cNvPr id="10" name="Text 8"/>
+          <p:cNvSpPr/>
+          <p:nvPr/>
+        </p:nvSpPr>
+        <p:spPr>
+          <a:xfrm>
+            <a:off x="1097280" y="4274820"/>
+            <a:ext cx="10607040" cy="1017270"/>
+          </a:xfrm>
+          <a:prstGeom prst="rect">
+            <a:avLst/>
+          </a:prstGeom>
+          <a:noFill/>
+          <a:ln/>
+        </p:spPr>
+        <p:txBody>
+          <a:bodyPr wrap="square" rtlCol="0" anchor="t">
+            <a:spAutoFit/>
+          </a:bodyPr>
+          <a:lstStyle/>
+          <a:p>
+            <a:pPr indent="0" marL="0">
+              <a:lnSpc>
+                <a:spcPct val="112000"/>
+              </a:lnSpc>
+              <a:buNone/>
+            </a:pPr>
+            <a:r>
+              <a:rPr lang="en-US" sz="1650" dirty="0">
+                <a:solidFill>
+                  <a:srgbClr val="1A1A1A"/>
                 </a:solidFill>
                 <a:latin typeface="Calibri" pitchFamily="34" charset="0"/>
                 <a:ea typeface="Calibri" pitchFamily="34" charset="-122"/>
                 <a:cs typeface="Calibri" pitchFamily="34" charset="-120"/>
               </a:rPr>
-              <a:t>0:10</a:t>
-            </a:r>
-            <a:endParaRPr lang="en-US" sz="1100" dirty="0"/>
-          </a:p>
-        </p:txBody>
-      </p:sp>
-      <p:sp>
-        <p:nvSpPr>
-          <p:cNvPr id="8" name="Text 6"/>
-          <p:cNvSpPr/>
-          <p:nvPr/>
-        </p:nvSpPr>
-        <p:spPr>
-          <a:xfrm>
-            <a:off x="1691640" y="2121408"/>
-            <a:ext cx="9646920" cy="566928"/>
-          </a:xfrm>
-          <a:prstGeom prst="rect">
-            <a:avLst/>
-          </a:prstGeom>
-          <a:noFill/>
-          <a:ln/>
-        </p:spPr>
-        <p:txBody>
-          <a:bodyPr wrap="square" rtlCol="0" anchor="ctr">
+              <a:t>Disagreements are data: sometimes the model is wrong, sometimes your codebook was vague.</a:t>
+            </a:r>
+            <a:endParaRPr lang="en-US" sz="1650" dirty="0"/>
+          </a:p>
+        </p:txBody>
+      </p:sp>
+      <p:sp>
+        <p:nvSpPr>
+          <p:cNvPr id="11" name="Shape 9"/>
+          <p:cNvSpPr/>
+          <p:nvPr/>
+        </p:nvSpPr>
+        <p:spPr>
+          <a:xfrm>
+            <a:off x="640080" y="5383530"/>
+            <a:ext cx="201168" cy="201168"/>
+          </a:xfrm>
+          <a:prstGeom prst="ellipse">
+            <a:avLst/>
+          </a:prstGeom>
+          <a:solidFill>
+            <a:srgbClr val="7A3B2E"/>
+          </a:solidFill>
+          <a:ln/>
+        </p:spPr>
+      </p:sp>
+      <p:sp>
+        <p:nvSpPr>
+          <p:cNvPr id="12" name="Text 10"/>
+          <p:cNvSpPr/>
+          <p:nvPr/>
+        </p:nvSpPr>
+        <p:spPr>
+          <a:xfrm>
+            <a:off x="1097280" y="5292090"/>
+            <a:ext cx="10607040" cy="1017270"/>
+          </a:xfrm>
+          <a:prstGeom prst="rect">
+            <a:avLst/>
+          </a:prstGeom>
+          <a:noFill/>
+          <a:ln/>
+        </p:spPr>
+        <p:txBody>
+          <a:bodyPr wrap="square" rtlCol="0" anchor="t">
             <a:spAutoFit/>
           </a:bodyPr>
           <a:lstStyle/>
           <a:p>
             <a:pPr indent="0" marL="0">
-              <a:buNone/>
-            </a:pPr>
-            <a:r>
-              <a:rPr lang="en-US" sz="1250" dirty="0">
+              <a:lnSpc>
+                <a:spcPct val="112000"/>
+              </a:lnSpc>
+              <a:buNone/>
+            </a:pPr>
+            <a:r>
+              <a:rPr lang="en-US" sz="1650" dirty="0">
                 <a:solidFill>
                   <a:srgbClr val="1A1A1A"/>
                 </a:solidFill>
@@ -3181,417 +4440,9 @@
                 <a:ea typeface="Calibri" pitchFamily="34" charset="-122"/>
                 <a:cs typeface="Calibri" pitchFamily="34" charset="-120"/>
               </a:rPr>
-              <a:t>The annotator move, on your corpus: write a labeling prompt for your categories, run it on a slice, read the labels back. Tighten the definition and watch the labels shift, the prompt is your codebook.</a:t>
-            </a:r>
-            <a:endParaRPr lang="en-US" sz="1250" dirty="0"/>
-          </a:p>
-        </p:txBody>
-      </p:sp>
-      <p:sp>
-        <p:nvSpPr>
-          <p:cNvPr id="9" name="Shape 7"/>
-          <p:cNvSpPr/>
-          <p:nvPr/>
-        </p:nvSpPr>
-        <p:spPr>
-          <a:xfrm>
-            <a:off x="640080" y="2706624"/>
-            <a:ext cx="868680" cy="457200"/>
-          </a:xfrm>
-          <a:prstGeom prst="roundRect">
-            <a:avLst>
-              <a:gd name="adj" fmla="val 12000"/>
-            </a:avLst>
-          </a:prstGeom>
-          <a:solidFill>
-            <a:srgbClr val="7A3B2E"/>
-          </a:solidFill>
-          <a:ln/>
-        </p:spPr>
-      </p:sp>
-      <p:sp>
-        <p:nvSpPr>
-          <p:cNvPr id="10" name="Text 8"/>
-          <p:cNvSpPr/>
-          <p:nvPr/>
-        </p:nvSpPr>
-        <p:spPr>
-          <a:xfrm>
-            <a:off x="640080" y="2706624"/>
-            <a:ext cx="868680" cy="457200"/>
-          </a:xfrm>
-          <a:prstGeom prst="rect">
-            <a:avLst/>
-          </a:prstGeom>
-          <a:noFill/>
-          <a:ln/>
-        </p:spPr>
-        <p:txBody>
-          <a:bodyPr wrap="square" rtlCol="0" anchor="ctr"/>
-          <a:lstStyle/>
-          <a:p>
-            <a:pPr algn="ctr" indent="0" marL="0">
-              <a:buNone/>
-            </a:pPr>
-            <a:r>
-              <a:rPr lang="en-US" sz="1100" b="1" dirty="0">
-                <a:solidFill>
-                  <a:srgbClr val="FFFFFF"/>
-                </a:solidFill>
-                <a:latin typeface="Calibri" pitchFamily="34" charset="0"/>
-                <a:ea typeface="Calibri" pitchFamily="34" charset="-122"/>
-                <a:cs typeface="Calibri" pitchFamily="34" charset="-120"/>
-              </a:rPr>
-              <a:t>0:35</a:t>
-            </a:r>
-            <a:endParaRPr lang="en-US" sz="1100" dirty="0"/>
-          </a:p>
-        </p:txBody>
-      </p:sp>
-      <p:sp>
-        <p:nvSpPr>
-          <p:cNvPr id="11" name="Text 9"/>
-          <p:cNvSpPr/>
-          <p:nvPr/>
-        </p:nvSpPr>
-        <p:spPr>
-          <a:xfrm>
-            <a:off x="1691640" y="2688336"/>
-            <a:ext cx="9646920" cy="566928"/>
-          </a:xfrm>
-          <a:prstGeom prst="rect">
-            <a:avLst/>
-          </a:prstGeom>
-          <a:noFill/>
-          <a:ln/>
-        </p:spPr>
-        <p:txBody>
-          <a:bodyPr wrap="square" rtlCol="0" anchor="ctr">
-            <a:spAutoFit/>
-          </a:bodyPr>
-          <a:lstStyle/>
-          <a:p>
-            <a:pPr indent="0" marL="0">
-              <a:buNone/>
-            </a:pPr>
-            <a:r>
-              <a:rPr lang="en-US" sz="1250" dirty="0">
-                <a:solidFill>
-                  <a:srgbClr val="1A1A1A"/>
-                </a:solidFill>
-                <a:latin typeface="Calibri" pitchFamily="34" charset="0"/>
-                <a:ea typeface="Calibri" pitchFamily="34" charset="-122"/>
-                <a:cs typeface="Calibri" pitchFamily="34" charset="-120"/>
-              </a:rPr>
-              <a:t>Confidence, and when to trust it: ask the model not just what but how sure. Sort by confidence, trust the sure labels, hand-check the unsure ones, which is exactly which 30 to pull for Week 6.</a:t>
-            </a:r>
-            <a:endParaRPr lang="en-US" sz="1250" dirty="0"/>
-          </a:p>
-        </p:txBody>
-      </p:sp>
-      <p:sp>
-        <p:nvSpPr>
-          <p:cNvPr id="12" name="Shape 10"/>
-          <p:cNvSpPr/>
-          <p:nvPr/>
-        </p:nvSpPr>
-        <p:spPr>
-          <a:xfrm>
-            <a:off x="640080" y="3273552"/>
-            <a:ext cx="868680" cy="457200"/>
-          </a:xfrm>
-          <a:prstGeom prst="roundRect">
-            <a:avLst>
-              <a:gd name="adj" fmla="val 12000"/>
-            </a:avLst>
-          </a:prstGeom>
-          <a:solidFill>
-            <a:srgbClr val="7A3B2E"/>
-          </a:solidFill>
-          <a:ln/>
-        </p:spPr>
-      </p:sp>
-      <p:sp>
-        <p:nvSpPr>
-          <p:cNvPr id="13" name="Text 11"/>
-          <p:cNvSpPr/>
-          <p:nvPr/>
-        </p:nvSpPr>
-        <p:spPr>
-          <a:xfrm>
-            <a:off x="640080" y="3273552"/>
-            <a:ext cx="868680" cy="457200"/>
-          </a:xfrm>
-          <a:prstGeom prst="rect">
-            <a:avLst/>
-          </a:prstGeom>
-          <a:noFill/>
-          <a:ln/>
-        </p:spPr>
-        <p:txBody>
-          <a:bodyPr wrap="square" rtlCol="0" anchor="ctr"/>
-          <a:lstStyle/>
-          <a:p>
-            <a:pPr algn="ctr" indent="0" marL="0">
-              <a:buNone/>
-            </a:pPr>
-            <a:r>
-              <a:rPr lang="en-US" sz="1100" b="1" dirty="0">
-                <a:solidFill>
-                  <a:srgbClr val="FFFFFF"/>
-                </a:solidFill>
-                <a:latin typeface="Calibri" pitchFamily="34" charset="0"/>
-                <a:ea typeface="Calibri" pitchFamily="34" charset="-122"/>
-                <a:cs typeface="Calibri" pitchFamily="34" charset="-120"/>
-              </a:rPr>
-              <a:t>0:50</a:t>
-            </a:r>
-            <a:endParaRPr lang="en-US" sz="1100" dirty="0"/>
-          </a:p>
-        </p:txBody>
-      </p:sp>
-      <p:sp>
-        <p:nvSpPr>
-          <p:cNvPr id="14" name="Text 12"/>
-          <p:cNvSpPr/>
-          <p:nvPr/>
-        </p:nvSpPr>
-        <p:spPr>
-          <a:xfrm>
-            <a:off x="1691640" y="3255264"/>
-            <a:ext cx="9646920" cy="566928"/>
-          </a:xfrm>
-          <a:prstGeom prst="rect">
-            <a:avLst/>
-          </a:prstGeom>
-          <a:noFill/>
-          <a:ln/>
-        </p:spPr>
-        <p:txBody>
-          <a:bodyPr wrap="square" rtlCol="0" anchor="ctr">
-            <a:spAutoFit/>
-          </a:bodyPr>
-          <a:lstStyle/>
-          <a:p>
-            <a:pPr indent="0" marL="0">
-              <a:buNone/>
-            </a:pPr>
-            <a:r>
-              <a:rPr lang="en-US" sz="1250" dirty="0">
-                <a:solidFill>
-                  <a:srgbClr val="1A1A1A"/>
-                </a:solidFill>
-                <a:latin typeface="Calibri" pitchFamily="34" charset="0"/>
-                <a:ea typeface="Calibri" pitchFamily="34" charset="-122"/>
-                <a:cs typeface="Calibri" pitchFamily="34" charset="-120"/>
-              </a:rPr>
-              <a:t>Break</a:t>
-            </a:r>
-            <a:endParaRPr lang="en-US" sz="1250" dirty="0"/>
-          </a:p>
-        </p:txBody>
-      </p:sp>
-      <p:sp>
-        <p:nvSpPr>
-          <p:cNvPr id="15" name="Shape 13"/>
-          <p:cNvSpPr/>
-          <p:nvPr/>
-        </p:nvSpPr>
-        <p:spPr>
-          <a:xfrm>
-            <a:off x="640080" y="3840480"/>
-            <a:ext cx="868680" cy="457200"/>
-          </a:xfrm>
-          <a:prstGeom prst="roundRect">
-            <a:avLst>
-              <a:gd name="adj" fmla="val 12000"/>
-            </a:avLst>
-          </a:prstGeom>
-          <a:solidFill>
-            <a:srgbClr val="7A3B2E"/>
-          </a:solidFill>
-          <a:ln/>
-        </p:spPr>
-      </p:sp>
-      <p:sp>
-        <p:nvSpPr>
-          <p:cNvPr id="16" name="Text 14"/>
-          <p:cNvSpPr/>
-          <p:nvPr/>
-        </p:nvSpPr>
-        <p:spPr>
-          <a:xfrm>
-            <a:off x="640080" y="3840480"/>
-            <a:ext cx="868680" cy="457200"/>
-          </a:xfrm>
-          <a:prstGeom prst="rect">
-            <a:avLst/>
-          </a:prstGeom>
-          <a:noFill/>
-          <a:ln/>
-        </p:spPr>
-        <p:txBody>
-          <a:bodyPr wrap="square" rtlCol="0" anchor="ctr"/>
-          <a:lstStyle/>
-          <a:p>
-            <a:pPr algn="ctr" indent="0" marL="0">
-              <a:buNone/>
-            </a:pPr>
-            <a:r>
-              <a:rPr lang="en-US" sz="1100" b="1" dirty="0">
-                <a:solidFill>
-                  <a:srgbClr val="FFFFFF"/>
-                </a:solidFill>
-                <a:latin typeface="Calibri" pitchFamily="34" charset="0"/>
-                <a:ea typeface="Calibri" pitchFamily="34" charset="-122"/>
-                <a:cs typeface="Calibri" pitchFamily="34" charset="-120"/>
-              </a:rPr>
-              <a:t>1:00</a:t>
-            </a:r>
-            <a:endParaRPr lang="en-US" sz="1100" dirty="0"/>
-          </a:p>
-        </p:txBody>
-      </p:sp>
-      <p:sp>
-        <p:nvSpPr>
-          <p:cNvPr id="17" name="Text 15"/>
-          <p:cNvSpPr/>
-          <p:nvPr/>
-        </p:nvSpPr>
-        <p:spPr>
-          <a:xfrm>
-            <a:off x="1691640" y="3822192"/>
-            <a:ext cx="9646920" cy="566928"/>
-          </a:xfrm>
-          <a:prstGeom prst="rect">
-            <a:avLst/>
-          </a:prstGeom>
-          <a:noFill/>
-          <a:ln/>
-        </p:spPr>
-        <p:txBody>
-          <a:bodyPr wrap="square" rtlCol="0" anchor="ctr">
-            <a:spAutoFit/>
-          </a:bodyPr>
-          <a:lstStyle/>
-          <a:p>
-            <a:pPr indent="0" marL="0">
-              <a:buNone/>
-            </a:pPr>
-            <a:r>
-              <a:rPr lang="en-US" sz="1250" dirty="0">
-                <a:solidFill>
-                  <a:srgbClr val="1A1A1A"/>
-                </a:solidFill>
-                <a:latin typeface="Calibri" pitchFamily="34" charset="0"/>
-                <a:ea typeface="Calibri" pitchFamily="34" charset="-122"/>
-                <a:cs typeface="Calibri" pitchFamily="34" charset="-120"/>
-              </a:rPr>
-              <a:t>Accuracy check, then project workshop: run your prompt against a small hand-labeled gold set. Where does the AI disagree, and is it wrong or are you? Then build time on your corpus. Go further (optional, technically comfortable): instead of the closed API model, run an open model from Hugging Face, or fine-tune your own small classifier (ModernBERT) on the labels you just made, the third reader you own.</a:t>
-            </a:r>
-            <a:endParaRPr lang="en-US" sz="1250" dirty="0"/>
-          </a:p>
-        </p:txBody>
-      </p:sp>
-      <p:sp>
-        <p:nvSpPr>
-          <p:cNvPr id="18" name="Shape 16"/>
-          <p:cNvSpPr/>
-          <p:nvPr/>
-        </p:nvSpPr>
-        <p:spPr>
-          <a:xfrm>
-            <a:off x="640080" y="4407408"/>
-            <a:ext cx="868680" cy="457200"/>
-          </a:xfrm>
-          <a:prstGeom prst="roundRect">
-            <a:avLst>
-              <a:gd name="adj" fmla="val 12000"/>
-            </a:avLst>
-          </a:prstGeom>
-          <a:solidFill>
-            <a:srgbClr val="7A3B2E"/>
-          </a:solidFill>
-          <a:ln/>
-        </p:spPr>
-      </p:sp>
-      <p:sp>
-        <p:nvSpPr>
-          <p:cNvPr id="19" name="Text 17"/>
-          <p:cNvSpPr/>
-          <p:nvPr/>
-        </p:nvSpPr>
-        <p:spPr>
-          <a:xfrm>
-            <a:off x="640080" y="4407408"/>
-            <a:ext cx="868680" cy="457200"/>
-          </a:xfrm>
-          <a:prstGeom prst="rect">
-            <a:avLst/>
-          </a:prstGeom>
-          <a:noFill/>
-          <a:ln/>
-        </p:spPr>
-        <p:txBody>
-          <a:bodyPr wrap="square" rtlCol="0" anchor="ctr"/>
-          <a:lstStyle/>
-          <a:p>
-            <a:pPr algn="ctr" indent="0" marL="0">
-              <a:buNone/>
-            </a:pPr>
-            <a:r>
-              <a:rPr lang="en-US" sz="1100" b="1" dirty="0">
-                <a:solidFill>
-                  <a:srgbClr val="FFFFFF"/>
-                </a:solidFill>
-                <a:latin typeface="Calibri" pitchFamily="34" charset="0"/>
-                <a:ea typeface="Calibri" pitchFamily="34" charset="-122"/>
-                <a:cs typeface="Calibri" pitchFamily="34" charset="-120"/>
-              </a:rPr>
-              <a:t>1:50</a:t>
-            </a:r>
-            <a:endParaRPr lang="en-US" sz="1100" dirty="0"/>
-          </a:p>
-        </p:txBody>
-      </p:sp>
-      <p:sp>
-        <p:nvSpPr>
-          <p:cNvPr id="20" name="Text 18"/>
-          <p:cNvSpPr/>
-          <p:nvPr/>
-        </p:nvSpPr>
-        <p:spPr>
-          <a:xfrm>
-            <a:off x="1691640" y="4389120"/>
-            <a:ext cx="9646920" cy="566928"/>
-          </a:xfrm>
-          <a:prstGeom prst="rect">
-            <a:avLst/>
-          </a:prstGeom>
-          <a:noFill/>
-          <a:ln/>
-        </p:spPr>
-        <p:txBody>
-          <a:bodyPr wrap="square" rtlCol="0" anchor="ctr">
-            <a:spAutoFit/>
-          </a:bodyPr>
-          <a:lstStyle/>
-          <a:p>
-            <a:pPr indent="0" marL="0">
-              <a:buNone/>
-            </a:pPr>
-            <a:r>
-              <a:rPr lang="en-US" sz="1250" dirty="0">
-                <a:solidFill>
-                  <a:srgbClr val="1A1A1A"/>
-                </a:solidFill>
-                <a:latin typeface="Calibri" pitchFamily="34" charset="0"/>
-                <a:ea typeface="Calibri" pitchFamily="34" charset="-122"/>
-                <a:cs typeface="Calibri" pitchFamily="34" charset="-120"/>
-              </a:rPr>
-              <a:t>Gemini-free check and check-out.</a:t>
-            </a:r>
-            <a:endParaRPr lang="en-US" sz="1250" dirty="0"/>
+              <a:t>Whose reading are you renting? A model trained largely on scraped creative work. Week 8 takes that up.</a:t>
+            </a:r>
+            <a:endParaRPr lang="en-US" sz="1650" dirty="0"/>
           </a:p>
         </p:txBody>
       </p:sp>
@@ -3629,14 +4480,34 @@
       </p:grpSpPr>
       <p:sp>
         <p:nvSpPr>
-          <p:cNvPr id="2" name="Text 0"/>
+          <p:cNvPr id="2" name="Shape 0"/>
+          <p:cNvSpPr/>
+          <p:nvPr/>
+        </p:nvSpPr>
+        <p:spPr>
+          <a:xfrm>
+            <a:off x="0" y="0"/>
+            <a:ext cx="164592" cy="6858000"/>
+          </a:xfrm>
+          <a:prstGeom prst="rect">
+            <a:avLst/>
+          </a:prstGeom>
+          <a:solidFill>
+            <a:srgbClr val="B9852F"/>
+          </a:solidFill>
+          <a:ln/>
+        </p:spPr>
+      </p:sp>
+      <p:sp>
+        <p:nvSpPr>
+          <p:cNvPr id="3" name="Text 1"/>
           <p:cNvSpPr/>
           <p:nvPr/>
         </p:nvSpPr>
         <p:spPr>
           <a:xfrm>
             <a:off x="640080" y="640080"/>
-            <a:ext cx="10058400" cy="731520"/>
+            <a:ext cx="10058400" cy="320040"/>
           </a:xfrm>
           <a:prstGeom prst="rect">
             <a:avLst/>
@@ -3646,6 +4517,47 @@
         </p:spPr>
         <p:txBody>
           <a:bodyPr wrap="square" rtlCol="0" anchor="ctr"/>
+          <a:lstStyle/>
+          <a:p>
+            <a:pPr indent="0" marL="0">
+              <a:buNone/>
+            </a:pPr>
+            <a:r>
+              <a:rPr lang="en-US" sz="1200" b="1" spc="300" kern="0" dirty="0">
+                <a:solidFill>
+                  <a:srgbClr val="B9852F"/>
+                </a:solidFill>
+                <a:latin typeface="Calibri" pitchFamily="34" charset="0"/>
+                <a:ea typeface="Calibri" pitchFamily="34" charset="-122"/>
+                <a:cs typeface="Calibri" pitchFamily="34" charset="-120"/>
+              </a:rPr>
+              <a:t>WEEK 7 · THE MATERIAL</a:t>
+            </a:r>
+            <a:endParaRPr lang="en-US" sz="1200" dirty="0"/>
+          </a:p>
+        </p:txBody>
+      </p:sp>
+      <p:sp>
+        <p:nvSpPr>
+          <p:cNvPr id="4" name="Text 2"/>
+          <p:cNvSpPr/>
+          <p:nvPr/>
+        </p:nvSpPr>
+        <p:spPr>
+          <a:xfrm>
+            <a:off x="640080" y="1005840"/>
+            <a:ext cx="10881360" cy="914400"/>
+          </a:xfrm>
+          <a:prstGeom prst="rect">
+            <a:avLst/>
+          </a:prstGeom>
+          <a:noFill/>
+          <a:ln/>
+        </p:spPr>
+        <p:txBody>
+          <a:bodyPr wrap="square" rtlCol="0" anchor="t">
+            <a:spAutoFit/>
+          </a:bodyPr>
           <a:lstStyle/>
           <a:p>
             <a:pPr indent="0" marL="0">
@@ -3660,7 +4572,7 @@
                 <a:ea typeface="Cambria" pitchFamily="34" charset="-122"/>
                 <a:cs typeface="Cambria" pitchFamily="34" charset="-120"/>
               </a:rPr>
-              <a:t>Reading &amp; homework</a:t>
+              <a:t>Three readers, one course</a:t>
             </a:r>
             <a:endParaRPr lang="en-US" sz="3000" dirty="0"/>
           </a:p>
@@ -3668,14 +4580,14 @@
       </p:sp>
       <p:sp>
         <p:nvSpPr>
-          <p:cNvPr id="3" name="Shape 1"/>
-          <p:cNvSpPr/>
-          <p:nvPr/>
-        </p:nvSpPr>
-        <p:spPr>
-          <a:xfrm>
-            <a:off x="640080" y="1810512"/>
-            <a:ext cx="219456" cy="219456"/>
+          <p:cNvPr id="5" name="Shape 3"/>
+          <p:cNvSpPr/>
+          <p:nvPr/>
+        </p:nvSpPr>
+        <p:spPr>
+          <a:xfrm>
+            <a:off x="640080" y="2331720"/>
+            <a:ext cx="201168" cy="201168"/>
           </a:xfrm>
           <a:prstGeom prst="ellipse">
             <a:avLst/>
@@ -3688,53 +4600,78 @@
       </p:sp>
       <p:sp>
         <p:nvSpPr>
-          <p:cNvPr id="4" name="Text 2"/>
-          <p:cNvSpPr/>
-          <p:nvPr/>
-        </p:nvSpPr>
-        <p:spPr>
-          <a:xfrm>
-            <a:off x="1051560" y="1737360"/>
-            <a:ext cx="10424160" cy="365760"/>
-          </a:xfrm>
-          <a:prstGeom prst="rect">
-            <a:avLst/>
-          </a:prstGeom>
-          <a:noFill/>
-          <a:ln/>
-        </p:spPr>
-        <p:txBody>
-          <a:bodyPr wrap="square" rtlCol="0" anchor="ctr"/>
+          <p:cNvPr id="6" name="Text 4"/>
+          <p:cNvSpPr/>
+          <p:nvPr/>
+        </p:nvSpPr>
+        <p:spPr>
+          <a:xfrm>
+            <a:off x="1097280" y="2240280"/>
+            <a:ext cx="10607040" cy="1051560"/>
+          </a:xfrm>
+          <a:prstGeom prst="rect">
+            <a:avLst/>
+          </a:prstGeom>
+          <a:noFill/>
+          <a:ln/>
+        </p:spPr>
+        <p:txBody>
+          <a:bodyPr wrap="square" rtlCol="0" anchor="t">
+            <a:spAutoFit/>
+          </a:bodyPr>
           <a:lstStyle/>
           <a:p>
             <a:pPr indent="0" marL="0">
-              <a:buNone/>
-            </a:pPr>
-            <a:r>
-              <a:rPr lang="en-US" sz="1500" b="1" dirty="0">
-                <a:solidFill>
-                  <a:srgbClr val="7A3B2E"/>
+              <a:lnSpc>
+                <a:spcPct val="112000"/>
+              </a:lnSpc>
+              <a:buNone/>
+            </a:pPr>
+            <a:r>
+              <a:rPr lang="en-US" sz="1650" dirty="0">
+                <a:solidFill>
+                  <a:srgbClr val="1A1A1A"/>
                 </a:solidFill>
                 <a:latin typeface="Calibri" pitchFamily="34" charset="0"/>
                 <a:ea typeface="Calibri" pitchFamily="34" charset="-122"/>
                 <a:cs typeface="Calibri" pitchFamily="34" charset="-120"/>
               </a:rPr>
-              <a:t>Reading</a:t>
-            </a:r>
-            <a:endParaRPr lang="en-US" sz="1500" dirty="0"/>
-          </a:p>
-        </p:txBody>
-      </p:sp>
-      <p:sp>
-        <p:nvSpPr>
-          <p:cNvPr id="5" name="Text 3"/>
-          <p:cNvSpPr/>
-          <p:nvPr/>
-        </p:nvSpPr>
-        <p:spPr>
-          <a:xfrm>
-            <a:off x="1051560" y="2121408"/>
-            <a:ext cx="10424160" cy="731520"/>
+              <a:t>Week 3, the transparent reader: a logistic regression whose weights you can read.</a:t>
+            </a:r>
+            <a:endParaRPr lang="en-US" sz="1650" dirty="0"/>
+          </a:p>
+        </p:txBody>
+      </p:sp>
+      <p:sp>
+        <p:nvSpPr>
+          <p:cNvPr id="7" name="Shape 5"/>
+          <p:cNvSpPr/>
+          <p:nvPr/>
+        </p:nvSpPr>
+        <p:spPr>
+          <a:xfrm>
+            <a:off x="640080" y="3383280"/>
+            <a:ext cx="201168" cy="201168"/>
+          </a:xfrm>
+          <a:prstGeom prst="ellipse">
+            <a:avLst/>
+          </a:prstGeom>
+          <a:solidFill>
+            <a:srgbClr val="3F6F5F"/>
+          </a:solidFill>
+          <a:ln/>
+        </p:spPr>
+      </p:sp>
+      <p:sp>
+        <p:nvSpPr>
+          <p:cNvPr id="8" name="Text 6"/>
+          <p:cNvSpPr/>
+          <p:nvPr/>
+        </p:nvSpPr>
+        <p:spPr>
+          <a:xfrm>
+            <a:off x="1097280" y="3291840"/>
+            <a:ext cx="10607040" cy="1051560"/>
           </a:xfrm>
           <a:prstGeom prst="rect">
             <a:avLst/>
@@ -3749,10 +4686,13 @@
           <a:lstStyle/>
           <a:p>
             <a:pPr indent="0" marL="0">
-              <a:buNone/>
-            </a:pPr>
-            <a:r>
-              <a:rPr lang="en-US" sz="1400" dirty="0">
+              <a:lnSpc>
+                <a:spcPct val="112000"/>
+              </a:lnSpc>
+              <a:buNone/>
+            </a:pPr>
+            <a:r>
+              <a:rPr lang="en-US" sz="1650" dirty="0">
                 <a:solidFill>
                   <a:srgbClr val="1A1A1A"/>
                 </a:solidFill>
@@ -3760,309 +4700,73 @@
                 <a:ea typeface="Calibri" pitchFamily="34" charset="-122"/>
                 <a:cs typeface="Calibri" pitchFamily="34" charset="-120"/>
               </a:rPr>
-              <a:t>NYT v. OpenAI, read against your Week 4 licensing conversation</a:t>
-            </a:r>
-            <a:endParaRPr lang="en-US" sz="1400" dirty="0"/>
-          </a:p>
-        </p:txBody>
-      </p:sp>
-      <p:sp>
-        <p:nvSpPr>
-          <p:cNvPr id="6" name="Shape 4"/>
-          <p:cNvSpPr/>
-          <p:nvPr/>
-        </p:nvSpPr>
-        <p:spPr>
-          <a:xfrm>
-            <a:off x="640080" y="2953512"/>
-            <a:ext cx="219456" cy="219456"/>
+              <a:t>Week 7, the powerful reader: an API model you audit by confidence and gold set.</a:t>
+            </a:r>
+            <a:endParaRPr lang="en-US" sz="1650" dirty="0"/>
+          </a:p>
+        </p:txBody>
+      </p:sp>
+      <p:sp>
+        <p:nvSpPr>
+          <p:cNvPr id="9" name="Shape 7"/>
+          <p:cNvSpPr/>
+          <p:nvPr/>
+        </p:nvSpPr>
+        <p:spPr>
+          <a:xfrm>
+            <a:off x="640080" y="4434840"/>
+            <a:ext cx="201168" cy="201168"/>
           </a:xfrm>
           <a:prstGeom prst="ellipse">
             <a:avLst/>
           </a:prstGeom>
           <a:solidFill>
-            <a:srgbClr val="3F6F5F"/>
-          </a:solidFill>
-          <a:ln/>
-        </p:spPr>
-      </p:sp>
-      <p:sp>
-        <p:nvSpPr>
-          <p:cNvPr id="7" name="Text 5"/>
-          <p:cNvSpPr/>
-          <p:nvPr/>
-        </p:nvSpPr>
-        <p:spPr>
-          <a:xfrm>
-            <a:off x="1051560" y="2880360"/>
-            <a:ext cx="10424160" cy="365760"/>
-          </a:xfrm>
-          <a:prstGeom prst="rect">
-            <a:avLst/>
-          </a:prstGeom>
-          <a:noFill/>
-          <a:ln/>
-        </p:spPr>
-        <p:txBody>
-          <a:bodyPr wrap="square" rtlCol="0" anchor="ctr"/>
+            <a:srgbClr val="B9852F"/>
+          </a:solidFill>
+          <a:ln/>
+        </p:spPr>
+      </p:sp>
+      <p:sp>
+        <p:nvSpPr>
+          <p:cNvPr id="10" name="Text 8"/>
+          <p:cNvSpPr/>
+          <p:nvPr/>
+        </p:nvSpPr>
+        <p:spPr>
+          <a:xfrm>
+            <a:off x="1097280" y="4343400"/>
+            <a:ext cx="10607040" cy="1051560"/>
+          </a:xfrm>
+          <a:prstGeom prst="rect">
+            <a:avLst/>
+          </a:prstGeom>
+          <a:noFill/>
+          <a:ln/>
+        </p:spPr>
+        <p:txBody>
+          <a:bodyPr wrap="square" rtlCol="0" anchor="t">
+            <a:spAutoFit/>
+          </a:bodyPr>
           <a:lstStyle/>
           <a:p>
             <a:pPr indent="0" marL="0">
-              <a:buNone/>
-            </a:pPr>
-            <a:r>
-              <a:rPr lang="en-US" sz="1500" b="1" dirty="0">
-                <a:solidFill>
-                  <a:srgbClr val="3F6F5F"/>
+              <a:lnSpc>
+                <a:spcPct val="112000"/>
+              </a:lnSpc>
+              <a:buNone/>
+            </a:pPr>
+            <a:r>
+              <a:rPr lang="en-US" sz="1650" dirty="0">
+                <a:solidFill>
+                  <a:srgbClr val="1A1A1A"/>
                 </a:solidFill>
                 <a:latin typeface="Calibri" pitchFamily="34" charset="0"/>
                 <a:ea typeface="Calibri" pitchFamily="34" charset="-122"/>
                 <a:cs typeface="Calibri" pitchFamily="34" charset="-120"/>
               </a:rPr>
-              <a:t>Supplement</a:t>
-            </a:r>
-            <a:endParaRPr lang="en-US" sz="1500" dirty="0"/>
-          </a:p>
-        </p:txBody>
-      </p:sp>
-      <p:sp>
-        <p:nvSpPr>
-          <p:cNvPr id="8" name="Text 6"/>
-          <p:cNvSpPr/>
-          <p:nvPr/>
-        </p:nvSpPr>
-        <p:spPr>
-          <a:xfrm>
-            <a:off x="1051560" y="3264408"/>
-            <a:ext cx="10424160" cy="731520"/>
-          </a:xfrm>
-          <a:prstGeom prst="rect">
-            <a:avLst/>
-          </a:prstGeom>
-          <a:noFill/>
-          <a:ln/>
-        </p:spPr>
-        <p:txBody>
-          <a:bodyPr wrap="square" rtlCol="0" anchor="t">
-            <a:spAutoFit/>
-          </a:bodyPr>
-          <a:lstStyle/>
-          <a:p>
-            <a:pPr indent="0" marL="0">
-              <a:buNone/>
-            </a:pPr>
-            <a:r>
-              <a:rPr lang="en-US" sz="1400" dirty="0">
-                <a:solidFill>
-                  <a:srgbClr val="1A1A1A"/>
-                </a:solidFill>
-                <a:latin typeface="Calibri" pitchFamily="34" charset="0"/>
-                <a:ea typeface="Calibri" pitchFamily="34" charset="-122"/>
-                <a:cs typeface="Calibri" pitchFamily="34" charset="-120"/>
-              </a:rPr>
-              <a:t>Gilardi et al., full; Bamman et al., LLM classification in cultural analytics (CHR 2024)</a:t>
-            </a:r>
-            <a:endParaRPr lang="en-US" sz="1400" dirty="0"/>
-          </a:p>
-        </p:txBody>
-      </p:sp>
-      <p:sp>
-        <p:nvSpPr>
-          <p:cNvPr id="9" name="Shape 7"/>
-          <p:cNvSpPr/>
-          <p:nvPr/>
-        </p:nvSpPr>
-        <p:spPr>
-          <a:xfrm>
-            <a:off x="640080" y="4096512"/>
-            <a:ext cx="219456" cy="219456"/>
-          </a:xfrm>
-          <a:prstGeom prst="ellipse">
-            <a:avLst/>
-          </a:prstGeom>
-          <a:solidFill>
-            <a:srgbClr val="B9852F"/>
-          </a:solidFill>
-          <a:ln/>
-        </p:spPr>
-      </p:sp>
-      <p:sp>
-        <p:nvSpPr>
-          <p:cNvPr id="10" name="Text 8"/>
-          <p:cNvSpPr/>
-          <p:nvPr/>
-        </p:nvSpPr>
-        <p:spPr>
-          <a:xfrm>
-            <a:off x="1051560" y="4023360"/>
-            <a:ext cx="10424160" cy="365760"/>
-          </a:xfrm>
-          <a:prstGeom prst="rect">
-            <a:avLst/>
-          </a:prstGeom>
-          <a:noFill/>
-          <a:ln/>
-        </p:spPr>
-        <p:txBody>
-          <a:bodyPr wrap="square" rtlCol="0" anchor="ctr"/>
-          <a:lstStyle/>
-          <a:p>
-            <a:pPr indent="0" marL="0">
-              <a:buNone/>
-            </a:pPr>
-            <a:r>
-              <a:rPr lang="en-US" sz="1500" b="1" dirty="0">
-                <a:solidFill>
-                  <a:srgbClr val="B9852F"/>
-                </a:solidFill>
-                <a:latin typeface="Calibri" pitchFamily="34" charset="0"/>
-                <a:ea typeface="Calibri" pitchFamily="34" charset="-122"/>
-                <a:cs typeface="Calibri" pitchFamily="34" charset="-120"/>
-              </a:rPr>
-              <a:t>Sketch</a:t>
-            </a:r>
-            <a:endParaRPr lang="en-US" sz="1500" dirty="0"/>
-          </a:p>
-        </p:txBody>
-      </p:sp>
-      <p:sp>
-        <p:nvSpPr>
-          <p:cNvPr id="11" name="Text 9"/>
-          <p:cNvSpPr/>
-          <p:nvPr/>
-        </p:nvSpPr>
-        <p:spPr>
-          <a:xfrm>
-            <a:off x="1051560" y="4407408"/>
-            <a:ext cx="10424160" cy="731520"/>
-          </a:xfrm>
-          <a:prstGeom prst="rect">
-            <a:avLst/>
-          </a:prstGeom>
-          <a:noFill/>
-          <a:ln/>
-        </p:spPr>
-        <p:txBody>
-          <a:bodyPr wrap="square" rtlCol="0" anchor="t">
-            <a:spAutoFit/>
-          </a:bodyPr>
-          <a:lstStyle/>
-          <a:p>
-            <a:pPr indent="0" marL="0">
-              <a:buNone/>
-            </a:pPr>
-            <a:r>
-              <a:rPr lang="en-US" sz="1400" dirty="0">
-                <a:solidFill>
-                  <a:srgbClr val="1A1A1A"/>
-                </a:solidFill>
-                <a:latin typeface="Calibri" pitchFamily="34" charset="0"/>
-                <a:ea typeface="Calibri" pitchFamily="34" charset="-122"/>
-                <a:cs typeface="Calibri" pitchFamily="34" charset="-120"/>
-              </a:rPr>
-              <a:t>Show one label the AI got confidently wrong and one it nailed; say how you knew.</a:t>
-            </a:r>
-            <a:endParaRPr lang="en-US" sz="1400" dirty="0"/>
-          </a:p>
-        </p:txBody>
-      </p:sp>
-      <p:sp>
-        <p:nvSpPr>
-          <p:cNvPr id="12" name="Shape 10"/>
-          <p:cNvSpPr/>
-          <p:nvPr/>
-        </p:nvSpPr>
-        <p:spPr>
-          <a:xfrm>
-            <a:off x="640080" y="5239512"/>
-            <a:ext cx="219456" cy="219456"/>
-          </a:xfrm>
-          <a:prstGeom prst="ellipse">
-            <a:avLst/>
-          </a:prstGeom>
-          <a:solidFill>
-            <a:srgbClr val="7A3B2E"/>
-          </a:solidFill>
-          <a:ln/>
-        </p:spPr>
-      </p:sp>
-      <p:sp>
-        <p:nvSpPr>
-          <p:cNvPr id="13" name="Text 11"/>
-          <p:cNvSpPr/>
-          <p:nvPr/>
-        </p:nvSpPr>
-        <p:spPr>
-          <a:xfrm>
-            <a:off x="1051560" y="5166360"/>
-            <a:ext cx="10424160" cy="365760"/>
-          </a:xfrm>
-          <a:prstGeom prst="rect">
-            <a:avLst/>
-          </a:prstGeom>
-          <a:noFill/>
-          <a:ln/>
-        </p:spPr>
-        <p:txBody>
-          <a:bodyPr wrap="square" rtlCol="0" anchor="ctr"/>
-          <a:lstStyle/>
-          <a:p>
-            <a:pPr indent="0" marL="0">
-              <a:buNone/>
-            </a:pPr>
-            <a:r>
-              <a:rPr lang="en-US" sz="1500" b="1" dirty="0">
-                <a:solidFill>
-                  <a:srgbClr val="7A3B2E"/>
-                </a:solidFill>
-                <a:latin typeface="Calibri" pitchFamily="34" charset="0"/>
-                <a:ea typeface="Calibri" pitchFamily="34" charset="-122"/>
-                <a:cs typeface="Calibri" pitchFamily="34" charset="-120"/>
-              </a:rPr>
-              <a:t>Check (AI closed)</a:t>
-            </a:r>
-            <a:endParaRPr lang="en-US" sz="1500" dirty="0"/>
-          </a:p>
-        </p:txBody>
-      </p:sp>
-      <p:sp>
-        <p:nvSpPr>
-          <p:cNvPr id="14" name="Text 12"/>
-          <p:cNvSpPr/>
-          <p:nvPr/>
-        </p:nvSpPr>
-        <p:spPr>
-          <a:xfrm>
-            <a:off x="1051560" y="5550408"/>
-            <a:ext cx="10424160" cy="731520"/>
-          </a:xfrm>
-          <a:prstGeom prst="rect">
-            <a:avLst/>
-          </a:prstGeom>
-          <a:noFill/>
-          <a:ln/>
-        </p:spPr>
-        <p:txBody>
-          <a:bodyPr wrap="square" rtlCol="0" anchor="t">
-            <a:spAutoFit/>
-          </a:bodyPr>
-          <a:lstStyle/>
-          <a:p>
-            <a:pPr indent="0" marL="0">
-              <a:buNone/>
-            </a:pPr>
-            <a:r>
-              <a:rPr lang="en-US" sz="1400" dirty="0">
-                <a:solidFill>
-                  <a:srgbClr val="1A1A1A"/>
-                </a:solidFill>
-                <a:latin typeface="Calibri" pitchFamily="34" charset="0"/>
-                <a:ea typeface="Calibri" pitchFamily="34" charset="-122"/>
-                <a:cs typeface="Calibri" pitchFamily="34" charset="-120"/>
-              </a:rPr>
-              <a:t>Explain it: what is your labeling prompt deciding on your behalf, and how would you check whether to trust a given label? (Competencies 2, 5.)</a:t>
-            </a:r>
-            <a:endParaRPr lang="en-US" sz="1400" dirty="0"/>
+              <a:t>Go-further, the reader you own: fine-tune ModernBERT on your own labels. Free to run, and it is yours.</a:t>
+            </a:r>
+            <a:endParaRPr lang="en-US" sz="1650" dirty="0"/>
           </a:p>
         </p:txBody>
       </p:sp>
@@ -4106,8 +4810,8 @@
         </p:nvSpPr>
         <p:spPr>
           <a:xfrm>
-            <a:off x="640080" y="640080"/>
-            <a:ext cx="10058400" cy="320040"/>
+            <a:off x="640080" y="731520"/>
+            <a:ext cx="10058400" cy="731520"/>
           </a:xfrm>
           <a:prstGeom prst="rect">
             <a:avLst/>
@@ -4123,30 +4827,111 @@
               <a:buNone/>
             </a:pPr>
             <a:r>
-              <a:rPr lang="en-US" sz="1300" b="1" spc="300" kern="0" dirty="0">
-                <a:solidFill>
-                  <a:srgbClr val="7A3B2E"/>
+              <a:rPr lang="en-US" sz="3000" b="1" dirty="0">
+                <a:solidFill>
+                  <a:srgbClr val="1A1A1A"/>
+                </a:solidFill>
+                <a:latin typeface="Cambria" pitchFamily="34" charset="0"/>
+                <a:ea typeface="Cambria" pitchFamily="34" charset="-122"/>
+                <a:cs typeface="Cambria" pitchFamily="34" charset="-120"/>
+              </a:rPr>
+              <a:t>Three modes today</a:t>
+            </a:r>
+            <a:endParaRPr lang="en-US" sz="3000" dirty="0"/>
+          </a:p>
+        </p:txBody>
+      </p:sp>
+      <p:sp>
+        <p:nvSpPr>
+          <p:cNvPr id="3" name="Text 1"/>
+          <p:cNvSpPr/>
+          <p:nvPr/>
+        </p:nvSpPr>
+        <p:spPr>
+          <a:xfrm>
+            <a:off x="640080" y="1417320"/>
+            <a:ext cx="10058400" cy="365760"/>
+          </a:xfrm>
+          <a:prstGeom prst="rect">
+            <a:avLst/>
+          </a:prstGeom>
+          <a:noFill/>
+          <a:ln/>
+        </p:spPr>
+        <p:txBody>
+          <a:bodyPr wrap="square" rtlCol="0" anchor="ctr"/>
+          <a:lstStyle/>
+          <a:p>
+            <a:pPr indent="0" marL="0">
+              <a:buNone/>
+            </a:pPr>
+            <a:r>
+              <a:rPr lang="en-US" sz="1400" i="1" dirty="0">
+                <a:solidFill>
+                  <a:srgbClr val="6B6B63"/>
                 </a:solidFill>
                 <a:latin typeface="Calibri" pitchFamily="34" charset="0"/>
                 <a:ea typeface="Calibri" pitchFamily="34" charset="-122"/>
                 <a:cs typeface="Calibri" pitchFamily="34" charset="-120"/>
               </a:rPr>
-              <a:t>HOW THIS WEEK CONNECTS</a:t>
-            </a:r>
-            <a:endParaRPr lang="en-US" sz="1300" dirty="0"/>
-          </a:p>
-        </p:txBody>
-      </p:sp>
-      <p:sp>
-        <p:nvSpPr>
-          <p:cNvPr id="3" name="Text 1"/>
-          <p:cNvSpPr/>
-          <p:nvPr/>
-        </p:nvSpPr>
-        <p:spPr>
-          <a:xfrm>
-            <a:off x="640080" y="987552"/>
-            <a:ext cx="10058400" cy="640080"/>
+              <a:t>about a third of the session each</a:t>
+            </a:r>
+            <a:endParaRPr lang="en-US" sz="1400" dirty="0"/>
+          </a:p>
+        </p:txBody>
+      </p:sp>
+      <p:sp>
+        <p:nvSpPr>
+          <p:cNvPr id="4" name="Shape 2"/>
+          <p:cNvSpPr/>
+          <p:nvPr/>
+        </p:nvSpPr>
+        <p:spPr>
+          <a:xfrm>
+            <a:off x="640080" y="2194560"/>
+            <a:ext cx="3383280" cy="3291840"/>
+          </a:xfrm>
+          <a:prstGeom prst="roundRect">
+            <a:avLst>
+              <a:gd name="adj" fmla="val 3333"/>
+            </a:avLst>
+          </a:prstGeom>
+          <a:solidFill>
+            <a:srgbClr val="F4EEE8"/>
+          </a:solidFill>
+          <a:ln/>
+        </p:spPr>
+      </p:sp>
+      <p:sp>
+        <p:nvSpPr>
+          <p:cNvPr id="5" name="Shape 3"/>
+          <p:cNvSpPr/>
+          <p:nvPr/>
+        </p:nvSpPr>
+        <p:spPr>
+          <a:xfrm>
+            <a:off x="1051560" y="2606040"/>
+            <a:ext cx="548640" cy="548640"/>
+          </a:xfrm>
+          <a:prstGeom prst="ellipse">
+            <a:avLst/>
+          </a:prstGeom>
+          <a:solidFill>
+            <a:srgbClr val="7A3B2E"/>
+          </a:solidFill>
+          <a:ln/>
+        </p:spPr>
+      </p:sp>
+      <p:sp>
+        <p:nvSpPr>
+          <p:cNvPr id="6" name="Text 4"/>
+          <p:cNvSpPr/>
+          <p:nvPr/>
+        </p:nvSpPr>
+        <p:spPr>
+          <a:xfrm>
+            <a:off x="1005840" y="3383280"/>
+            <a:ext cx="2651760" cy="548640"/>
           </a:xfrm>
           <a:prstGeom prst="rect">
             <a:avLst/>
@@ -4162,7 +4947,7 @@
               <a:buNone/>
             </a:pPr>
             <a:r>
-              <a:rPr lang="en-US" sz="2800" b="1" dirty="0">
+              <a:rPr lang="en-US" sz="2100" b="1" dirty="0">
                 <a:solidFill>
                   <a:srgbClr val="1A1A1A"/>
                 </a:solidFill>
@@ -4170,44 +4955,108 @@
                 <a:ea typeface="Cambria" pitchFamily="34" charset="-122"/>
                 <a:cs typeface="Cambria" pitchFamily="34" charset="-120"/>
               </a:rPr>
-              <a:t>The course's through-lines</a:t>
-            </a:r>
-            <a:endParaRPr lang="en-US" sz="2800" dirty="0"/>
-          </a:p>
-        </p:txBody>
-      </p:sp>
-      <p:sp>
-        <p:nvSpPr>
-          <p:cNvPr id="4" name="Shape 2"/>
-          <p:cNvSpPr/>
-          <p:nvPr/>
-        </p:nvSpPr>
-        <p:spPr>
-          <a:xfrm>
-            <a:off x="640080" y="2057400"/>
-            <a:ext cx="457200" cy="457200"/>
+              <a:t>Lecture / demo</a:t>
+            </a:r>
+            <a:endParaRPr lang="en-US" sz="2100" dirty="0"/>
+          </a:p>
+        </p:txBody>
+      </p:sp>
+      <p:sp>
+        <p:nvSpPr>
+          <p:cNvPr id="7" name="Text 5"/>
+          <p:cNvSpPr/>
+          <p:nvPr/>
+        </p:nvSpPr>
+        <p:spPr>
+          <a:xfrm>
+            <a:off x="1005840" y="3977640"/>
+            <a:ext cx="2651760" cy="1371600"/>
+          </a:xfrm>
+          <a:prstGeom prst="rect">
+            <a:avLst/>
+          </a:prstGeom>
+          <a:noFill/>
+          <a:ln/>
+        </p:spPr>
+        <p:txBody>
+          <a:bodyPr wrap="square" rtlCol="0" anchor="t">
+            <a:spAutoFit/>
+          </a:bodyPr>
+          <a:lstStyle/>
+          <a:p>
+            <a:pPr indent="0" marL="0">
+              <a:lnSpc>
+                <a:spcPct val="115000"/>
+              </a:lnSpc>
+              <a:buNone/>
+            </a:pPr>
+            <a:r>
+              <a:rPr lang="en-US" sz="1500" dirty="0">
+                <a:solidFill>
+                  <a:srgbClr val="1A1A1A"/>
+                </a:solidFill>
+                <a:latin typeface="Calibri" pitchFamily="34" charset="0"/>
+                <a:ea typeface="Calibri" pitchFamily="34" charset="-122"/>
+                <a:cs typeface="Calibri" pitchFamily="34" charset="-120"/>
+              </a:rPr>
+              <a:t>LLM-as-annotator, the most common operation in the field</a:t>
+            </a:r>
+            <a:endParaRPr lang="en-US" sz="1500" dirty="0"/>
+          </a:p>
+        </p:txBody>
+      </p:sp>
+      <p:sp>
+        <p:nvSpPr>
+          <p:cNvPr id="8" name="Shape 6"/>
+          <p:cNvSpPr/>
+          <p:nvPr/>
+        </p:nvSpPr>
+        <p:spPr>
+          <a:xfrm>
+            <a:off x="4526280" y="2194560"/>
+            <a:ext cx="3383280" cy="3291840"/>
           </a:xfrm>
           <a:prstGeom prst="roundRect">
             <a:avLst>
-              <a:gd name="adj" fmla="val 16000"/>
+              <a:gd name="adj" fmla="val 3333"/>
             </a:avLst>
           </a:prstGeom>
           <a:solidFill>
-            <a:srgbClr val="7A3B2E"/>
-          </a:solidFill>
-          <a:ln/>
-        </p:spPr>
-      </p:sp>
-      <p:sp>
-        <p:nvSpPr>
-          <p:cNvPr id="5" name="Text 3"/>
-          <p:cNvSpPr/>
-          <p:nvPr/>
-        </p:nvSpPr>
-        <p:spPr>
-          <a:xfrm>
-            <a:off x="640080" y="2057400"/>
-            <a:ext cx="457200" cy="457200"/>
+            <a:srgbClr val="F4EEE8"/>
+          </a:solidFill>
+          <a:ln/>
+        </p:spPr>
+      </p:sp>
+      <p:sp>
+        <p:nvSpPr>
+          <p:cNvPr id="9" name="Shape 7"/>
+          <p:cNvSpPr/>
+          <p:nvPr/>
+        </p:nvSpPr>
+        <p:spPr>
+          <a:xfrm>
+            <a:off x="4937760" y="2606040"/>
+            <a:ext cx="548640" cy="548640"/>
+          </a:xfrm>
+          <a:prstGeom prst="ellipse">
+            <a:avLst/>
+          </a:prstGeom>
+          <a:solidFill>
+            <a:srgbClr val="3F6F5F"/>
+          </a:solidFill>
+          <a:ln/>
+        </p:spPr>
+      </p:sp>
+      <p:sp>
+        <p:nvSpPr>
+          <p:cNvPr id="10" name="Text 8"/>
+          <p:cNvSpPr/>
+          <p:nvPr/>
+        </p:nvSpPr>
+        <p:spPr>
+          <a:xfrm>
+            <a:off x="4892040" y="3383280"/>
+            <a:ext cx="2651760" cy="548640"/>
           </a:xfrm>
           <a:prstGeom prst="rect">
             <a:avLst/>
@@ -4219,34 +5068,120 @@
           <a:bodyPr wrap="square" rtlCol="0" anchor="ctr"/>
           <a:lstStyle/>
           <a:p>
-            <a:pPr algn="ctr" indent="0" marL="0">
-              <a:buNone/>
-            </a:pPr>
-            <a:r>
-              <a:rPr lang="en-US" sz="2000" b="1" dirty="0">
-                <a:solidFill>
-                  <a:srgbClr val="FFFFFF"/>
+            <a:pPr indent="0" marL="0">
+              <a:buNone/>
+            </a:pPr>
+            <a:r>
+              <a:rPr lang="en-US" sz="2100" b="1" dirty="0">
+                <a:solidFill>
+                  <a:srgbClr val="1A1A1A"/>
                 </a:solidFill>
                 <a:latin typeface="Cambria" pitchFamily="34" charset="0"/>
                 <a:ea typeface="Cambria" pitchFamily="34" charset="-122"/>
                 <a:cs typeface="Cambria" pitchFamily="34" charset="-120"/>
               </a:rPr>
-              <a:t>1</a:t>
-            </a:r>
-            <a:endParaRPr lang="en-US" sz="2000" dirty="0"/>
-          </a:p>
-        </p:txBody>
-      </p:sp>
-      <p:sp>
-        <p:nvSpPr>
-          <p:cNvPr id="6" name="Text 4"/>
-          <p:cNvSpPr/>
-          <p:nvPr/>
-        </p:nvSpPr>
-        <p:spPr>
-          <a:xfrm>
-            <a:off x="1371600" y="2020824"/>
-            <a:ext cx="10332720" cy="411480"/>
+              <a:t>Workshop</a:t>
+            </a:r>
+            <a:endParaRPr lang="en-US" sz="2100" dirty="0"/>
+          </a:p>
+        </p:txBody>
+      </p:sp>
+      <p:sp>
+        <p:nvSpPr>
+          <p:cNvPr id="11" name="Text 9"/>
+          <p:cNvSpPr/>
+          <p:nvPr/>
+        </p:nvSpPr>
+        <p:spPr>
+          <a:xfrm>
+            <a:off x="4892040" y="3977640"/>
+            <a:ext cx="2651760" cy="1371600"/>
+          </a:xfrm>
+          <a:prstGeom prst="rect">
+            <a:avLst/>
+          </a:prstGeom>
+          <a:noFill/>
+          <a:ln/>
+        </p:spPr>
+        <p:txBody>
+          <a:bodyPr wrap="square" rtlCol="0" anchor="t">
+            <a:spAutoFit/>
+          </a:bodyPr>
+          <a:lstStyle/>
+          <a:p>
+            <a:pPr indent="0" marL="0">
+              <a:lnSpc>
+                <a:spcPct val="115000"/>
+              </a:lnSpc>
+              <a:buNone/>
+            </a:pPr>
+            <a:r>
+              <a:rPr lang="en-US" sz="1500" dirty="0">
+                <a:solidFill>
+                  <a:srgbClr val="1A1A1A"/>
+                </a:solidFill>
+                <a:latin typeface="Calibri" pitchFamily="34" charset="0"/>
+                <a:ea typeface="Calibri" pitchFamily="34" charset="-122"/>
+                <a:cs typeface="Calibri" pitchFamily="34" charset="-120"/>
+              </a:rPr>
+              <a:t>Build hands-on on your own data.</a:t>
+            </a:r>
+            <a:endParaRPr lang="en-US" sz="1500" dirty="0"/>
+          </a:p>
+        </p:txBody>
+      </p:sp>
+      <p:sp>
+        <p:nvSpPr>
+          <p:cNvPr id="12" name="Shape 10"/>
+          <p:cNvSpPr/>
+          <p:nvPr/>
+        </p:nvSpPr>
+        <p:spPr>
+          <a:xfrm>
+            <a:off x="8412480" y="2194560"/>
+            <a:ext cx="3383280" cy="3291840"/>
+          </a:xfrm>
+          <a:prstGeom prst="roundRect">
+            <a:avLst>
+              <a:gd name="adj" fmla="val 3333"/>
+            </a:avLst>
+          </a:prstGeom>
+          <a:solidFill>
+            <a:srgbClr val="F4EEE8"/>
+          </a:solidFill>
+          <a:ln/>
+        </p:spPr>
+      </p:sp>
+      <p:sp>
+        <p:nvSpPr>
+          <p:cNvPr id="13" name="Shape 11"/>
+          <p:cNvSpPr/>
+          <p:nvPr/>
+        </p:nvSpPr>
+        <p:spPr>
+          <a:xfrm>
+            <a:off x="8823960" y="2606040"/>
+            <a:ext cx="548640" cy="548640"/>
+          </a:xfrm>
+          <a:prstGeom prst="ellipse">
+            <a:avLst/>
+          </a:prstGeom>
+          <a:solidFill>
+            <a:srgbClr val="B9852F"/>
+          </a:solidFill>
+          <a:ln/>
+        </p:spPr>
+      </p:sp>
+      <p:sp>
+        <p:nvSpPr>
+          <p:cNvPr id="14" name="Text 12"/>
+          <p:cNvSpPr/>
+          <p:nvPr/>
+        </p:nvSpPr>
+        <p:spPr>
+          <a:xfrm>
+            <a:off x="8778240" y="3383280"/>
+            <a:ext cx="2651760" cy="548640"/>
           </a:xfrm>
           <a:prstGeom prst="rect">
             <a:avLst/>
@@ -4262,30 +5197,30 @@
               <a:buNone/>
             </a:pPr>
             <a:r>
-              <a:rPr lang="en-US" sz="1900" b="1" dirty="0">
-                <a:solidFill>
-                  <a:srgbClr val="7A3B2E"/>
+              <a:rPr lang="en-US" sz="2100" b="1" dirty="0">
+                <a:solidFill>
+                  <a:srgbClr val="1A1A1A"/>
                 </a:solidFill>
                 <a:latin typeface="Cambria" pitchFamily="34" charset="0"/>
                 <a:ea typeface="Cambria" pitchFamily="34" charset="-122"/>
                 <a:cs typeface="Cambria" pitchFamily="34" charset="-120"/>
               </a:rPr>
-              <a:t>The reader you can't see</a:t>
-            </a:r>
-            <a:endParaRPr lang="en-US" sz="1900" dirty="0"/>
-          </a:p>
-        </p:txBody>
-      </p:sp>
-      <p:sp>
-        <p:nvSpPr>
-          <p:cNvPr id="7" name="Text 5"/>
-          <p:cNvSpPr/>
-          <p:nvPr/>
-        </p:nvSpPr>
-        <p:spPr>
-          <a:xfrm>
-            <a:off x="1371600" y="2441448"/>
-            <a:ext cx="10332720" cy="914400"/>
+              <a:t>Discussion</a:t>
+            </a:r>
+            <a:endParaRPr lang="en-US" sz="2100" dirty="0"/>
+          </a:p>
+        </p:txBody>
+      </p:sp>
+      <p:sp>
+        <p:nvSpPr>
+          <p:cNvPr id="15" name="Text 13"/>
+          <p:cNvSpPr/>
+          <p:nvPr/>
+        </p:nvSpPr>
+        <p:spPr>
+          <a:xfrm>
+            <a:off x="8778240" y="3977640"/>
+            <a:ext cx="2651760" cy="1371600"/>
           </a:xfrm>
           <a:prstGeom prst="rect">
             <a:avLst/>
@@ -4301,12 +5236,12 @@
           <a:p>
             <a:pPr indent="0" marL="0">
               <a:lnSpc>
-                <a:spcPct val="112000"/>
+                <a:spcPct val="115000"/>
               </a:lnSpc>
               <a:buNone/>
             </a:pPr>
             <a:r>
-              <a:rPr lang="en-US" sz="1450" dirty="0">
+              <a:rPr lang="en-US" sz="1500" dirty="0">
                 <a:solidFill>
                   <a:srgbClr val="1A1A1A"/>
                 </a:solidFill>
@@ -4314,297 +5249,9 @@
                 <a:ea typeface="Calibri" pitchFamily="34" charset="-122"/>
                 <a:cs typeface="Calibri" pitchFamily="34" charset="-120"/>
               </a:rPr>
-              <a:t>The powerful, opaque annotator: trust the labels it is sure of, check the rest.</a:t>
-            </a:r>
-            <a:endParaRPr lang="en-US" sz="1450" dirty="0"/>
-          </a:p>
-        </p:txBody>
-      </p:sp>
-      <p:sp>
-        <p:nvSpPr>
-          <p:cNvPr id="8" name="Shape 6"/>
-          <p:cNvSpPr/>
-          <p:nvPr/>
-        </p:nvSpPr>
-        <p:spPr>
-          <a:xfrm>
-            <a:off x="640080" y="3520440"/>
-            <a:ext cx="457200" cy="457200"/>
-          </a:xfrm>
-          <a:prstGeom prst="roundRect">
-            <a:avLst>
-              <a:gd name="adj" fmla="val 16000"/>
-            </a:avLst>
-          </a:prstGeom>
-          <a:solidFill>
-            <a:srgbClr val="3F6F5F"/>
-          </a:solidFill>
-          <a:ln/>
-        </p:spPr>
-      </p:sp>
-      <p:sp>
-        <p:nvSpPr>
-          <p:cNvPr id="9" name="Text 7"/>
-          <p:cNvSpPr/>
-          <p:nvPr/>
-        </p:nvSpPr>
-        <p:spPr>
-          <a:xfrm>
-            <a:off x="640080" y="3520440"/>
-            <a:ext cx="457200" cy="457200"/>
-          </a:xfrm>
-          <a:prstGeom prst="rect">
-            <a:avLst/>
-          </a:prstGeom>
-          <a:noFill/>
-          <a:ln/>
-        </p:spPr>
-        <p:txBody>
-          <a:bodyPr wrap="square" rtlCol="0" anchor="ctr"/>
-          <a:lstStyle/>
-          <a:p>
-            <a:pPr algn="ctr" indent="0" marL="0">
-              <a:buNone/>
-            </a:pPr>
-            <a:r>
-              <a:rPr lang="en-US" sz="2000" b="1" dirty="0">
-                <a:solidFill>
-                  <a:srgbClr val="FFFFFF"/>
-                </a:solidFill>
-                <a:latin typeface="Cambria" pitchFamily="34" charset="0"/>
-                <a:ea typeface="Cambria" pitchFamily="34" charset="-122"/>
-                <a:cs typeface="Cambria" pitchFamily="34" charset="-120"/>
-              </a:rPr>
-              <a:t>2</a:t>
-            </a:r>
-            <a:endParaRPr lang="en-US" sz="2000" dirty="0"/>
-          </a:p>
-        </p:txBody>
-      </p:sp>
-      <p:sp>
-        <p:nvSpPr>
-          <p:cNvPr id="10" name="Text 8"/>
-          <p:cNvSpPr/>
-          <p:nvPr/>
-        </p:nvSpPr>
-        <p:spPr>
-          <a:xfrm>
-            <a:off x="1371600" y="3483864"/>
-            <a:ext cx="10332720" cy="411480"/>
-          </a:xfrm>
-          <a:prstGeom prst="rect">
-            <a:avLst/>
-          </a:prstGeom>
-          <a:noFill/>
-          <a:ln/>
-        </p:spPr>
-        <p:txBody>
-          <a:bodyPr wrap="square" rtlCol="0" anchor="ctr"/>
-          <a:lstStyle/>
-          <a:p>
-            <a:pPr indent="0" marL="0">
-              <a:buNone/>
-            </a:pPr>
-            <a:r>
-              <a:rPr lang="en-US" sz="1900" b="1" dirty="0">
-                <a:solidFill>
-                  <a:srgbClr val="3F6F5F"/>
-                </a:solidFill>
-                <a:latin typeface="Cambria" pitchFamily="34" charset="0"/>
-                <a:ea typeface="Cambria" pitchFamily="34" charset="-122"/>
-                <a:cs typeface="Cambria" pitchFamily="34" charset="-120"/>
-              </a:rPr>
-              <a:t>Whose judgment are you renting</a:t>
-            </a:r>
-            <a:endParaRPr lang="en-US" sz="1900" dirty="0"/>
-          </a:p>
-        </p:txBody>
-      </p:sp>
-      <p:sp>
-        <p:nvSpPr>
-          <p:cNvPr id="11" name="Text 9"/>
-          <p:cNvSpPr/>
-          <p:nvPr/>
-        </p:nvSpPr>
-        <p:spPr>
-          <a:xfrm>
-            <a:off x="1371600" y="3904488"/>
-            <a:ext cx="10332720" cy="914400"/>
-          </a:xfrm>
-          <a:prstGeom prst="rect">
-            <a:avLst/>
-          </a:prstGeom>
-          <a:noFill/>
-          <a:ln/>
-        </p:spPr>
-        <p:txBody>
-          <a:bodyPr wrap="square" rtlCol="0" anchor="t">
-            <a:spAutoFit/>
-          </a:bodyPr>
-          <a:lstStyle/>
-          <a:p>
-            <a:pPr indent="0" marL="0">
-              <a:lnSpc>
-                <a:spcPct val="112000"/>
-              </a:lnSpc>
-              <a:buNone/>
-            </a:pPr>
-            <a:r>
-              <a:rPr lang="en-US" sz="1450" dirty="0">
-                <a:solidFill>
-                  <a:srgbClr val="1A1A1A"/>
-                </a:solidFill>
-                <a:latin typeface="Calibri" pitchFamily="34" charset="0"/>
-                <a:ea typeface="Calibri" pitchFamily="34" charset="-122"/>
-                <a:cs typeface="Calibri" pitchFamily="34" charset="-120"/>
-              </a:rPr>
-              <a:t>Its reading was learned from creative work scraped largely without permission.</a:t>
-            </a:r>
-            <a:endParaRPr lang="en-US" sz="1450" dirty="0"/>
-          </a:p>
-        </p:txBody>
-      </p:sp>
-      <p:sp>
-        <p:nvSpPr>
-          <p:cNvPr id="12" name="Shape 10"/>
-          <p:cNvSpPr/>
-          <p:nvPr/>
-        </p:nvSpPr>
-        <p:spPr>
-          <a:xfrm>
-            <a:off x="640080" y="4983480"/>
-            <a:ext cx="457200" cy="457200"/>
-          </a:xfrm>
-          <a:prstGeom prst="roundRect">
-            <a:avLst>
-              <a:gd name="adj" fmla="val 16000"/>
-            </a:avLst>
-          </a:prstGeom>
-          <a:solidFill>
-            <a:srgbClr val="B9852F"/>
-          </a:solidFill>
-          <a:ln/>
-        </p:spPr>
-      </p:sp>
-      <p:sp>
-        <p:nvSpPr>
-          <p:cNvPr id="13" name="Text 11"/>
-          <p:cNvSpPr/>
-          <p:nvPr/>
-        </p:nvSpPr>
-        <p:spPr>
-          <a:xfrm>
-            <a:off x="640080" y="4983480"/>
-            <a:ext cx="457200" cy="457200"/>
-          </a:xfrm>
-          <a:prstGeom prst="rect">
-            <a:avLst/>
-          </a:prstGeom>
-          <a:noFill/>
-          <a:ln/>
-        </p:spPr>
-        <p:txBody>
-          <a:bodyPr wrap="square" rtlCol="0" anchor="ctr"/>
-          <a:lstStyle/>
-          <a:p>
-            <a:pPr algn="ctr" indent="0" marL="0">
-              <a:buNone/>
-            </a:pPr>
-            <a:r>
-              <a:rPr lang="en-US" sz="2000" b="1" dirty="0">
-                <a:solidFill>
-                  <a:srgbClr val="FFFFFF"/>
-                </a:solidFill>
-                <a:latin typeface="Cambria" pitchFamily="34" charset="0"/>
-                <a:ea typeface="Cambria" pitchFamily="34" charset="-122"/>
-                <a:cs typeface="Cambria" pitchFamily="34" charset="-120"/>
-              </a:rPr>
-              <a:t>3</a:t>
-            </a:r>
-            <a:endParaRPr lang="en-US" sz="2000" dirty="0"/>
-          </a:p>
-        </p:txBody>
-      </p:sp>
-      <p:sp>
-        <p:nvSpPr>
-          <p:cNvPr id="14" name="Text 12"/>
-          <p:cNvSpPr/>
-          <p:nvPr/>
-        </p:nvSpPr>
-        <p:spPr>
-          <a:xfrm>
-            <a:off x="1371600" y="4946904"/>
-            <a:ext cx="10332720" cy="411480"/>
-          </a:xfrm>
-          <a:prstGeom prst="rect">
-            <a:avLst/>
-          </a:prstGeom>
-          <a:noFill/>
-          <a:ln/>
-        </p:spPr>
-        <p:txBody>
-          <a:bodyPr wrap="square" rtlCol="0" anchor="ctr"/>
-          <a:lstStyle/>
-          <a:p>
-            <a:pPr indent="0" marL="0">
-              <a:buNone/>
-            </a:pPr>
-            <a:r>
-              <a:rPr lang="en-US" sz="1900" b="1" dirty="0">
-                <a:solidFill>
-                  <a:srgbClr val="B9852F"/>
-                </a:solidFill>
-                <a:latin typeface="Cambria" pitchFamily="34" charset="0"/>
-                <a:ea typeface="Cambria" pitchFamily="34" charset="-122"/>
-                <a:cs typeface="Cambria" pitchFamily="34" charset="-120"/>
-              </a:rPr>
-              <a:t>The third reader (go further)</a:t>
-            </a:r>
-            <a:endParaRPr lang="en-US" sz="1900" dirty="0"/>
-          </a:p>
-        </p:txBody>
-      </p:sp>
-      <p:sp>
-        <p:nvSpPr>
-          <p:cNvPr id="15" name="Text 13"/>
-          <p:cNvSpPr/>
-          <p:nvPr/>
-        </p:nvSpPr>
-        <p:spPr>
-          <a:xfrm>
-            <a:off x="1371600" y="5367528"/>
-            <a:ext cx="10332720" cy="914400"/>
-          </a:xfrm>
-          <a:prstGeom prst="rect">
-            <a:avLst/>
-          </a:prstGeom>
-          <a:noFill/>
-          <a:ln/>
-        </p:spPr>
-        <p:txBody>
-          <a:bodyPr wrap="square" rtlCol="0" anchor="t">
-            <a:spAutoFit/>
-          </a:bodyPr>
-          <a:lstStyle/>
-          <a:p>
-            <a:pPr indent="0" marL="0">
-              <a:lnSpc>
-                <a:spcPct val="112000"/>
-              </a:lnSpc>
-              <a:buNone/>
-            </a:pPr>
-            <a:r>
-              <a:rPr lang="en-US" sz="1450" dirty="0">
-                <a:solidFill>
-                  <a:srgbClr val="1A1A1A"/>
-                </a:solidFill>
-                <a:latin typeface="Calibri" pitchFamily="34" charset="0"/>
-                <a:ea typeface="Calibri" pitchFamily="34" charset="-122"/>
-                <a:cs typeface="Calibri" pitchFamily="34" charset="-120"/>
-              </a:rPr>
-              <a:t>Fine-tune a model you own, transparent, powerful, now yours.</a:t>
-            </a:r>
-            <a:endParaRPr lang="en-US" sz="1450" dirty="0"/>
+              <a:t>Interrogate the study, debate it, or critique each other's work.</a:t>
+            </a:r>
+            <a:endParaRPr lang="en-US" sz="1500" dirty="0"/>
           </a:p>
         </p:txBody>
       </p:sp>
@@ -4622,7 +5269,7 @@
     <p:bg>
       <p:bgPr>
         <a:solidFill>
-          <a:srgbClr val="4E261D"/>
+          <a:srgbClr val="FFFFFF"/>
         </a:solidFill>
       </p:bgPr>
     </p:bg>
@@ -4648,8 +5295,8 @@
         </p:nvSpPr>
         <p:spPr>
           <a:xfrm>
-            <a:off x="640080" y="1005840"/>
-            <a:ext cx="8229600" cy="320040"/>
+            <a:off x="640080" y="640080"/>
+            <a:ext cx="10058400" cy="731520"/>
           </a:xfrm>
           <a:prstGeom prst="rect">
             <a:avLst/>
@@ -4665,30 +5312,772 @@
               <a:buNone/>
             </a:pPr>
             <a:r>
-              <a:rPr lang="en-US" sz="1300" b="1" spc="300" kern="0" dirty="0">
-                <a:solidFill>
-                  <a:srgbClr val="B9852F"/>
+              <a:rPr lang="en-US" sz="3000" b="1" dirty="0">
+                <a:solidFill>
+                  <a:srgbClr val="1A1A1A"/>
+                </a:solidFill>
+                <a:latin typeface="Cambria" pitchFamily="34" charset="0"/>
+                <a:ea typeface="Cambria" pitchFamily="34" charset="-122"/>
+                <a:cs typeface="Cambria" pitchFamily="34" charset="-120"/>
+              </a:rPr>
+              <a:t>The session</a:t>
+            </a:r>
+            <a:endParaRPr lang="en-US" sz="3000" dirty="0"/>
+          </a:p>
+        </p:txBody>
+      </p:sp>
+      <p:sp>
+        <p:nvSpPr>
+          <p:cNvPr id="3" name="Shape 1"/>
+          <p:cNvSpPr/>
+          <p:nvPr/>
+        </p:nvSpPr>
+        <p:spPr>
+          <a:xfrm>
+            <a:off x="640080" y="1572768"/>
+            <a:ext cx="868680" cy="457200"/>
+          </a:xfrm>
+          <a:prstGeom prst="roundRect">
+            <a:avLst>
+              <a:gd name="adj" fmla="val 12000"/>
+            </a:avLst>
+          </a:prstGeom>
+          <a:solidFill>
+            <a:srgbClr val="7A3B2E"/>
+          </a:solidFill>
+          <a:ln/>
+        </p:spPr>
+      </p:sp>
+      <p:sp>
+        <p:nvSpPr>
+          <p:cNvPr id="4" name="Text 2"/>
+          <p:cNvSpPr/>
+          <p:nvPr/>
+        </p:nvSpPr>
+        <p:spPr>
+          <a:xfrm>
+            <a:off x="640080" y="1572768"/>
+            <a:ext cx="868680" cy="457200"/>
+          </a:xfrm>
+          <a:prstGeom prst="rect">
+            <a:avLst/>
+          </a:prstGeom>
+          <a:noFill/>
+          <a:ln/>
+        </p:spPr>
+        <p:txBody>
+          <a:bodyPr wrap="square" rtlCol="0" anchor="ctr"/>
+          <a:lstStyle/>
+          <a:p>
+            <a:pPr algn="ctr" indent="0" marL="0">
+              <a:buNone/>
+            </a:pPr>
+            <a:r>
+              <a:rPr lang="en-US" sz="1100" b="1" dirty="0">
+                <a:solidFill>
+                  <a:srgbClr val="FFFFFF"/>
                 </a:solidFill>
                 <a:latin typeface="Calibri" pitchFamily="34" charset="0"/>
                 <a:ea typeface="Calibri" pitchFamily="34" charset="-122"/>
                 <a:cs typeface="Calibri" pitchFamily="34" charset="-120"/>
               </a:rPr>
-              <a:t>THE CHECK, AI CLOSED</a:t>
-            </a:r>
-            <a:endParaRPr lang="en-US" sz="1300" dirty="0"/>
-          </a:p>
-        </p:txBody>
-      </p:sp>
-      <p:sp>
-        <p:nvSpPr>
-          <p:cNvPr id="3" name="Text 1"/>
-          <p:cNvSpPr/>
-          <p:nvPr/>
-        </p:nvSpPr>
-        <p:spPr>
-          <a:xfrm>
-            <a:off x="640080" y="1645920"/>
-            <a:ext cx="8686800" cy="3108960"/>
+              <a:t>0:00</a:t>
+            </a:r>
+            <a:endParaRPr lang="en-US" sz="1100" dirty="0"/>
+          </a:p>
+        </p:txBody>
+      </p:sp>
+      <p:sp>
+        <p:nvSpPr>
+          <p:cNvPr id="5" name="Text 3"/>
+          <p:cNvSpPr/>
+          <p:nvPr/>
+        </p:nvSpPr>
+        <p:spPr>
+          <a:xfrm>
+            <a:off x="1691640" y="1554480"/>
+            <a:ext cx="9646920" cy="566928"/>
+          </a:xfrm>
+          <a:prstGeom prst="rect">
+            <a:avLst/>
+          </a:prstGeom>
+          <a:noFill/>
+          <a:ln/>
+        </p:spPr>
+        <p:txBody>
+          <a:bodyPr wrap="square" rtlCol="0" anchor="ctr">
+            <a:spAutoFit/>
+          </a:bodyPr>
+          <a:lstStyle/>
+          <a:p>
+            <a:pPr indent="0" marL="0">
+              <a:buNone/>
+            </a:pPr>
+            <a:r>
+              <a:rPr lang="en-US" sz="1250" dirty="0">
+                <a:solidFill>
+                  <a:srgbClr val="1A1A1A"/>
+                </a:solidFill>
+                <a:latin typeface="Calibri" pitchFamily="34" charset="0"/>
+                <a:ea typeface="Calibri" pitchFamily="34" charset="-122"/>
+                <a:cs typeface="Calibri" pitchFamily="34" charset="-120"/>
+              </a:rPr>
+              <a:t>Warm-up + Look at This, room names the choice first: the AI as a cheaper coder, and where it fails silently.</a:t>
+            </a:r>
+            <a:endParaRPr lang="en-US" sz="1250" dirty="0"/>
+          </a:p>
+        </p:txBody>
+      </p:sp>
+      <p:sp>
+        <p:nvSpPr>
+          <p:cNvPr id="6" name="Shape 4"/>
+          <p:cNvSpPr/>
+          <p:nvPr/>
+        </p:nvSpPr>
+        <p:spPr>
+          <a:xfrm>
+            <a:off x="640080" y="2139696"/>
+            <a:ext cx="868680" cy="457200"/>
+          </a:xfrm>
+          <a:prstGeom prst="roundRect">
+            <a:avLst>
+              <a:gd name="adj" fmla="val 12000"/>
+            </a:avLst>
+          </a:prstGeom>
+          <a:solidFill>
+            <a:srgbClr val="7A3B2E"/>
+          </a:solidFill>
+          <a:ln/>
+        </p:spPr>
+      </p:sp>
+      <p:sp>
+        <p:nvSpPr>
+          <p:cNvPr id="7" name="Text 5"/>
+          <p:cNvSpPr/>
+          <p:nvPr/>
+        </p:nvSpPr>
+        <p:spPr>
+          <a:xfrm>
+            <a:off x="640080" y="2139696"/>
+            <a:ext cx="868680" cy="457200"/>
+          </a:xfrm>
+          <a:prstGeom prst="rect">
+            <a:avLst/>
+          </a:prstGeom>
+          <a:noFill/>
+          <a:ln/>
+        </p:spPr>
+        <p:txBody>
+          <a:bodyPr wrap="square" rtlCol="0" anchor="ctr"/>
+          <a:lstStyle/>
+          <a:p>
+            <a:pPr algn="ctr" indent="0" marL="0">
+              <a:buNone/>
+            </a:pPr>
+            <a:r>
+              <a:rPr lang="en-US" sz="1100" b="1" dirty="0">
+                <a:solidFill>
+                  <a:srgbClr val="FFFFFF"/>
+                </a:solidFill>
+                <a:latin typeface="Calibri" pitchFamily="34" charset="0"/>
+                <a:ea typeface="Calibri" pitchFamily="34" charset="-122"/>
+                <a:cs typeface="Calibri" pitchFamily="34" charset="-120"/>
+              </a:rPr>
+              <a:t>0:10</a:t>
+            </a:r>
+            <a:endParaRPr lang="en-US" sz="1100" dirty="0"/>
+          </a:p>
+        </p:txBody>
+      </p:sp>
+      <p:sp>
+        <p:nvSpPr>
+          <p:cNvPr id="8" name="Text 6"/>
+          <p:cNvSpPr/>
+          <p:nvPr/>
+        </p:nvSpPr>
+        <p:spPr>
+          <a:xfrm>
+            <a:off x="1691640" y="2121408"/>
+            <a:ext cx="9646920" cy="566928"/>
+          </a:xfrm>
+          <a:prstGeom prst="rect">
+            <a:avLst/>
+          </a:prstGeom>
+          <a:noFill/>
+          <a:ln/>
+        </p:spPr>
+        <p:txBody>
+          <a:bodyPr wrap="square" rtlCol="0" anchor="ctr">
+            <a:spAutoFit/>
+          </a:bodyPr>
+          <a:lstStyle/>
+          <a:p>
+            <a:pPr indent="0" marL="0">
+              <a:buNone/>
+            </a:pPr>
+            <a:r>
+              <a:rPr lang="en-US" sz="1250" dirty="0">
+                <a:solidFill>
+                  <a:srgbClr val="1A1A1A"/>
+                </a:solidFill>
+                <a:latin typeface="Calibri" pitchFamily="34" charset="0"/>
+                <a:ea typeface="Calibri" pitchFamily="34" charset="-122"/>
+                <a:cs typeface="Calibri" pitchFamily="34" charset="-120"/>
+              </a:rPr>
+              <a:t>The annotator move, on your corpus: write a labeling prompt for your categories, run it on a slice, read the labels back. Tighten the definition and watch the labels shift, the prompt is your codebook.</a:t>
+            </a:r>
+            <a:endParaRPr lang="en-US" sz="1250" dirty="0"/>
+          </a:p>
+        </p:txBody>
+      </p:sp>
+      <p:sp>
+        <p:nvSpPr>
+          <p:cNvPr id="9" name="Shape 7"/>
+          <p:cNvSpPr/>
+          <p:nvPr/>
+        </p:nvSpPr>
+        <p:spPr>
+          <a:xfrm>
+            <a:off x="640080" y="2706624"/>
+            <a:ext cx="868680" cy="457200"/>
+          </a:xfrm>
+          <a:prstGeom prst="roundRect">
+            <a:avLst>
+              <a:gd name="adj" fmla="val 12000"/>
+            </a:avLst>
+          </a:prstGeom>
+          <a:solidFill>
+            <a:srgbClr val="7A3B2E"/>
+          </a:solidFill>
+          <a:ln/>
+        </p:spPr>
+      </p:sp>
+      <p:sp>
+        <p:nvSpPr>
+          <p:cNvPr id="10" name="Text 8"/>
+          <p:cNvSpPr/>
+          <p:nvPr/>
+        </p:nvSpPr>
+        <p:spPr>
+          <a:xfrm>
+            <a:off x="640080" y="2706624"/>
+            <a:ext cx="868680" cy="457200"/>
+          </a:xfrm>
+          <a:prstGeom prst="rect">
+            <a:avLst/>
+          </a:prstGeom>
+          <a:noFill/>
+          <a:ln/>
+        </p:spPr>
+        <p:txBody>
+          <a:bodyPr wrap="square" rtlCol="0" anchor="ctr"/>
+          <a:lstStyle/>
+          <a:p>
+            <a:pPr algn="ctr" indent="0" marL="0">
+              <a:buNone/>
+            </a:pPr>
+            <a:r>
+              <a:rPr lang="en-US" sz="1100" b="1" dirty="0">
+                <a:solidFill>
+                  <a:srgbClr val="FFFFFF"/>
+                </a:solidFill>
+                <a:latin typeface="Calibri" pitchFamily="34" charset="0"/>
+                <a:ea typeface="Calibri" pitchFamily="34" charset="-122"/>
+                <a:cs typeface="Calibri" pitchFamily="34" charset="-120"/>
+              </a:rPr>
+              <a:t>0:35</a:t>
+            </a:r>
+            <a:endParaRPr lang="en-US" sz="1100" dirty="0"/>
+          </a:p>
+        </p:txBody>
+      </p:sp>
+      <p:sp>
+        <p:nvSpPr>
+          <p:cNvPr id="11" name="Text 9"/>
+          <p:cNvSpPr/>
+          <p:nvPr/>
+        </p:nvSpPr>
+        <p:spPr>
+          <a:xfrm>
+            <a:off x="1691640" y="2688336"/>
+            <a:ext cx="9646920" cy="566928"/>
+          </a:xfrm>
+          <a:prstGeom prst="rect">
+            <a:avLst/>
+          </a:prstGeom>
+          <a:noFill/>
+          <a:ln/>
+        </p:spPr>
+        <p:txBody>
+          <a:bodyPr wrap="square" rtlCol="0" anchor="ctr">
+            <a:spAutoFit/>
+          </a:bodyPr>
+          <a:lstStyle/>
+          <a:p>
+            <a:pPr indent="0" marL="0">
+              <a:buNone/>
+            </a:pPr>
+            <a:r>
+              <a:rPr lang="en-US" sz="1250" dirty="0">
+                <a:solidFill>
+                  <a:srgbClr val="1A1A1A"/>
+                </a:solidFill>
+                <a:latin typeface="Calibri" pitchFamily="34" charset="0"/>
+                <a:ea typeface="Calibri" pitchFamily="34" charset="-122"/>
+                <a:cs typeface="Calibri" pitchFamily="34" charset="-120"/>
+              </a:rPr>
+              <a:t>Confidence, and when to trust it: ask the model not just what but how sure. Sort by confidence, trust the sure labels, hand-check the unsure ones, which is exactly which 30 to pull for Week 6.</a:t>
+            </a:r>
+            <a:endParaRPr lang="en-US" sz="1250" dirty="0"/>
+          </a:p>
+        </p:txBody>
+      </p:sp>
+      <p:sp>
+        <p:nvSpPr>
+          <p:cNvPr id="12" name="Shape 10"/>
+          <p:cNvSpPr/>
+          <p:nvPr/>
+        </p:nvSpPr>
+        <p:spPr>
+          <a:xfrm>
+            <a:off x="640080" y="3273552"/>
+            <a:ext cx="868680" cy="457200"/>
+          </a:xfrm>
+          <a:prstGeom prst="roundRect">
+            <a:avLst>
+              <a:gd name="adj" fmla="val 12000"/>
+            </a:avLst>
+          </a:prstGeom>
+          <a:solidFill>
+            <a:srgbClr val="7A3B2E"/>
+          </a:solidFill>
+          <a:ln/>
+        </p:spPr>
+      </p:sp>
+      <p:sp>
+        <p:nvSpPr>
+          <p:cNvPr id="13" name="Text 11"/>
+          <p:cNvSpPr/>
+          <p:nvPr/>
+        </p:nvSpPr>
+        <p:spPr>
+          <a:xfrm>
+            <a:off x="640080" y="3273552"/>
+            <a:ext cx="868680" cy="457200"/>
+          </a:xfrm>
+          <a:prstGeom prst="rect">
+            <a:avLst/>
+          </a:prstGeom>
+          <a:noFill/>
+          <a:ln/>
+        </p:spPr>
+        <p:txBody>
+          <a:bodyPr wrap="square" rtlCol="0" anchor="ctr"/>
+          <a:lstStyle/>
+          <a:p>
+            <a:pPr algn="ctr" indent="0" marL="0">
+              <a:buNone/>
+            </a:pPr>
+            <a:r>
+              <a:rPr lang="en-US" sz="1100" b="1" dirty="0">
+                <a:solidFill>
+                  <a:srgbClr val="FFFFFF"/>
+                </a:solidFill>
+                <a:latin typeface="Calibri" pitchFamily="34" charset="0"/>
+                <a:ea typeface="Calibri" pitchFamily="34" charset="-122"/>
+                <a:cs typeface="Calibri" pitchFamily="34" charset="-120"/>
+              </a:rPr>
+              <a:t>0:50</a:t>
+            </a:r>
+            <a:endParaRPr lang="en-US" sz="1100" dirty="0"/>
+          </a:p>
+        </p:txBody>
+      </p:sp>
+      <p:sp>
+        <p:nvSpPr>
+          <p:cNvPr id="14" name="Text 12"/>
+          <p:cNvSpPr/>
+          <p:nvPr/>
+        </p:nvSpPr>
+        <p:spPr>
+          <a:xfrm>
+            <a:off x="1691640" y="3255264"/>
+            <a:ext cx="9646920" cy="566928"/>
+          </a:xfrm>
+          <a:prstGeom prst="rect">
+            <a:avLst/>
+          </a:prstGeom>
+          <a:noFill/>
+          <a:ln/>
+        </p:spPr>
+        <p:txBody>
+          <a:bodyPr wrap="square" rtlCol="0" anchor="ctr">
+            <a:spAutoFit/>
+          </a:bodyPr>
+          <a:lstStyle/>
+          <a:p>
+            <a:pPr indent="0" marL="0">
+              <a:buNone/>
+            </a:pPr>
+            <a:r>
+              <a:rPr lang="en-US" sz="1250" dirty="0">
+                <a:solidFill>
+                  <a:srgbClr val="1A1A1A"/>
+                </a:solidFill>
+                <a:latin typeface="Calibri" pitchFamily="34" charset="0"/>
+                <a:ea typeface="Calibri" pitchFamily="34" charset="-122"/>
+                <a:cs typeface="Calibri" pitchFamily="34" charset="-120"/>
+              </a:rPr>
+              <a:t>Break</a:t>
+            </a:r>
+            <a:endParaRPr lang="en-US" sz="1250" dirty="0"/>
+          </a:p>
+        </p:txBody>
+      </p:sp>
+      <p:sp>
+        <p:nvSpPr>
+          <p:cNvPr id="15" name="Shape 13"/>
+          <p:cNvSpPr/>
+          <p:nvPr/>
+        </p:nvSpPr>
+        <p:spPr>
+          <a:xfrm>
+            <a:off x="640080" y="3840480"/>
+            <a:ext cx="868680" cy="457200"/>
+          </a:xfrm>
+          <a:prstGeom prst="roundRect">
+            <a:avLst>
+              <a:gd name="adj" fmla="val 12000"/>
+            </a:avLst>
+          </a:prstGeom>
+          <a:solidFill>
+            <a:srgbClr val="7A3B2E"/>
+          </a:solidFill>
+          <a:ln/>
+        </p:spPr>
+      </p:sp>
+      <p:sp>
+        <p:nvSpPr>
+          <p:cNvPr id="16" name="Text 14"/>
+          <p:cNvSpPr/>
+          <p:nvPr/>
+        </p:nvSpPr>
+        <p:spPr>
+          <a:xfrm>
+            <a:off x="640080" y="3840480"/>
+            <a:ext cx="868680" cy="457200"/>
+          </a:xfrm>
+          <a:prstGeom prst="rect">
+            <a:avLst/>
+          </a:prstGeom>
+          <a:noFill/>
+          <a:ln/>
+        </p:spPr>
+        <p:txBody>
+          <a:bodyPr wrap="square" rtlCol="0" anchor="ctr"/>
+          <a:lstStyle/>
+          <a:p>
+            <a:pPr algn="ctr" indent="0" marL="0">
+              <a:buNone/>
+            </a:pPr>
+            <a:r>
+              <a:rPr lang="en-US" sz="1100" b="1" dirty="0">
+                <a:solidFill>
+                  <a:srgbClr val="FFFFFF"/>
+                </a:solidFill>
+                <a:latin typeface="Calibri" pitchFamily="34" charset="0"/>
+                <a:ea typeface="Calibri" pitchFamily="34" charset="-122"/>
+                <a:cs typeface="Calibri" pitchFamily="34" charset="-120"/>
+              </a:rPr>
+              <a:t>1:00</a:t>
+            </a:r>
+            <a:endParaRPr lang="en-US" sz="1100" dirty="0"/>
+          </a:p>
+        </p:txBody>
+      </p:sp>
+      <p:sp>
+        <p:nvSpPr>
+          <p:cNvPr id="17" name="Text 15"/>
+          <p:cNvSpPr/>
+          <p:nvPr/>
+        </p:nvSpPr>
+        <p:spPr>
+          <a:xfrm>
+            <a:off x="1691640" y="3822192"/>
+            <a:ext cx="9646920" cy="566928"/>
+          </a:xfrm>
+          <a:prstGeom prst="rect">
+            <a:avLst/>
+          </a:prstGeom>
+          <a:noFill/>
+          <a:ln/>
+        </p:spPr>
+        <p:txBody>
+          <a:bodyPr wrap="square" rtlCol="0" anchor="ctr">
+            <a:spAutoFit/>
+          </a:bodyPr>
+          <a:lstStyle/>
+          <a:p>
+            <a:pPr indent="0" marL="0">
+              <a:buNone/>
+            </a:pPr>
+            <a:r>
+              <a:rPr lang="en-US" sz="1250" dirty="0">
+                <a:solidFill>
+                  <a:srgbClr val="1A1A1A"/>
+                </a:solidFill>
+                <a:latin typeface="Calibri" pitchFamily="34" charset="0"/>
+                <a:ea typeface="Calibri" pitchFamily="34" charset="-122"/>
+                <a:cs typeface="Calibri" pitchFamily="34" charset="-120"/>
+              </a:rPr>
+              <a:t>Accuracy check, then project workshop: run your prompt against a small hand-labeled gold set. Where does the AI disagree, and is it wrong or are you? Then build time on your corpus. Go further (optional, technically comfortable): instead of the closed API model, run an open model from Hugging Face, or fine-tune your own small classifier (ModernBERT) on the labels you just made, the third reader you own.</a:t>
+            </a:r>
+            <a:endParaRPr lang="en-US" sz="1250" dirty="0"/>
+          </a:p>
+        </p:txBody>
+      </p:sp>
+      <p:sp>
+        <p:nvSpPr>
+          <p:cNvPr id="18" name="Shape 16"/>
+          <p:cNvSpPr/>
+          <p:nvPr/>
+        </p:nvSpPr>
+        <p:spPr>
+          <a:xfrm>
+            <a:off x="640080" y="4407408"/>
+            <a:ext cx="868680" cy="457200"/>
+          </a:xfrm>
+          <a:prstGeom prst="roundRect">
+            <a:avLst>
+              <a:gd name="adj" fmla="val 12000"/>
+            </a:avLst>
+          </a:prstGeom>
+          <a:solidFill>
+            <a:srgbClr val="7A3B2E"/>
+          </a:solidFill>
+          <a:ln/>
+        </p:spPr>
+      </p:sp>
+      <p:sp>
+        <p:nvSpPr>
+          <p:cNvPr id="19" name="Text 17"/>
+          <p:cNvSpPr/>
+          <p:nvPr/>
+        </p:nvSpPr>
+        <p:spPr>
+          <a:xfrm>
+            <a:off x="640080" y="4407408"/>
+            <a:ext cx="868680" cy="457200"/>
+          </a:xfrm>
+          <a:prstGeom prst="rect">
+            <a:avLst/>
+          </a:prstGeom>
+          <a:noFill/>
+          <a:ln/>
+        </p:spPr>
+        <p:txBody>
+          <a:bodyPr wrap="square" rtlCol="0" anchor="ctr"/>
+          <a:lstStyle/>
+          <a:p>
+            <a:pPr algn="ctr" indent="0" marL="0">
+              <a:buNone/>
+            </a:pPr>
+            <a:r>
+              <a:rPr lang="en-US" sz="1100" b="1" dirty="0">
+                <a:solidFill>
+                  <a:srgbClr val="FFFFFF"/>
+                </a:solidFill>
+                <a:latin typeface="Calibri" pitchFamily="34" charset="0"/>
+                <a:ea typeface="Calibri" pitchFamily="34" charset="-122"/>
+                <a:cs typeface="Calibri" pitchFamily="34" charset="-120"/>
+              </a:rPr>
+              <a:t>1:50</a:t>
+            </a:r>
+            <a:endParaRPr lang="en-US" sz="1100" dirty="0"/>
+          </a:p>
+        </p:txBody>
+      </p:sp>
+      <p:sp>
+        <p:nvSpPr>
+          <p:cNvPr id="20" name="Text 18"/>
+          <p:cNvSpPr/>
+          <p:nvPr/>
+        </p:nvSpPr>
+        <p:spPr>
+          <a:xfrm>
+            <a:off x="1691640" y="4389120"/>
+            <a:ext cx="9646920" cy="566928"/>
+          </a:xfrm>
+          <a:prstGeom prst="rect">
+            <a:avLst/>
+          </a:prstGeom>
+          <a:noFill/>
+          <a:ln/>
+        </p:spPr>
+        <p:txBody>
+          <a:bodyPr wrap="square" rtlCol="0" anchor="ctr">
+            <a:spAutoFit/>
+          </a:bodyPr>
+          <a:lstStyle/>
+          <a:p>
+            <a:pPr indent="0" marL="0">
+              <a:buNone/>
+            </a:pPr>
+            <a:r>
+              <a:rPr lang="en-US" sz="1250" dirty="0">
+                <a:solidFill>
+                  <a:srgbClr val="1A1A1A"/>
+                </a:solidFill>
+                <a:latin typeface="Calibri" pitchFamily="34" charset="0"/>
+                <a:ea typeface="Calibri" pitchFamily="34" charset="-122"/>
+                <a:cs typeface="Calibri" pitchFamily="34" charset="-120"/>
+              </a:rPr>
+              <a:t>Gemini-free check and check-out.</a:t>
+            </a:r>
+            <a:endParaRPr lang="en-US" sz="1250" dirty="0"/>
+          </a:p>
+        </p:txBody>
+      </p:sp>
+    </p:spTree>
+  </p:cSld>
+  <p:clrMapOvr>
+    <a:masterClrMapping/>
+  </p:clrMapOvr>
+</p:sld>
+</file>
+
+<file path=ppt/slides/slide9.xml><?xml version="1.0" encoding="utf-8"?>
+<p:sld xmlns:a="http://schemas.openxmlformats.org/drawingml/2006/main" xmlns:r="http://schemas.openxmlformats.org/officeDocument/2006/relationships" xmlns:p="http://schemas.openxmlformats.org/presentationml/2006/main">
+  <p:cSld name="Slide 9">
+    <p:bg>
+      <p:bgPr>
+        <a:solidFill>
+          <a:srgbClr val="FFFFFF"/>
+        </a:solidFill>
+      </p:bgPr>
+    </p:bg>
+    <p:spTree>
+      <p:nvGrpSpPr>
+        <p:cNvPr id="1" name=""/>
+        <p:cNvGrpSpPr/>
+        <p:nvPr/>
+      </p:nvGrpSpPr>
+      <p:grpSpPr>
+        <a:xfrm>
+          <a:off x="0" y="0"/>
+          <a:ext cx="0" cy="0"/>
+          <a:chOff x="0" y="0"/>
+          <a:chExt cx="0" cy="0"/>
+        </a:xfrm>
+      </p:grpSpPr>
+      <p:sp>
+        <p:nvSpPr>
+          <p:cNvPr id="2" name="Text 0"/>
+          <p:cNvSpPr/>
+          <p:nvPr/>
+        </p:nvSpPr>
+        <p:spPr>
+          <a:xfrm>
+            <a:off x="640080" y="640080"/>
+            <a:ext cx="10058400" cy="731520"/>
+          </a:xfrm>
+          <a:prstGeom prst="rect">
+            <a:avLst/>
+          </a:prstGeom>
+          <a:noFill/>
+          <a:ln/>
+        </p:spPr>
+        <p:txBody>
+          <a:bodyPr wrap="square" rtlCol="0" anchor="ctr"/>
+          <a:lstStyle/>
+          <a:p>
+            <a:pPr indent="0" marL="0">
+              <a:buNone/>
+            </a:pPr>
+            <a:r>
+              <a:rPr lang="en-US" sz="3000" b="1" dirty="0">
+                <a:solidFill>
+                  <a:srgbClr val="1A1A1A"/>
+                </a:solidFill>
+                <a:latin typeface="Cambria" pitchFamily="34" charset="0"/>
+                <a:ea typeface="Cambria" pitchFamily="34" charset="-122"/>
+                <a:cs typeface="Cambria" pitchFamily="34" charset="-120"/>
+              </a:rPr>
+              <a:t>Reading &amp; homework</a:t>
+            </a:r>
+            <a:endParaRPr lang="en-US" sz="3000" dirty="0"/>
+          </a:p>
+        </p:txBody>
+      </p:sp>
+      <p:sp>
+        <p:nvSpPr>
+          <p:cNvPr id="3" name="Shape 1"/>
+          <p:cNvSpPr/>
+          <p:nvPr/>
+        </p:nvSpPr>
+        <p:spPr>
+          <a:xfrm>
+            <a:off x="640080" y="1810512"/>
+            <a:ext cx="219456" cy="219456"/>
+          </a:xfrm>
+          <a:prstGeom prst="ellipse">
+            <a:avLst/>
+          </a:prstGeom>
+          <a:solidFill>
+            <a:srgbClr val="7A3B2E"/>
+          </a:solidFill>
+          <a:ln/>
+        </p:spPr>
+      </p:sp>
+      <p:sp>
+        <p:nvSpPr>
+          <p:cNvPr id="4" name="Text 2"/>
+          <p:cNvSpPr/>
+          <p:nvPr/>
+        </p:nvSpPr>
+        <p:spPr>
+          <a:xfrm>
+            <a:off x="1051560" y="1737360"/>
+            <a:ext cx="10424160" cy="365760"/>
+          </a:xfrm>
+          <a:prstGeom prst="rect">
+            <a:avLst/>
+          </a:prstGeom>
+          <a:noFill/>
+          <a:ln/>
+        </p:spPr>
+        <p:txBody>
+          <a:bodyPr wrap="square" rtlCol="0" anchor="ctr"/>
+          <a:lstStyle/>
+          <a:p>
+            <a:pPr indent="0" marL="0">
+              <a:buNone/>
+            </a:pPr>
+            <a:r>
+              <a:rPr lang="en-US" sz="1500" b="1" dirty="0">
+                <a:solidFill>
+                  <a:srgbClr val="7A3B2E"/>
+                </a:solidFill>
+                <a:latin typeface="Calibri" pitchFamily="34" charset="0"/>
+                <a:ea typeface="Calibri" pitchFamily="34" charset="-122"/>
+                <a:cs typeface="Calibri" pitchFamily="34" charset="-120"/>
+              </a:rPr>
+              <a:t>Reading</a:t>
+            </a:r>
+            <a:endParaRPr lang="en-US" sz="1500" dirty="0"/>
+          </a:p>
+        </p:txBody>
+      </p:sp>
+      <p:sp>
+        <p:nvSpPr>
+          <p:cNvPr id="5" name="Text 3"/>
+          <p:cNvSpPr/>
+          <p:nvPr/>
+        </p:nvSpPr>
+        <p:spPr>
+          <a:xfrm>
+            <a:off x="1051560" y="2121408"/>
+            <a:ext cx="10424160" cy="731520"/>
           </a:xfrm>
           <a:prstGeom prst="rect">
             <a:avLst/>
@@ -4703,80 +6092,238 @@
           <a:lstStyle/>
           <a:p>
             <a:pPr indent="0" marL="0">
-              <a:lnSpc>
-                <a:spcPct val="115000"/>
-              </a:lnSpc>
-              <a:buNone/>
-            </a:pPr>
-            <a:r>
-              <a:rPr lang="en-US" sz="2600" dirty="0">
-                <a:solidFill>
-                  <a:srgbClr val="FFFFFF"/>
-                </a:solidFill>
-                <a:latin typeface="Cambria" pitchFamily="34" charset="0"/>
-                <a:ea typeface="Cambria" pitchFamily="34" charset="-122"/>
-                <a:cs typeface="Cambria" pitchFamily="34" charset="-120"/>
-              </a:rPr>
-              <a:t>Explain it: what is your labeling prompt deciding on your behalf, and how would you check whether to trust a given label? (Competencies 2, 5.)</a:t>
-            </a:r>
-            <a:endParaRPr lang="en-US" sz="2600" dirty="0"/>
-          </a:p>
-        </p:txBody>
-      </p:sp>
-      <p:sp>
-        <p:nvSpPr>
-          <p:cNvPr id="4" name="Text 2"/>
-          <p:cNvSpPr/>
-          <p:nvPr/>
-        </p:nvSpPr>
-        <p:spPr>
-          <a:xfrm>
-            <a:off x="640080" y="6126480"/>
-            <a:ext cx="7315200" cy="365760"/>
-          </a:xfrm>
-          <a:prstGeom prst="rect">
-            <a:avLst/>
-          </a:prstGeom>
-          <a:noFill/>
-          <a:ln/>
-        </p:spPr>
-        <p:txBody>
-          <a:bodyPr wrap="square" rtlCol="0" anchor="ctr"/>
-          <a:lstStyle/>
-          <a:p>
-            <a:pPr indent="0" marL="0">
-              <a:buNone/>
-            </a:pPr>
-            <a:r>
-              <a:rPr lang="en-US" sz="1200" dirty="0">
-                <a:solidFill>
-                  <a:srgbClr val="E8DCD6"/>
+              <a:buNone/>
+            </a:pPr>
+            <a:r>
+              <a:rPr lang="en-US" sz="1400" dirty="0">
+                <a:solidFill>
+                  <a:srgbClr val="1A1A1A"/>
                 </a:solidFill>
                 <a:latin typeface="Calibri" pitchFamily="34" charset="0"/>
                 <a:ea typeface="Calibri" pitchFamily="34" charset="-122"/>
                 <a:cs typeface="Calibri" pitchFamily="34" charset="-120"/>
               </a:rPr>
-              <a:t>Culture as Data  ·  Week 7</a:t>
-            </a:r>
-            <a:endParaRPr lang="en-US" sz="1200" dirty="0"/>
-          </a:p>
-        </p:txBody>
-      </p:sp>
-      <p:sp>
-        <p:nvSpPr>
-          <p:cNvPr id="5" name="Shape 3"/>
-          <p:cNvSpPr/>
-          <p:nvPr/>
-        </p:nvSpPr>
-        <p:spPr>
-          <a:xfrm>
-            <a:off x="10183884" y="4527301"/>
-            <a:ext cx="69797" cy="69797"/>
+              <a:t>NYT v. OpenAI, read against your Week 4 licensing conversation</a:t>
+            </a:r>
+            <a:endParaRPr lang="en-US" sz="1400" dirty="0"/>
+          </a:p>
+        </p:txBody>
+      </p:sp>
+      <p:sp>
+        <p:nvSpPr>
+          <p:cNvPr id="6" name="Shape 4"/>
+          <p:cNvSpPr/>
+          <p:nvPr/>
+        </p:nvSpPr>
+        <p:spPr>
+          <a:xfrm>
+            <a:off x="640080" y="2953512"/>
+            <a:ext cx="219456" cy="219456"/>
           </a:xfrm>
           <a:prstGeom prst="ellipse">
             <a:avLst/>
           </a:prstGeom>
           <a:solidFill>
+            <a:srgbClr val="3F6F5F"/>
+          </a:solidFill>
+          <a:ln/>
+        </p:spPr>
+      </p:sp>
+      <p:sp>
+        <p:nvSpPr>
+          <p:cNvPr id="7" name="Text 5"/>
+          <p:cNvSpPr/>
+          <p:nvPr/>
+        </p:nvSpPr>
+        <p:spPr>
+          <a:xfrm>
+            <a:off x="1051560" y="2880360"/>
+            <a:ext cx="10424160" cy="365760"/>
+          </a:xfrm>
+          <a:prstGeom prst="rect">
+            <a:avLst/>
+          </a:prstGeom>
+          <a:noFill/>
+          <a:ln/>
+        </p:spPr>
+        <p:txBody>
+          <a:bodyPr wrap="square" rtlCol="0" anchor="ctr"/>
+          <a:lstStyle/>
+          <a:p>
+            <a:pPr indent="0" marL="0">
+              <a:buNone/>
+            </a:pPr>
+            <a:r>
+              <a:rPr lang="en-US" sz="1500" b="1" dirty="0">
+                <a:solidFill>
+                  <a:srgbClr val="3F6F5F"/>
+                </a:solidFill>
+                <a:latin typeface="Calibri" pitchFamily="34" charset="0"/>
+                <a:ea typeface="Calibri" pitchFamily="34" charset="-122"/>
+                <a:cs typeface="Calibri" pitchFamily="34" charset="-120"/>
+              </a:rPr>
+              <a:t>Supplement</a:t>
+            </a:r>
+            <a:endParaRPr lang="en-US" sz="1500" dirty="0"/>
+          </a:p>
+        </p:txBody>
+      </p:sp>
+      <p:sp>
+        <p:nvSpPr>
+          <p:cNvPr id="8" name="Text 6"/>
+          <p:cNvSpPr/>
+          <p:nvPr/>
+        </p:nvSpPr>
+        <p:spPr>
+          <a:xfrm>
+            <a:off x="1051560" y="3264408"/>
+            <a:ext cx="10424160" cy="731520"/>
+          </a:xfrm>
+          <a:prstGeom prst="rect">
+            <a:avLst/>
+          </a:prstGeom>
+          <a:noFill/>
+          <a:ln/>
+        </p:spPr>
+        <p:txBody>
+          <a:bodyPr wrap="square" rtlCol="0" anchor="t">
+            <a:spAutoFit/>
+          </a:bodyPr>
+          <a:lstStyle/>
+          <a:p>
+            <a:pPr indent="0" marL="0">
+              <a:buNone/>
+            </a:pPr>
+            <a:r>
+              <a:rPr lang="en-US" sz="1400" dirty="0">
+                <a:solidFill>
+                  <a:srgbClr val="1A1A1A"/>
+                </a:solidFill>
+                <a:latin typeface="Calibri" pitchFamily="34" charset="0"/>
+                <a:ea typeface="Calibri" pitchFamily="34" charset="-122"/>
+                <a:cs typeface="Calibri" pitchFamily="34" charset="-120"/>
+              </a:rPr>
+              <a:t>Gilardi et al., full; Bamman et al., LLM classification in cultural analytics (CHR 2024)</a:t>
+            </a:r>
+            <a:endParaRPr lang="en-US" sz="1400" dirty="0"/>
+          </a:p>
+        </p:txBody>
+      </p:sp>
+      <p:sp>
+        <p:nvSpPr>
+          <p:cNvPr id="9" name="Shape 7"/>
+          <p:cNvSpPr/>
+          <p:nvPr/>
+        </p:nvSpPr>
+        <p:spPr>
+          <a:xfrm>
+            <a:off x="640080" y="4096512"/>
+            <a:ext cx="219456" cy="219456"/>
+          </a:xfrm>
+          <a:prstGeom prst="ellipse">
+            <a:avLst/>
+          </a:prstGeom>
+          <a:solidFill>
+            <a:srgbClr val="B9852F"/>
+          </a:solidFill>
+          <a:ln/>
+        </p:spPr>
+      </p:sp>
+      <p:sp>
+        <p:nvSpPr>
+          <p:cNvPr id="10" name="Text 8"/>
+          <p:cNvSpPr/>
+          <p:nvPr/>
+        </p:nvSpPr>
+        <p:spPr>
+          <a:xfrm>
+            <a:off x="1051560" y="4023360"/>
+            <a:ext cx="10424160" cy="365760"/>
+          </a:xfrm>
+          <a:prstGeom prst="rect">
+            <a:avLst/>
+          </a:prstGeom>
+          <a:noFill/>
+          <a:ln/>
+        </p:spPr>
+        <p:txBody>
+          <a:bodyPr wrap="square" rtlCol="0" anchor="ctr"/>
+          <a:lstStyle/>
+          <a:p>
+            <a:pPr indent="0" marL="0">
+              <a:buNone/>
+            </a:pPr>
+            <a:r>
+              <a:rPr lang="en-US" sz="1500" b="1" dirty="0">
+                <a:solidFill>
+                  <a:srgbClr val="B9852F"/>
+                </a:solidFill>
+                <a:latin typeface="Calibri" pitchFamily="34" charset="0"/>
+                <a:ea typeface="Calibri" pitchFamily="34" charset="-122"/>
+                <a:cs typeface="Calibri" pitchFamily="34" charset="-120"/>
+              </a:rPr>
+              <a:t>Sketch</a:t>
+            </a:r>
+            <a:endParaRPr lang="en-US" sz="1500" dirty="0"/>
+          </a:p>
+        </p:txBody>
+      </p:sp>
+      <p:sp>
+        <p:nvSpPr>
+          <p:cNvPr id="11" name="Text 9"/>
+          <p:cNvSpPr/>
+          <p:nvPr/>
+        </p:nvSpPr>
+        <p:spPr>
+          <a:xfrm>
+            <a:off x="1051560" y="4407408"/>
+            <a:ext cx="10424160" cy="731520"/>
+          </a:xfrm>
+          <a:prstGeom prst="rect">
+            <a:avLst/>
+          </a:prstGeom>
+          <a:noFill/>
+          <a:ln/>
+        </p:spPr>
+        <p:txBody>
+          <a:bodyPr wrap="square" rtlCol="0" anchor="t">
+            <a:spAutoFit/>
+          </a:bodyPr>
+          <a:lstStyle/>
+          <a:p>
+            <a:pPr indent="0" marL="0">
+              <a:buNone/>
+            </a:pPr>
+            <a:r>
+              <a:rPr lang="en-US" sz="1400" dirty="0">
+                <a:solidFill>
+                  <a:srgbClr val="1A1A1A"/>
+                </a:solidFill>
+                <a:latin typeface="Calibri" pitchFamily="34" charset="0"/>
+                <a:ea typeface="Calibri" pitchFamily="34" charset="-122"/>
+                <a:cs typeface="Calibri" pitchFamily="34" charset="-120"/>
+              </a:rPr>
+              <a:t>Show one label the AI got confidently wrong and one it nailed; say how you knew.</a:t>
+            </a:r>
+            <a:endParaRPr lang="en-US" sz="1400" dirty="0"/>
+          </a:p>
+        </p:txBody>
+      </p:sp>
+      <p:sp>
+        <p:nvSpPr>
+          <p:cNvPr id="12" name="Shape 10"/>
+          <p:cNvSpPr/>
+          <p:nvPr/>
+        </p:nvSpPr>
+        <p:spPr>
+          <a:xfrm>
+            <a:off x="640080" y="5239512"/>
+            <a:ext cx="219456" cy="219456"/>
+          </a:xfrm>
+          <a:prstGeom prst="ellipse">
+            <a:avLst/>
+          </a:prstGeom>
+          <a:solidFill>
             <a:srgbClr val="7A3B2E"/>
           </a:solidFill>
           <a:ln/>
@@ -4784,263 +6331,83 @@
       </p:sp>
       <p:sp>
         <p:nvSpPr>
-          <p:cNvPr id="6" name="Shape 4"/>
-          <p:cNvSpPr/>
-          <p:nvPr/>
-        </p:nvSpPr>
-        <p:spPr>
-          <a:xfrm>
-            <a:off x="11301291" y="4978554"/>
-            <a:ext cx="58604" cy="58604"/>
-          </a:xfrm>
-          <a:prstGeom prst="ellipse">
-            <a:avLst/>
-          </a:prstGeom>
-          <a:solidFill>
-            <a:srgbClr val="3F6F5F"/>
-          </a:solidFill>
-          <a:ln/>
-        </p:spPr>
-      </p:sp>
-      <p:sp>
-        <p:nvSpPr>
-          <p:cNvPr id="7" name="Shape 5"/>
-          <p:cNvSpPr/>
-          <p:nvPr/>
-        </p:nvSpPr>
-        <p:spPr>
-          <a:xfrm>
-            <a:off x="10279171" y="4798406"/>
-            <a:ext cx="89957" cy="89957"/>
-          </a:xfrm>
-          <a:prstGeom prst="ellipse">
-            <a:avLst/>
-          </a:prstGeom>
-          <a:solidFill>
-            <a:srgbClr val="B9852F"/>
-          </a:solidFill>
-          <a:ln/>
-        </p:spPr>
-      </p:sp>
-      <p:sp>
-        <p:nvSpPr>
-          <p:cNvPr id="8" name="Shape 6"/>
-          <p:cNvSpPr/>
-          <p:nvPr/>
-        </p:nvSpPr>
-        <p:spPr>
-          <a:xfrm>
-            <a:off x="10744645" y="4710756"/>
-            <a:ext cx="76987" cy="76987"/>
-          </a:xfrm>
-          <a:prstGeom prst="ellipse">
-            <a:avLst/>
-          </a:prstGeom>
-          <a:solidFill>
-            <a:srgbClr val="7A3B2E"/>
-          </a:solidFill>
-          <a:ln/>
-        </p:spPr>
-      </p:sp>
-      <p:sp>
-        <p:nvSpPr>
-          <p:cNvPr id="9" name="Shape 7"/>
-          <p:cNvSpPr/>
-          <p:nvPr/>
-        </p:nvSpPr>
-        <p:spPr>
-          <a:xfrm>
-            <a:off x="11204192" y="5439504"/>
-            <a:ext cx="97418" cy="97418"/>
-          </a:xfrm>
-          <a:prstGeom prst="ellipse">
-            <a:avLst/>
-          </a:prstGeom>
-          <a:solidFill>
-            <a:srgbClr val="3F6F5F"/>
-          </a:solidFill>
-          <a:ln/>
-        </p:spPr>
-      </p:sp>
-      <p:sp>
-        <p:nvSpPr>
-          <p:cNvPr id="10" name="Shape 8"/>
-          <p:cNvSpPr/>
-          <p:nvPr/>
-        </p:nvSpPr>
-        <p:spPr>
-          <a:xfrm>
-            <a:off x="10164293" y="5971191"/>
-            <a:ext cx="64381" cy="64381"/>
-          </a:xfrm>
-          <a:prstGeom prst="ellipse">
-            <a:avLst/>
-          </a:prstGeom>
-          <a:solidFill>
-            <a:srgbClr val="B9852F"/>
-          </a:solidFill>
-          <a:ln/>
-        </p:spPr>
-      </p:sp>
-      <p:sp>
-        <p:nvSpPr>
-          <p:cNvPr id="11" name="Shape 9"/>
-          <p:cNvSpPr/>
-          <p:nvPr/>
-        </p:nvSpPr>
-        <p:spPr>
-          <a:xfrm>
-            <a:off x="11252067" y="5292356"/>
-            <a:ext cx="55602" cy="55602"/>
-          </a:xfrm>
-          <a:prstGeom prst="ellipse">
-            <a:avLst/>
-          </a:prstGeom>
-          <a:solidFill>
-            <a:srgbClr val="7A3B2E"/>
-          </a:solidFill>
-          <a:ln/>
-        </p:spPr>
-      </p:sp>
-      <p:sp>
-        <p:nvSpPr>
-          <p:cNvPr id="12" name="Shape 10"/>
-          <p:cNvSpPr/>
-          <p:nvPr/>
-        </p:nvSpPr>
-        <p:spPr>
-          <a:xfrm>
-            <a:off x="10413674" y="5864259"/>
-            <a:ext cx="93940" cy="93940"/>
-          </a:xfrm>
-          <a:prstGeom prst="ellipse">
-            <a:avLst/>
-          </a:prstGeom>
-          <a:solidFill>
-            <a:srgbClr val="3F6F5F"/>
-          </a:solidFill>
-          <a:ln/>
-        </p:spPr>
-      </p:sp>
-      <p:sp>
-        <p:nvSpPr>
-          <p:cNvPr id="13" name="Shape 11"/>
-          <p:cNvSpPr/>
-          <p:nvPr/>
-        </p:nvSpPr>
-        <p:spPr>
-          <a:xfrm>
-            <a:off x="11276234" y="4936081"/>
-            <a:ext cx="92527" cy="92527"/>
-          </a:xfrm>
-          <a:prstGeom prst="ellipse">
-            <a:avLst/>
-          </a:prstGeom>
-          <a:solidFill>
-            <a:srgbClr val="B9852F"/>
-          </a:solidFill>
-          <a:ln/>
-        </p:spPr>
-      </p:sp>
-      <p:sp>
-        <p:nvSpPr>
-          <p:cNvPr id="14" name="Shape 12"/>
-          <p:cNvSpPr/>
-          <p:nvPr/>
-        </p:nvSpPr>
-        <p:spPr>
-          <a:xfrm>
-            <a:off x="9785908" y="4969081"/>
-            <a:ext cx="74223" cy="74223"/>
-          </a:xfrm>
-          <a:prstGeom prst="ellipse">
-            <a:avLst/>
-          </a:prstGeom>
-          <a:solidFill>
-            <a:srgbClr val="7A3B2E"/>
-          </a:solidFill>
-          <a:ln/>
-        </p:spPr>
-      </p:sp>
-      <p:sp>
-        <p:nvSpPr>
-          <p:cNvPr id="15" name="Shape 13"/>
-          <p:cNvSpPr/>
-          <p:nvPr/>
-        </p:nvSpPr>
-        <p:spPr>
-          <a:xfrm>
-            <a:off x="9569815" y="4949799"/>
-            <a:ext cx="61887" cy="61887"/>
-          </a:xfrm>
-          <a:prstGeom prst="ellipse">
-            <a:avLst/>
-          </a:prstGeom>
-          <a:solidFill>
-            <a:srgbClr val="3F6F5F"/>
-          </a:solidFill>
-          <a:ln/>
-        </p:spPr>
-      </p:sp>
-      <p:sp>
-        <p:nvSpPr>
-          <p:cNvPr id="16" name="Shape 14"/>
-          <p:cNvSpPr/>
-          <p:nvPr/>
-        </p:nvSpPr>
-        <p:spPr>
-          <a:xfrm>
-            <a:off x="9134436" y="5602136"/>
-            <a:ext cx="78381" cy="78381"/>
-          </a:xfrm>
-          <a:prstGeom prst="ellipse">
-            <a:avLst/>
-          </a:prstGeom>
-          <a:solidFill>
-            <a:srgbClr val="B9852F"/>
-          </a:solidFill>
-          <a:ln/>
-        </p:spPr>
-      </p:sp>
-      <p:sp>
-        <p:nvSpPr>
-          <p:cNvPr id="17" name="Shape 15"/>
-          <p:cNvSpPr/>
-          <p:nvPr/>
-        </p:nvSpPr>
-        <p:spPr>
-          <a:xfrm>
-            <a:off x="9546570" y="5912631"/>
-            <a:ext cx="91700" cy="91700"/>
-          </a:xfrm>
-          <a:prstGeom prst="ellipse">
-            <a:avLst/>
-          </a:prstGeom>
-          <a:solidFill>
-            <a:srgbClr val="7A3B2E"/>
-          </a:solidFill>
-          <a:ln/>
-        </p:spPr>
-      </p:sp>
-      <p:sp>
-        <p:nvSpPr>
-          <p:cNvPr id="18" name="Shape 16"/>
-          <p:cNvSpPr/>
-          <p:nvPr/>
-        </p:nvSpPr>
-        <p:spPr>
-          <a:xfrm>
-            <a:off x="9312697" y="4867824"/>
-            <a:ext cx="69840" cy="69840"/>
-          </a:xfrm>
-          <a:prstGeom prst="ellipse">
-            <a:avLst/>
-          </a:prstGeom>
-          <a:solidFill>
-            <a:srgbClr val="3F6F5F"/>
-          </a:solidFill>
-          <a:ln/>
-        </p:spPr>
+          <p:cNvPr id="13" name="Text 11"/>
+          <p:cNvSpPr/>
+          <p:nvPr/>
+        </p:nvSpPr>
+        <p:spPr>
+          <a:xfrm>
+            <a:off x="1051560" y="5166360"/>
+            <a:ext cx="10424160" cy="365760"/>
+          </a:xfrm>
+          <a:prstGeom prst="rect">
+            <a:avLst/>
+          </a:prstGeom>
+          <a:noFill/>
+          <a:ln/>
+        </p:spPr>
+        <p:txBody>
+          <a:bodyPr wrap="square" rtlCol="0" anchor="ctr"/>
+          <a:lstStyle/>
+          <a:p>
+            <a:pPr indent="0" marL="0">
+              <a:buNone/>
+            </a:pPr>
+            <a:r>
+              <a:rPr lang="en-US" sz="1500" b="1" dirty="0">
+                <a:solidFill>
+                  <a:srgbClr val="7A3B2E"/>
+                </a:solidFill>
+                <a:latin typeface="Calibri" pitchFamily="34" charset="0"/>
+                <a:ea typeface="Calibri" pitchFamily="34" charset="-122"/>
+                <a:cs typeface="Calibri" pitchFamily="34" charset="-120"/>
+              </a:rPr>
+              <a:t>Check (AI closed)</a:t>
+            </a:r>
+            <a:endParaRPr lang="en-US" sz="1500" dirty="0"/>
+          </a:p>
+        </p:txBody>
+      </p:sp>
+      <p:sp>
+        <p:nvSpPr>
+          <p:cNvPr id="14" name="Text 12"/>
+          <p:cNvSpPr/>
+          <p:nvPr/>
+        </p:nvSpPr>
+        <p:spPr>
+          <a:xfrm>
+            <a:off x="1051560" y="5550408"/>
+            <a:ext cx="10424160" cy="731520"/>
+          </a:xfrm>
+          <a:prstGeom prst="rect">
+            <a:avLst/>
+          </a:prstGeom>
+          <a:noFill/>
+          <a:ln/>
+        </p:spPr>
+        <p:txBody>
+          <a:bodyPr wrap="square" rtlCol="0" anchor="t">
+            <a:spAutoFit/>
+          </a:bodyPr>
+          <a:lstStyle/>
+          <a:p>
+            <a:pPr indent="0" marL="0">
+              <a:buNone/>
+            </a:pPr>
+            <a:r>
+              <a:rPr lang="en-US" sz="1400" dirty="0">
+                <a:solidFill>
+                  <a:srgbClr val="1A1A1A"/>
+                </a:solidFill>
+                <a:latin typeface="Calibri" pitchFamily="34" charset="0"/>
+                <a:ea typeface="Calibri" pitchFamily="34" charset="-122"/>
+                <a:cs typeface="Calibri" pitchFamily="34" charset="-120"/>
+              </a:rPr>
+              <a:t>Explain it: what is your labeling prompt deciding on your behalf, and how would you check whether to trust a given label? (Competencies 2, 5.)</a:t>
+            </a:r>
+            <a:endParaRPr lang="en-US" sz="1400" dirty="0"/>
+          </a:p>
+        </p:txBody>
       </p:sp>
     </p:spTree>
   </p:cSld>

--- a/slides/pptx/week-07.pptx
+++ b/slides/pptx/week-07.pptx
@@ -3755,7 +3755,7 @@
                 <a:ea typeface="Calibri" pitchFamily="34" charset="-122"/>
                 <a:cs typeface="Calibri" pitchFamily="34" charset="-120"/>
               </a:rPr>
-              <a:t>WEEK 7 · THE MATERIAL</a:t>
+              <a:t>WEEK 7 · KEY POINTS</a:t>
             </a:r>
             <a:endParaRPr lang="en-US" sz="1200" dirty="0"/>
           </a:p>
@@ -4143,7 +4143,7 @@
                 <a:ea typeface="Calibri" pitchFamily="34" charset="-122"/>
                 <a:cs typeface="Calibri" pitchFamily="34" charset="-120"/>
               </a:rPr>
-              <a:t>WEEK 7 · THE MATERIAL</a:t>
+              <a:t>WEEK 7 · KEY POINTS</a:t>
             </a:r>
             <a:endParaRPr lang="en-US" sz="1200" dirty="0"/>
           </a:p>
@@ -4531,7 +4531,7 @@
                 <a:ea typeface="Calibri" pitchFamily="34" charset="-122"/>
                 <a:cs typeface="Calibri" pitchFamily="34" charset="-120"/>
               </a:rPr>
-              <a:t>WEEK 7 · THE MATERIAL</a:t>
+              <a:t>WEEK 7 · KEY POINTS</a:t>
             </a:r>
             <a:endParaRPr lang="en-US" sz="1200" dirty="0"/>
           </a:p>

--- a/slides/pptx/week-07.pptx
+++ b/slides/pptx/week-07.pptx
@@ -5626,7 +5626,7 @@
                 <a:ea typeface="Calibri" pitchFamily="34" charset="-122"/>
                 <a:cs typeface="Calibri" pitchFamily="34" charset="-120"/>
               </a:rPr>
-              <a:t>Confidence, and when to trust it: ask the model not just what but how sure. Sort by confidence, trust the sure labels, hand-check the unsure ones, which is exactly which 30 to pull for Week 6.</a:t>
+              <a:t>Confidence, and when to trust it: ask the model not just what but how sure. Sort by confidence, trust the labels the model is sure of, and hand-check the unsure ones.</a:t>
             </a:r>
             <a:endParaRPr lang="en-US" sz="1250" dirty="0"/>
           </a:p>

--- a/slides/pptx/week-07.pptx
+++ b/slides/pptx/week-07.pptx
@@ -6017,7 +6017,7 @@
         </p:nvSpPr>
         <p:spPr>
           <a:xfrm>
-            <a:off x="640080" y="1810512"/>
+            <a:off x="640080" y="1673352"/>
             <a:ext cx="219456" cy="219456"/>
           </a:xfrm>
           <a:prstGeom prst="ellipse">
@@ -6037,7 +6037,7 @@
         </p:nvSpPr>
         <p:spPr>
           <a:xfrm>
-            <a:off x="1051560" y="1737360"/>
+            <a:off x="1051560" y="1600200"/>
             <a:ext cx="10424160" cy="365760"/>
           </a:xfrm>
           <a:prstGeom prst="rect">
@@ -6076,7 +6076,7 @@
         </p:nvSpPr>
         <p:spPr>
           <a:xfrm>
-            <a:off x="1051560" y="2121408"/>
+            <a:off x="1051560" y="1984248"/>
             <a:ext cx="10424160" cy="731520"/>
           </a:xfrm>
           <a:prstGeom prst="rect">
@@ -6117,7 +6117,7 @@
         </p:nvSpPr>
         <p:spPr>
           <a:xfrm>
-            <a:off x="640080" y="2953512"/>
+            <a:off x="640080" y="2633472"/>
             <a:ext cx="219456" cy="219456"/>
           </a:xfrm>
           <a:prstGeom prst="ellipse">
@@ -6137,7 +6137,7 @@
         </p:nvSpPr>
         <p:spPr>
           <a:xfrm>
-            <a:off x="1051560" y="2880360"/>
+            <a:off x="1051560" y="2560320"/>
             <a:ext cx="10424160" cy="365760"/>
           </a:xfrm>
           <a:prstGeom prst="rect">
@@ -6176,7 +6176,7 @@
         </p:nvSpPr>
         <p:spPr>
           <a:xfrm>
-            <a:off x="1051560" y="3264408"/>
+            <a:off x="1051560" y="2944368"/>
             <a:ext cx="10424160" cy="731520"/>
           </a:xfrm>
           <a:prstGeom prst="rect">
@@ -6217,7 +6217,7 @@
         </p:nvSpPr>
         <p:spPr>
           <a:xfrm>
-            <a:off x="640080" y="4096512"/>
+            <a:off x="640080" y="3593592"/>
             <a:ext cx="219456" cy="219456"/>
           </a:xfrm>
           <a:prstGeom prst="ellipse">
@@ -6237,7 +6237,7 @@
         </p:nvSpPr>
         <p:spPr>
           <a:xfrm>
-            <a:off x="1051560" y="4023360"/>
+            <a:off x="1051560" y="3520440"/>
             <a:ext cx="10424160" cy="365760"/>
           </a:xfrm>
           <a:prstGeom prst="rect">
@@ -6262,7 +6262,7 @@
                 <a:ea typeface="Calibri" pitchFamily="34" charset="-122"/>
                 <a:cs typeface="Calibri" pitchFamily="34" charset="-120"/>
               </a:rPr>
-              <a:t>Sketch</a:t>
+              <a:t>Deeper (optional)</a:t>
             </a:r>
             <a:endParaRPr lang="en-US" sz="1500" dirty="0"/>
           </a:p>
@@ -6276,7 +6276,7 @@
         </p:nvSpPr>
         <p:spPr>
           <a:xfrm>
-            <a:off x="1051560" y="4407408"/>
+            <a:off x="1051560" y="3904488"/>
             <a:ext cx="10424160" cy="731520"/>
           </a:xfrm>
           <a:prstGeom prst="rect">
@@ -6303,7 +6303,7 @@
                 <a:ea typeface="Calibri" pitchFamily="34" charset="-122"/>
                 <a:cs typeface="Calibri" pitchFamily="34" charset="-120"/>
               </a:rPr>
-              <a:t>Show one label the AI got confidently wrong and one it nailed; say how you knew.</a:t>
+              <a:t>Ziems et al., Can LLMs Transform Computational Social Science? (CL 2024), the systematic evaluation behind this week's method</a:t>
             </a:r>
             <a:endParaRPr lang="en-US" sz="1400" dirty="0"/>
           </a:p>
@@ -6317,14 +6317,14 @@
         </p:nvSpPr>
         <p:spPr>
           <a:xfrm>
-            <a:off x="640080" y="5239512"/>
+            <a:off x="640080" y="4553712"/>
             <a:ext cx="219456" cy="219456"/>
           </a:xfrm>
           <a:prstGeom prst="ellipse">
             <a:avLst/>
           </a:prstGeom>
           <a:solidFill>
-            <a:srgbClr val="7A3B2E"/>
+            <a:srgbClr val="3F6F5F"/>
           </a:solidFill>
           <a:ln/>
         </p:spPr>
@@ -6337,7 +6337,7 @@
         </p:nvSpPr>
         <p:spPr>
           <a:xfrm>
-            <a:off x="1051560" y="5166360"/>
+            <a:off x="1051560" y="4480560"/>
             <a:ext cx="10424160" cy="365760"/>
           </a:xfrm>
           <a:prstGeom prst="rect">
@@ -6356,12 +6356,112 @@
             <a:r>
               <a:rPr lang="en-US" sz="1500" b="1" dirty="0">
                 <a:solidFill>
-                  <a:srgbClr val="7A3B2E"/>
+                  <a:srgbClr val="3F6F5F"/>
                 </a:solidFill>
                 <a:latin typeface="Calibri" pitchFamily="34" charset="0"/>
                 <a:ea typeface="Calibri" pitchFamily="34" charset="-122"/>
                 <a:cs typeface="Calibri" pitchFamily="34" charset="-120"/>
               </a:rPr>
+              <a:t>Sketch</a:t>
+            </a:r>
+            <a:endParaRPr lang="en-US" sz="1500" dirty="0"/>
+          </a:p>
+        </p:txBody>
+      </p:sp>
+      <p:sp>
+        <p:nvSpPr>
+          <p:cNvPr id="14" name="Text 12"/>
+          <p:cNvSpPr/>
+          <p:nvPr/>
+        </p:nvSpPr>
+        <p:spPr>
+          <a:xfrm>
+            <a:off x="1051560" y="4864608"/>
+            <a:ext cx="10424160" cy="731520"/>
+          </a:xfrm>
+          <a:prstGeom prst="rect">
+            <a:avLst/>
+          </a:prstGeom>
+          <a:noFill/>
+          <a:ln/>
+        </p:spPr>
+        <p:txBody>
+          <a:bodyPr wrap="square" rtlCol="0" anchor="t">
+            <a:spAutoFit/>
+          </a:bodyPr>
+          <a:lstStyle/>
+          <a:p>
+            <a:pPr indent="0" marL="0">
+              <a:buNone/>
+            </a:pPr>
+            <a:r>
+              <a:rPr lang="en-US" sz="1400" dirty="0">
+                <a:solidFill>
+                  <a:srgbClr val="1A1A1A"/>
+                </a:solidFill>
+                <a:latin typeface="Calibri" pitchFamily="34" charset="0"/>
+                <a:ea typeface="Calibri" pitchFamily="34" charset="-122"/>
+                <a:cs typeface="Calibri" pitchFamily="34" charset="-120"/>
+              </a:rPr>
+              <a:t>Show one label the AI got confidently wrong and one it nailed; say how you knew.</a:t>
+            </a:r>
+            <a:endParaRPr lang="en-US" sz="1400" dirty="0"/>
+          </a:p>
+        </p:txBody>
+      </p:sp>
+      <p:sp>
+        <p:nvSpPr>
+          <p:cNvPr id="15" name="Shape 13"/>
+          <p:cNvSpPr/>
+          <p:nvPr/>
+        </p:nvSpPr>
+        <p:spPr>
+          <a:xfrm>
+            <a:off x="640080" y="5513832"/>
+            <a:ext cx="219456" cy="219456"/>
+          </a:xfrm>
+          <a:prstGeom prst="ellipse">
+            <a:avLst/>
+          </a:prstGeom>
+          <a:solidFill>
+            <a:srgbClr val="7A3B2E"/>
+          </a:solidFill>
+          <a:ln/>
+        </p:spPr>
+      </p:sp>
+      <p:sp>
+        <p:nvSpPr>
+          <p:cNvPr id="16" name="Text 14"/>
+          <p:cNvSpPr/>
+          <p:nvPr/>
+        </p:nvSpPr>
+        <p:spPr>
+          <a:xfrm>
+            <a:off x="1051560" y="5440680"/>
+            <a:ext cx="10424160" cy="365760"/>
+          </a:xfrm>
+          <a:prstGeom prst="rect">
+            <a:avLst/>
+          </a:prstGeom>
+          <a:noFill/>
+          <a:ln/>
+        </p:spPr>
+        <p:txBody>
+          <a:bodyPr wrap="square" rtlCol="0" anchor="ctr"/>
+          <a:lstStyle/>
+          <a:p>
+            <a:pPr indent="0" marL="0">
+              <a:buNone/>
+            </a:pPr>
+            <a:r>
+              <a:rPr lang="en-US" sz="1500" b="1" dirty="0">
+                <a:solidFill>
+                  <a:srgbClr val="7A3B2E"/>
+                </a:solidFill>
+                <a:latin typeface="Calibri" pitchFamily="34" charset="0"/>
+                <a:ea typeface="Calibri" pitchFamily="34" charset="-122"/>
+                <a:cs typeface="Calibri" pitchFamily="34" charset="-120"/>
+              </a:rPr>
               <a:t>Check (AI closed)</a:t>
             </a:r>
             <a:endParaRPr lang="en-US" sz="1500" dirty="0"/>
@@ -6370,13 +6470,13 @@
       </p:sp>
       <p:sp>
         <p:nvSpPr>
-          <p:cNvPr id="14" name="Text 12"/>
-          <p:cNvSpPr/>
-          <p:nvPr/>
-        </p:nvSpPr>
-        <p:spPr>
-          <a:xfrm>
-            <a:off x="1051560" y="5550408"/>
+          <p:cNvPr id="17" name="Text 15"/>
+          <p:cNvSpPr/>
+          <p:nvPr/>
+        </p:nvSpPr>
+        <p:spPr>
+          <a:xfrm>
+            <a:off x="1051560" y="5824728"/>
             <a:ext cx="10424160" cy="731520"/>
           </a:xfrm>
           <a:prstGeom prst="rect">
